--- a/reports/exp2_vit_cifar10.pptx
+++ b/reports/exp2_vit_cifar10.pptx
@@ -3091,7 +3091,7 @@
     <p:bg>
       <p:bgPr>
         <a:solidFill>
-          <a:srgbClr val="1F497D"/>
+          <a:srgbClr val="1A335C"/>
         </a:solidFill>
         <a:effectLst/>
       </p:bgPr>
@@ -3112,13 +3112,13 @@
         <p:spPr>
           <a:xfrm>
             <a:off x="0" y="0"/>
-            <a:ext cx="12188952" cy="137160"/>
+            <a:ext cx="164592" cy="6858000"/>
           </a:xfrm>
           <a:prstGeom prst="rect">
             <a:avLst/>
           </a:prstGeom>
           <a:solidFill>
-            <a:srgbClr val="C89620"/>
+            <a:srgbClr val="B8860B"/>
           </a:solidFill>
           <a:ln>
             <a:noFill/>
@@ -3146,22 +3146,80 @@
           </a:p>
         </p:txBody>
       </p:sp>
-      <p:sp>
-        <p:nvSpPr>
-          <p:cNvPr id="3" name="Rectangle 2"/>
+      <p:pic>
+        <p:nvPicPr>
+          <p:cNvPr id="3" name="Picture 2" descr="ucas_seal.png"/>
+          <p:cNvPicPr>
+            <a:picLocks noChangeAspect="1"/>
+          </p:cNvPicPr>
+          <p:nvPr/>
+        </p:nvPicPr>
+        <p:blipFill>
+          <a:blip r:embed="rId2"/>
+          <a:stretch>
+            <a:fillRect/>
+          </a:stretch>
+        </p:blipFill>
+        <p:spPr>
+          <a:xfrm>
+            <a:off x="10771632" y="228600"/>
+            <a:ext cx="1188720" cy="1069848"/>
+          </a:xfrm>
+          <a:prstGeom prst="rect">
+            <a:avLst/>
+          </a:prstGeom>
+        </p:spPr>
+      </p:pic>
+      <p:sp>
+        <p:nvSpPr>
+          <p:cNvPr id="4" name="TextBox 3"/>
+          <p:cNvSpPr txBox="1"/>
+          <p:nvPr/>
+        </p:nvSpPr>
+        <p:spPr>
+          <a:xfrm>
+            <a:off x="502920" y="1737360"/>
+            <a:ext cx="10515600" cy="1280160"/>
+          </a:xfrm>
+          <a:prstGeom prst="rect">
+            <a:avLst/>
+          </a:prstGeom>
+          <a:noFill/>
+        </p:spPr>
+        <p:txBody>
+          <a:bodyPr wrap="square">
+            <a:spAutoFit/>
+          </a:bodyPr>
+          <a:lstStyle/>
+          <a:p>
+            <a:pPr algn="l"/>
+            <a:r>
+              <a:rPr sz="3400" b="1" i="0">
+                <a:solidFill>
+                  <a:srgbClr val="FFFFFF"/>
+                </a:solidFill>
+              </a:rPr>
+              <a:t>实验二：基于 ViT 的 CIFAR10 图像分类</a:t>
+            </a:r>
+          </a:p>
+        </p:txBody>
+      </p:sp>
+      <p:sp>
+        <p:nvSpPr>
+          <p:cNvPr id="5" name="Rectangle 4"/>
           <p:cNvSpPr/>
           <p:nvPr/>
         </p:nvSpPr>
         <p:spPr>
           <a:xfrm>
-            <a:off x="0" y="6720840"/>
-            <a:ext cx="12188952" cy="137160"/>
+            <a:off x="502920" y="3154680"/>
+            <a:ext cx="8686800" cy="36576"/>
           </a:xfrm>
           <a:prstGeom prst="rect">
             <a:avLst/>
           </a:prstGeom>
           <a:solidFill>
-            <a:srgbClr val="C89620"/>
+            <a:srgbClr val="B8860B"/>
           </a:solidFill>
           <a:ln>
             <a:noFill/>
@@ -3191,14 +3249,14 @@
       </p:sp>
       <p:sp>
         <p:nvSpPr>
-          <p:cNvPr id="4" name="TextBox 3"/>
+          <p:cNvPr id="6" name="TextBox 5"/>
           <p:cNvSpPr txBox="1"/>
           <p:nvPr/>
         </p:nvSpPr>
         <p:spPr>
           <a:xfrm>
-            <a:off x="914400" y="2011680"/>
-            <a:ext cx="10360152" cy="1371600"/>
+            <a:off x="502920" y="3291840"/>
+            <a:ext cx="10058400" cy="731520"/>
           </a:xfrm>
           <a:prstGeom prst="rect">
             <a:avLst/>
@@ -3211,28 +3269,28 @@
           </a:bodyPr>
           <a:lstStyle/>
           <a:p>
-            <a:pPr algn="ctr"/>
-            <a:r>
-              <a:rPr sz="3600" b="1">
-                <a:solidFill>
-                  <a:srgbClr val="FFFFFF"/>
+            <a:pPr algn="l"/>
+            <a:r>
+              <a:rPr sz="2000" b="0" i="0">
+                <a:solidFill>
+                  <a:srgbClr val="C8D8F0"/>
                 </a:solidFill>
               </a:rPr>
-              <a:t>实验二：基于 ViT 的 CIFAR10 图像分类</a:t>
-            </a:r>
-          </a:p>
-        </p:txBody>
-      </p:sp>
-      <p:sp>
-        <p:nvSpPr>
-          <p:cNvPr id="5" name="TextBox 4"/>
+              <a:t>Vision Transformer 从零实现 | PyTorch</a:t>
+            </a:r>
+          </a:p>
+        </p:txBody>
+      </p:sp>
+      <p:sp>
+        <p:nvSpPr>
+          <p:cNvPr id="7" name="TextBox 6"/>
           <p:cNvSpPr txBox="1"/>
           <p:nvPr/>
         </p:nvSpPr>
         <p:spPr>
           <a:xfrm>
-            <a:off x="914400" y="3566160"/>
-            <a:ext cx="10360152" cy="914400"/>
+            <a:off x="502920" y="5989320"/>
+            <a:ext cx="10058400" cy="502920"/>
           </a:xfrm>
           <a:prstGeom prst="rect">
             <a:avLst/>
@@ -3245,48 +3303,14 @@
           </a:bodyPr>
           <a:lstStyle/>
           <a:p>
-            <a:pPr algn="ctr"/>
-            <a:r>
-              <a:rPr sz="2200" b="0">
-                <a:solidFill>
-                  <a:srgbClr val="D6E4F0"/>
+            <a:pPr algn="l"/>
+            <a:r>
+              <a:rPr sz="1500" b="0" i="0">
+                <a:solidFill>
+                  <a:srgbClr val="A0B8D0"/>
                 </a:solidFill>
               </a:rPr>
-              <a:t>Vision Transformer 从零实现与训练</a:t>
-            </a:r>
-          </a:p>
-        </p:txBody>
-      </p:sp>
-      <p:sp>
-        <p:nvSpPr>
-          <p:cNvPr id="6" name="TextBox 5"/>
-          <p:cNvSpPr txBox="1"/>
-          <p:nvPr/>
-        </p:nvSpPr>
-        <p:spPr>
-          <a:xfrm>
-            <a:off x="914400" y="5760720"/>
-            <a:ext cx="10360152" cy="548640"/>
-          </a:xfrm>
-          <a:prstGeom prst="rect">
-            <a:avLst/>
-          </a:prstGeom>
-          <a:noFill/>
-        </p:spPr>
-        <p:txBody>
-          <a:bodyPr wrap="square">
-            <a:spAutoFit/>
-          </a:bodyPr>
-          <a:lstStyle/>
-          <a:p>
-            <a:pPr algn="ctr"/>
-            <a:r>
-              <a:rPr sz="1600" b="0">
-                <a:solidFill>
-                  <a:srgbClr val="FFFFFF"/>
-                </a:solidFill>
-              </a:rPr>
-              <a:t>华为云 Tesla T4 · PyTorch 2.2 · 2026-05-18</a:t>
+              <a:t>WevYang　|　中国科学院大学  深度学习</a:t>
             </a:r>
           </a:p>
         </p:txBody>
@@ -3326,13 +3350,13 @@
         <p:spPr>
           <a:xfrm>
             <a:off x="0" y="0"/>
-            <a:ext cx="12188952" cy="1005840"/>
+            <a:ext cx="12188952" cy="960120"/>
           </a:xfrm>
           <a:prstGeom prst="rect">
             <a:avLst/>
           </a:prstGeom>
           <a:solidFill>
-            <a:srgbClr val="1F497D"/>
+            <a:srgbClr val="1A335C"/>
           </a:solidFill>
           <a:ln>
             <a:noFill/>
@@ -3362,14 +3386,57 @@
       </p:sp>
       <p:sp>
         <p:nvSpPr>
-          <p:cNvPr id="3" name="TextBox 2"/>
+          <p:cNvPr id="3" name="Rectangle 2"/>
+          <p:cNvSpPr/>
+          <p:nvPr/>
+        </p:nvSpPr>
+        <p:spPr>
+          <a:xfrm>
+            <a:off x="0" y="0"/>
+            <a:ext cx="164592" cy="6858000"/>
+          </a:xfrm>
+          <a:prstGeom prst="rect">
+            <a:avLst/>
+          </a:prstGeom>
+          <a:solidFill>
+            <a:srgbClr val="1A335C"/>
+          </a:solidFill>
+          <a:ln>
+            <a:noFill/>
+          </a:ln>
+        </p:spPr>
+        <p:style>
+          <a:lnRef idx="1">
+            <a:schemeClr val="accent1"/>
+          </a:lnRef>
+          <a:fillRef idx="3">
+            <a:schemeClr val="accent1"/>
+          </a:fillRef>
+          <a:effectRef idx="2">
+            <a:schemeClr val="accent1"/>
+          </a:effectRef>
+          <a:fontRef idx="minor">
+            <a:schemeClr val="lt1"/>
+          </a:fontRef>
+        </p:style>
+        <p:txBody>
+          <a:bodyPr rtlCol="0" anchor="ctr"/>
+          <a:lstStyle/>
+          <a:p>
+            <a:pPr algn="ctr"/>
+          </a:p>
+        </p:txBody>
+      </p:sp>
+      <p:sp>
+        <p:nvSpPr>
+          <p:cNvPr id="4" name="TextBox 3"/>
           <p:cNvSpPr txBox="1"/>
           <p:nvPr/>
         </p:nvSpPr>
         <p:spPr>
           <a:xfrm>
-            <a:off x="274320" y="91440"/>
-            <a:ext cx="11612880" cy="822960"/>
+            <a:off x="347472" y="91440"/>
+            <a:ext cx="11521440" cy="777240"/>
           </a:xfrm>
           <a:prstGeom prst="rect">
             <a:avLst/>
@@ -3384,26 +3451,26 @@
           <a:p>
             <a:pPr algn="l"/>
             <a:r>
-              <a:rPr sz="2400" b="1">
+              <a:rPr sz="2300" b="1" i="0">
                 <a:solidFill>
                   <a:srgbClr val="FFFFFF"/>
                 </a:solidFill>
               </a:rPr>
-              <a:t>实验目的与要求</a:t>
-            </a:r>
-          </a:p>
-        </p:txBody>
-      </p:sp>
-      <p:sp>
-        <p:nvSpPr>
-          <p:cNvPr id="4" name="TextBox 3"/>
+              <a:t>概述</a:t>
+            </a:r>
+          </a:p>
+        </p:txBody>
+      </p:sp>
+      <p:sp>
+        <p:nvSpPr>
+          <p:cNvPr id="5" name="TextBox 4"/>
           <p:cNvSpPr txBox="1"/>
           <p:nvPr/>
         </p:nvSpPr>
         <p:spPr>
           <a:xfrm>
-            <a:off x="457200" y="1188720"/>
-            <a:ext cx="11247120" cy="502920"/>
+            <a:off x="411480" y="1115568"/>
+            <a:ext cx="11247120" cy="475488"/>
           </a:xfrm>
           <a:prstGeom prst="rect">
             <a:avLst/>
@@ -3418,26 +3485,26 @@
           <a:p>
             <a:pPr algn="l"/>
             <a:r>
-              <a:rPr sz="1800" b="0">
-                <a:solidFill>
-                  <a:srgbClr val="1A1A2E"/>
+              <a:rPr sz="1700" b="0" i="0">
+                <a:solidFill>
+                  <a:srgbClr val="1C1C1C"/>
                 </a:solidFill>
               </a:rPr>
-              <a:t>  • 学习 Vision Transformer（ViT）模型原理</a:t>
-            </a:r>
-          </a:p>
-        </p:txBody>
-      </p:sp>
-      <p:sp>
-        <p:nvSpPr>
-          <p:cNvPr id="5" name="TextBox 4"/>
+              <a:t>▸ 任务：对 CIFAR10 数据集（10类彩色图像）进行分类</a:t>
+            </a:r>
+          </a:p>
+        </p:txBody>
+      </p:sp>
+      <p:sp>
+        <p:nvSpPr>
+          <p:cNvPr id="6" name="TextBox 5"/>
           <p:cNvSpPr txBox="1"/>
           <p:nvPr/>
         </p:nvSpPr>
         <p:spPr>
           <a:xfrm>
-            <a:off x="457200" y="1664208"/>
-            <a:ext cx="11247120" cy="502920"/>
+            <a:off x="411480" y="1591056"/>
+            <a:ext cx="11247120" cy="475488"/>
           </a:xfrm>
           <a:prstGeom prst="rect">
             <a:avLst/>
@@ -3452,26 +3519,26 @@
           <a:p>
             <a:pPr algn="l"/>
             <a:r>
-              <a:rPr sz="1800" b="0">
-                <a:solidFill>
-                  <a:srgbClr val="1A1A2E"/>
+              <a:rPr sz="1700" b="0" i="0">
+                <a:solidFill>
+                  <a:srgbClr val="1C1C1C"/>
                 </a:solidFill>
               </a:rPr>
-              <a:t>  • 掌握 Attention 机制及 Transformer Encoder 结构</a:t>
-            </a:r>
-          </a:p>
-        </p:txBody>
-      </p:sp>
-      <p:sp>
-        <p:nvSpPr>
-          <p:cNvPr id="6" name="TextBox 5"/>
+              <a:t>▸ 数据集：CIFAR10，50,000 训练 + 10,000 测试，32×32 彩色图</a:t>
+            </a:r>
+          </a:p>
+        </p:txBody>
+      </p:sp>
+      <p:sp>
+        <p:nvSpPr>
+          <p:cNvPr id="7" name="TextBox 6"/>
           <p:cNvSpPr txBox="1"/>
           <p:nvPr/>
         </p:nvSpPr>
         <p:spPr>
           <a:xfrm>
-            <a:off x="457200" y="2139696"/>
-            <a:ext cx="11247120" cy="502920"/>
+            <a:off x="411480" y="2066543"/>
+            <a:ext cx="11247120" cy="475488"/>
           </a:xfrm>
           <a:prstGeom prst="rect">
             <a:avLst/>
@@ -3486,26 +3553,26 @@
           <a:p>
             <a:pPr algn="l"/>
             <a:r>
-              <a:rPr sz="1800" b="0">
-                <a:solidFill>
-                  <a:srgbClr val="1A1A2E"/>
+              <a:rPr sz="1700" b="0" i="0">
+                <a:solidFill>
+                  <a:srgbClr val="1C1C1C"/>
                 </a:solidFill>
               </a:rPr>
-              <a:t>  • 从零实现 PatchEmbedding、TransformerBlock、分类头</a:t>
-            </a:r>
-          </a:p>
-        </p:txBody>
-      </p:sp>
-      <p:sp>
-        <p:nvSpPr>
-          <p:cNvPr id="7" name="TextBox 6"/>
+              <a:t>▸ 解决方案：从零实现 Vision Transformer（ViT）</a:t>
+            </a:r>
+          </a:p>
+        </p:txBody>
+      </p:sp>
+      <p:sp>
+        <p:nvSpPr>
+          <p:cNvPr id="8" name="TextBox 7"/>
           <p:cNvSpPr txBox="1"/>
           <p:nvPr/>
         </p:nvSpPr>
         <p:spPr>
           <a:xfrm>
-            <a:off x="457200" y="2615184"/>
-            <a:ext cx="11247120" cy="502920"/>
+            <a:off x="411480" y="2542032"/>
+            <a:ext cx="11247120" cy="475488"/>
           </a:xfrm>
           <a:prstGeom prst="rect">
             <a:avLst/>
@@ -3520,32 +3587,100 @@
           <a:p>
             <a:pPr algn="l"/>
             <a:r>
-              <a:rPr sz="1800" b="0">
-                <a:solidFill>
-                  <a:srgbClr val="1A1A2E"/>
+              <a:rPr sz="1600" b="0" i="0">
+                <a:solidFill>
+                  <a:srgbClr val="555555"/>
                 </a:solidFill>
               </a:rPr>
-              <a:t>  • 在 CIFAR10 上训练，测试准确率达到 ≥ 80%</a:t>
-            </a:r>
-          </a:p>
-        </p:txBody>
-      </p:sp>
-      <p:sp>
-        <p:nvSpPr>
-          <p:cNvPr id="8" name="Rectangle 7"/>
+              <a:t>    – PatchEmbedding → CLS Token → Transformer Encoder × 6 → Linear Head</a:t>
+            </a:r>
+          </a:p>
+        </p:txBody>
+      </p:sp>
+      <p:sp>
+        <p:nvSpPr>
+          <p:cNvPr id="9" name="TextBox 8"/>
+          <p:cNvSpPr txBox="1"/>
+          <p:nvPr/>
+        </p:nvSpPr>
+        <p:spPr>
+          <a:xfrm>
+            <a:off x="411480" y="3017520"/>
+            <a:ext cx="11247120" cy="475488"/>
+          </a:xfrm>
+          <a:prstGeom prst="rect">
+            <a:avLst/>
+          </a:prstGeom>
+          <a:noFill/>
+        </p:spPr>
+        <p:txBody>
+          <a:bodyPr wrap="square">
+            <a:spAutoFit/>
+          </a:bodyPr>
+          <a:lstStyle/>
+          <a:p>
+            <a:pPr algn="l"/>
+            <a:r>
+              <a:rPr sz="1700" b="0" i="0">
+                <a:solidFill>
+                  <a:srgbClr val="1C1C1C"/>
+                </a:solidFill>
+              </a:rPr>
+              <a:t>▸ 评估指标：测试集分类准确率（目标 ≥ 80%）</a:t>
+            </a:r>
+          </a:p>
+        </p:txBody>
+      </p:sp>
+      <p:sp>
+        <p:nvSpPr>
+          <p:cNvPr id="10" name="TextBox 9"/>
+          <p:cNvSpPr txBox="1"/>
+          <p:nvPr/>
+        </p:nvSpPr>
+        <p:spPr>
+          <a:xfrm>
+            <a:off x="411480" y="3493008"/>
+            <a:ext cx="11247120" cy="475488"/>
+          </a:xfrm>
+          <a:prstGeom prst="rect">
+            <a:avLst/>
+          </a:prstGeom>
+          <a:noFill/>
+        </p:spPr>
+        <p:txBody>
+          <a:bodyPr wrap="square">
+            <a:spAutoFit/>
+          </a:bodyPr>
+          <a:lstStyle/>
+          <a:p>
+            <a:pPr algn="l"/>
+            <a:r>
+              <a:rPr sz="1600" b="0" i="0">
+                <a:solidFill>
+                  <a:srgbClr val="555555"/>
+                </a:solidFill>
+              </a:rPr>
+              <a:t>    – 最终结果：test_acc = 80.48%，满足目标要求</a:t>
+            </a:r>
+          </a:p>
+        </p:txBody>
+      </p:sp>
+      <p:sp>
+        <p:nvSpPr>
+          <p:cNvPr id="11" name="Rectangle 10"/>
           <p:cNvSpPr/>
           <p:nvPr/>
         </p:nvSpPr>
         <p:spPr>
           <a:xfrm>
-            <a:off x="0" y="6675120"/>
-            <a:ext cx="12188952" cy="73152"/>
+            <a:off x="0" y="6748272"/>
+            <a:ext cx="12188952" cy="109728"/>
           </a:xfrm>
           <a:prstGeom prst="rect">
             <a:avLst/>
           </a:prstGeom>
           <a:solidFill>
-            <a:srgbClr val="1F497D"/>
+            <a:srgbClr val="1A335C"/>
           </a:solidFill>
           <a:ln>
             <a:noFill/>
@@ -3608,13 +3743,13 @@
         <p:spPr>
           <a:xfrm>
             <a:off x="0" y="0"/>
-            <a:ext cx="12188952" cy="1005840"/>
+            <a:ext cx="12188952" cy="960120"/>
           </a:xfrm>
           <a:prstGeom prst="rect">
             <a:avLst/>
           </a:prstGeom>
           <a:solidFill>
-            <a:srgbClr val="1F497D"/>
+            <a:srgbClr val="1A335C"/>
           </a:solidFill>
           <a:ln>
             <a:noFill/>
@@ -3644,14 +3779,57 @@
       </p:sp>
       <p:sp>
         <p:nvSpPr>
-          <p:cNvPr id="3" name="TextBox 2"/>
+          <p:cNvPr id="3" name="Rectangle 2"/>
+          <p:cNvSpPr/>
+          <p:nvPr/>
+        </p:nvSpPr>
+        <p:spPr>
+          <a:xfrm>
+            <a:off x="0" y="0"/>
+            <a:ext cx="164592" cy="6858000"/>
+          </a:xfrm>
+          <a:prstGeom prst="rect">
+            <a:avLst/>
+          </a:prstGeom>
+          <a:solidFill>
+            <a:srgbClr val="1A335C"/>
+          </a:solidFill>
+          <a:ln>
+            <a:noFill/>
+          </a:ln>
+        </p:spPr>
+        <p:style>
+          <a:lnRef idx="1">
+            <a:schemeClr val="accent1"/>
+          </a:lnRef>
+          <a:fillRef idx="3">
+            <a:schemeClr val="accent1"/>
+          </a:fillRef>
+          <a:effectRef idx="2">
+            <a:schemeClr val="accent1"/>
+          </a:effectRef>
+          <a:fontRef idx="minor">
+            <a:schemeClr val="lt1"/>
+          </a:fontRef>
+        </p:style>
+        <p:txBody>
+          <a:bodyPr rtlCol="0" anchor="ctr"/>
+          <a:lstStyle/>
+          <a:p>
+            <a:pPr algn="ctr"/>
+          </a:p>
+        </p:txBody>
+      </p:sp>
+      <p:sp>
+        <p:nvSpPr>
+          <p:cNvPr id="4" name="TextBox 3"/>
           <p:cNvSpPr txBox="1"/>
           <p:nvPr/>
         </p:nvSpPr>
         <p:spPr>
           <a:xfrm>
-            <a:off x="274320" y="91440"/>
-            <a:ext cx="11612880" cy="822960"/>
+            <a:off x="347472" y="91440"/>
+            <a:ext cx="11521440" cy="777240"/>
           </a:xfrm>
           <a:prstGeom prst="rect">
             <a:avLst/>
@@ -3666,7 +3844,7 @@
           <a:p>
             <a:pPr algn="l"/>
             <a:r>
-              <a:rPr sz="2400" b="1">
+              <a:rPr sz="2300" b="1" i="0">
                 <a:solidFill>
                   <a:srgbClr val="FFFFFF"/>
                 </a:solidFill>
@@ -3678,14 +3856,14 @@
       </p:sp>
       <p:sp>
         <p:nvSpPr>
-          <p:cNvPr id="4" name="TextBox 3"/>
+          <p:cNvPr id="5" name="TextBox 4"/>
           <p:cNvSpPr txBox="1"/>
           <p:nvPr/>
         </p:nvSpPr>
         <p:spPr>
           <a:xfrm>
-            <a:off x="457200" y="1188720"/>
-            <a:ext cx="11247120" cy="502920"/>
+            <a:off x="411480" y="1115568"/>
+            <a:ext cx="11247120" cy="475488"/>
           </a:xfrm>
           <a:prstGeom prst="rect">
             <a:avLst/>
@@ -3700,26 +3878,26 @@
           <a:p>
             <a:pPr algn="l"/>
             <a:r>
-              <a:rPr sz="1800" b="0">
-                <a:solidFill>
-                  <a:srgbClr val="1A1A2E"/>
+              <a:rPr sz="1700" b="0" i="0">
+                <a:solidFill>
+                  <a:srgbClr val="1C1C1C"/>
                 </a:solidFill>
               </a:rPr>
-              <a:t>  • 10 类彩色图像：飞机、汽车、鸟、猫、鹿、狗、青蛙、马、船、卡车</a:t>
-            </a:r>
-          </a:p>
-        </p:txBody>
-      </p:sp>
-      <p:sp>
-        <p:nvSpPr>
-          <p:cNvPr id="5" name="TextBox 4"/>
+              <a:t>▸ 来源：Alex Krizhevsky，2009 年发布，图像分类经典基准</a:t>
+            </a:r>
+          </a:p>
+        </p:txBody>
+      </p:sp>
+      <p:sp>
+        <p:nvSpPr>
+          <p:cNvPr id="6" name="TextBox 5"/>
           <p:cNvSpPr txBox="1"/>
           <p:nvPr/>
         </p:nvSpPr>
         <p:spPr>
           <a:xfrm>
-            <a:off x="457200" y="1664208"/>
-            <a:ext cx="11247120" cy="502920"/>
+            <a:off x="411480" y="1591056"/>
+            <a:ext cx="11247120" cy="475488"/>
           </a:xfrm>
           <a:prstGeom prst="rect">
             <a:avLst/>
@@ -3734,26 +3912,26 @@
           <a:p>
             <a:pPr algn="l"/>
             <a:r>
-              <a:rPr sz="1800" b="0">
-                <a:solidFill>
-                  <a:srgbClr val="1A1A2E"/>
+              <a:rPr sz="1700" b="0" i="0">
+                <a:solidFill>
+                  <a:srgbClr val="1C1C1C"/>
                 </a:solidFill>
               </a:rPr>
-              <a:t>  • 训练集：50,000 张（32×32×3）；测试集：10,000 张</a:t>
-            </a:r>
-          </a:p>
-        </p:txBody>
-      </p:sp>
-      <p:sp>
-        <p:nvSpPr>
-          <p:cNvPr id="6" name="TextBox 5"/>
+              <a:t>▸ 类别：飞机、汽车、鸟、猫、鹿、狗、青蛙、马、船、卡车（各 6,000 张）</a:t>
+            </a:r>
+          </a:p>
+        </p:txBody>
+      </p:sp>
+      <p:sp>
+        <p:nvSpPr>
+          <p:cNvPr id="7" name="TextBox 6"/>
           <p:cNvSpPr txBox="1"/>
           <p:nvPr/>
         </p:nvSpPr>
         <p:spPr>
           <a:xfrm>
-            <a:off x="457200" y="2139696"/>
-            <a:ext cx="11247120" cy="502920"/>
+            <a:off x="411480" y="2066543"/>
+            <a:ext cx="11247120" cy="475488"/>
           </a:xfrm>
           <a:prstGeom prst="rect">
             <a:avLst/>
@@ -3768,26 +3946,26 @@
           <a:p>
             <a:pPr algn="l"/>
             <a:r>
-              <a:rPr sz="1800" b="0">
-                <a:solidFill>
-                  <a:srgbClr val="1A1A2E"/>
+              <a:rPr sz="1700" b="0" i="0">
+                <a:solidFill>
+                  <a:srgbClr val="1C1C1C"/>
                 </a:solidFill>
               </a:rPr>
-              <a:t>  • 训练增强：RandomResizedCrop(32) + RandomHorizontalFlip</a:t>
-            </a:r>
-          </a:p>
-        </p:txBody>
-      </p:sp>
-      <p:sp>
-        <p:nvSpPr>
-          <p:cNvPr id="7" name="TextBox 6"/>
+              <a:t>▸ 图像大小：32×32 像素，3 通道 RGB</a:t>
+            </a:r>
+          </a:p>
+        </p:txBody>
+      </p:sp>
+      <p:sp>
+        <p:nvSpPr>
+          <p:cNvPr id="8" name="TextBox 7"/>
           <p:cNvSpPr txBox="1"/>
           <p:nvPr/>
         </p:nvSpPr>
         <p:spPr>
           <a:xfrm>
-            <a:off x="457200" y="2615184"/>
-            <a:ext cx="11247120" cy="502920"/>
+            <a:off x="411480" y="2542032"/>
+            <a:ext cx="11247120" cy="475488"/>
           </a:xfrm>
           <a:prstGeom prst="rect">
             <a:avLst/>
@@ -3802,26 +3980,26 @@
           <a:p>
             <a:pPr algn="l"/>
             <a:r>
-              <a:rPr sz="1800" b="0">
-                <a:solidFill>
-                  <a:srgbClr val="1A1A2E"/>
+              <a:rPr sz="1700" b="0" i="0">
+                <a:solidFill>
+                  <a:srgbClr val="1C1C1C"/>
                 </a:solidFill>
               </a:rPr>
-              <a:t>  • 标准化：mean=(0.4914,0.4822,0.4465)，std=(0.2023,0.1994,0.2010)</a:t>
-            </a:r>
-          </a:p>
-        </p:txBody>
-      </p:sp>
-      <p:sp>
-        <p:nvSpPr>
-          <p:cNvPr id="8" name="TextBox 7"/>
+              <a:t>▸ 训练增强：RandomResizedCrop(32) + RandomHorizontalFlip</a:t>
+            </a:r>
+          </a:p>
+        </p:txBody>
+      </p:sp>
+      <p:sp>
+        <p:nvSpPr>
+          <p:cNvPr id="9" name="TextBox 8"/>
           <p:cNvSpPr txBox="1"/>
           <p:nvPr/>
         </p:nvSpPr>
         <p:spPr>
           <a:xfrm>
-            <a:off x="457200" y="3090672"/>
-            <a:ext cx="11247120" cy="502920"/>
+            <a:off x="411480" y="3017520"/>
+            <a:ext cx="11247120" cy="475488"/>
           </a:xfrm>
           <a:prstGeom prst="rect">
             <a:avLst/>
@@ -3836,32 +4014,66 @@
           <a:p>
             <a:pPr algn="l"/>
             <a:r>
-              <a:rPr sz="1800" b="0">
-                <a:solidFill>
-                  <a:srgbClr val="1A1A2E"/>
+              <a:rPr sz="1700" b="0" i="0">
+                <a:solidFill>
+                  <a:srgbClr val="1C1C1C"/>
                 </a:solidFill>
               </a:rPr>
-              <a:t>  • 训练时切 10% 作为验证集</a:t>
-            </a:r>
-          </a:p>
-        </p:txBody>
-      </p:sp>
-      <p:sp>
-        <p:nvSpPr>
-          <p:cNvPr id="9" name="Rectangle 8"/>
+              <a:t>▸ 标准化：mean=(0.4914,0.4822,0.4465)，std=(0.2023,0.1994,0.2010)</a:t>
+            </a:r>
+          </a:p>
+        </p:txBody>
+      </p:sp>
+      <p:sp>
+        <p:nvSpPr>
+          <p:cNvPr id="10" name="TextBox 9"/>
+          <p:cNvSpPr txBox="1"/>
+          <p:nvPr/>
+        </p:nvSpPr>
+        <p:spPr>
+          <a:xfrm>
+            <a:off x="411480" y="3493008"/>
+            <a:ext cx="11247120" cy="475488"/>
+          </a:xfrm>
+          <a:prstGeom prst="rect">
+            <a:avLst/>
+          </a:prstGeom>
+          <a:noFill/>
+        </p:spPr>
+        <p:txBody>
+          <a:bodyPr wrap="square">
+            <a:spAutoFit/>
+          </a:bodyPr>
+          <a:lstStyle/>
+          <a:p>
+            <a:pPr algn="l"/>
+            <a:r>
+              <a:rPr sz="1600" b="0" i="0">
+                <a:solidFill>
+                  <a:srgbClr val="555555"/>
+                </a:solidFill>
+              </a:rPr>
+              <a:t>    – 切出 10% 训练样本作验证集；测试集不做增强，仅做标准化</a:t>
+            </a:r>
+          </a:p>
+        </p:txBody>
+      </p:sp>
+      <p:sp>
+        <p:nvSpPr>
+          <p:cNvPr id="11" name="Rectangle 10"/>
           <p:cNvSpPr/>
           <p:nvPr/>
         </p:nvSpPr>
         <p:spPr>
           <a:xfrm>
-            <a:off x="0" y="6675120"/>
-            <a:ext cx="12188952" cy="73152"/>
+            <a:off x="0" y="6748272"/>
+            <a:ext cx="12188952" cy="109728"/>
           </a:xfrm>
           <a:prstGeom prst="rect">
             <a:avLst/>
           </a:prstGeom>
           <a:solidFill>
-            <a:srgbClr val="1F497D"/>
+            <a:srgbClr val="1A335C"/>
           </a:solidFill>
           <a:ln>
             <a:noFill/>
@@ -3924,13 +4136,13 @@
         <p:spPr>
           <a:xfrm>
             <a:off x="0" y="0"/>
-            <a:ext cx="12188952" cy="1005840"/>
+            <a:ext cx="12188952" cy="960120"/>
           </a:xfrm>
           <a:prstGeom prst="rect">
             <a:avLst/>
           </a:prstGeom>
           <a:solidFill>
-            <a:srgbClr val="1F497D"/>
+            <a:srgbClr val="1A335C"/>
           </a:solidFill>
           <a:ln>
             <a:noFill/>
@@ -3960,14 +4172,57 @@
       </p:sp>
       <p:sp>
         <p:nvSpPr>
-          <p:cNvPr id="3" name="TextBox 2"/>
+          <p:cNvPr id="3" name="Rectangle 2"/>
+          <p:cNvSpPr/>
+          <p:nvPr/>
+        </p:nvSpPr>
+        <p:spPr>
+          <a:xfrm>
+            <a:off x="0" y="0"/>
+            <a:ext cx="164592" cy="6858000"/>
+          </a:xfrm>
+          <a:prstGeom prst="rect">
+            <a:avLst/>
+          </a:prstGeom>
+          <a:solidFill>
+            <a:srgbClr val="1A335C"/>
+          </a:solidFill>
+          <a:ln>
+            <a:noFill/>
+          </a:ln>
+        </p:spPr>
+        <p:style>
+          <a:lnRef idx="1">
+            <a:schemeClr val="accent1"/>
+          </a:lnRef>
+          <a:fillRef idx="3">
+            <a:schemeClr val="accent1"/>
+          </a:fillRef>
+          <a:effectRef idx="2">
+            <a:schemeClr val="accent1"/>
+          </a:effectRef>
+          <a:fontRef idx="minor">
+            <a:schemeClr val="lt1"/>
+          </a:fontRef>
+        </p:style>
+        <p:txBody>
+          <a:bodyPr rtlCol="0" anchor="ctr"/>
+          <a:lstStyle/>
+          <a:p>
+            <a:pPr algn="ctr"/>
+          </a:p>
+        </p:txBody>
+      </p:sp>
+      <p:sp>
+        <p:nvSpPr>
+          <p:cNvPr id="4" name="TextBox 3"/>
           <p:cNvSpPr txBox="1"/>
           <p:nvPr/>
         </p:nvSpPr>
         <p:spPr>
           <a:xfrm>
-            <a:off x="274320" y="91440"/>
-            <a:ext cx="11612880" cy="822960"/>
+            <a:off x="347472" y="91440"/>
+            <a:ext cx="11521440" cy="777240"/>
           </a:xfrm>
           <a:prstGeom prst="rect">
             <a:avLst/>
@@ -3982,26 +4237,26 @@
           <a:p>
             <a:pPr algn="l"/>
             <a:r>
-              <a:rPr sz="2400" b="1">
+              <a:rPr sz="2300" b="1" i="0">
                 <a:solidFill>
                   <a:srgbClr val="FFFFFF"/>
                 </a:solidFill>
               </a:rPr>
-              <a:t>ViT 模型原理</a:t>
-            </a:r>
-          </a:p>
-        </p:txBody>
-      </p:sp>
-      <p:sp>
-        <p:nvSpPr>
-          <p:cNvPr id="4" name="TextBox 3"/>
+              <a:t>解决方案：ViT 原理与结构</a:t>
+            </a:r>
+          </a:p>
+        </p:txBody>
+      </p:sp>
+      <p:sp>
+        <p:nvSpPr>
+          <p:cNvPr id="5" name="TextBox 4"/>
           <p:cNvSpPr txBox="1"/>
           <p:nvPr/>
         </p:nvSpPr>
         <p:spPr>
           <a:xfrm>
-            <a:off x="457200" y="1188720"/>
-            <a:ext cx="11247120" cy="502920"/>
+            <a:off x="411480" y="1115568"/>
+            <a:ext cx="11247120" cy="475488"/>
           </a:xfrm>
           <a:prstGeom prst="rect">
             <a:avLst/>
@@ -4016,26 +4271,26 @@
           <a:p>
             <a:pPr algn="l"/>
             <a:r>
-              <a:rPr sz="1800" b="0">
-                <a:solidFill>
-                  <a:srgbClr val="1A1A2E"/>
+              <a:rPr sz="1700" b="0" i="0">
+                <a:solidFill>
+                  <a:srgbClr val="1C1C1C"/>
                 </a:solidFill>
               </a:rPr>
-              <a:t>  • 1. Patch 分割：将图像切为 patch_size×patch_size 的小块</a:t>
-            </a:r>
-          </a:p>
-        </p:txBody>
-      </p:sp>
-      <p:sp>
-        <p:nvSpPr>
-          <p:cNvPr id="5" name="TextBox 4"/>
+              <a:t>▸ 核心思想：将图像视为 patch 序列，用 Transformer 建模全局依赖</a:t>
+            </a:r>
+          </a:p>
+        </p:txBody>
+      </p:sp>
+      <p:sp>
+        <p:nvSpPr>
+          <p:cNvPr id="6" name="TextBox 5"/>
           <p:cNvSpPr txBox="1"/>
           <p:nvPr/>
         </p:nvSpPr>
         <p:spPr>
           <a:xfrm>
-            <a:off x="457200" y="1664208"/>
-            <a:ext cx="11247120" cy="502920"/>
+            <a:off x="411480" y="1591056"/>
+            <a:ext cx="11247120" cy="475488"/>
           </a:xfrm>
           <a:prstGeom prst="rect">
             <a:avLst/>
@@ -4050,26 +4305,26 @@
           <a:p>
             <a:pPr algn="l"/>
             <a:r>
-              <a:rPr sz="1800" b="0">
-                <a:solidFill>
-                  <a:srgbClr val="1A1A2E"/>
+              <a:rPr sz="1700" b="0" i="0">
+                <a:solidFill>
+                  <a:srgbClr val="1C1C1C"/>
                 </a:solidFill>
               </a:rPr>
-              <a:t>  • 2. Patch Embedding：每个 patch 线性投影为 embed_dim 维向量</a:t>
-            </a:r>
-          </a:p>
-        </p:txBody>
-      </p:sp>
-      <p:sp>
-        <p:nvSpPr>
-          <p:cNvPr id="6" name="TextBox 5"/>
+              <a:t>▸ ① Patch 分割：image(32×32) → 64 个 4×4 的 patch</a:t>
+            </a:r>
+          </a:p>
+        </p:txBody>
+      </p:sp>
+      <p:sp>
+        <p:nvSpPr>
+          <p:cNvPr id="7" name="TextBox 6"/>
           <p:cNvSpPr txBox="1"/>
           <p:nvPr/>
         </p:nvSpPr>
         <p:spPr>
           <a:xfrm>
-            <a:off x="457200" y="2139696"/>
-            <a:ext cx="11247120" cy="502920"/>
+            <a:off x="411480" y="2066543"/>
+            <a:ext cx="11247120" cy="475488"/>
           </a:xfrm>
           <a:prstGeom prst="rect">
             <a:avLst/>
@@ -4084,26 +4339,26 @@
           <a:p>
             <a:pPr algn="l"/>
             <a:r>
-              <a:rPr sz="1800" b="0">
-                <a:solidFill>
-                  <a:srgbClr val="1A1A2E"/>
+              <a:rPr sz="1600" b="0" i="0">
+                <a:solidFill>
+                  <a:srgbClr val="555555"/>
                 </a:solidFill>
               </a:rPr>
-              <a:t>  • 3. CLS Token：拼接可学习分类 token 到序列头部</a:t>
-            </a:r>
-          </a:p>
-        </p:txBody>
-      </p:sp>
-      <p:sp>
-        <p:nvSpPr>
-          <p:cNvPr id="7" name="TextBox 6"/>
+              <a:t>    – 每个 patch 通过 Conv2d（stride=patch_size）线性投影为 192 维向量</a:t>
+            </a:r>
+          </a:p>
+        </p:txBody>
+      </p:sp>
+      <p:sp>
+        <p:nvSpPr>
+          <p:cNvPr id="8" name="TextBox 7"/>
           <p:cNvSpPr txBox="1"/>
           <p:nvPr/>
         </p:nvSpPr>
         <p:spPr>
           <a:xfrm>
-            <a:off x="457200" y="2615184"/>
-            <a:ext cx="11247120" cy="502920"/>
+            <a:off x="411480" y="2542032"/>
+            <a:ext cx="11247120" cy="475488"/>
           </a:xfrm>
           <a:prstGeom prst="rect">
             <a:avLst/>
@@ -4118,26 +4373,26 @@
           <a:p>
             <a:pPr algn="l"/>
             <a:r>
-              <a:rPr sz="1800" b="0">
-                <a:solidFill>
-                  <a:srgbClr val="1A1A2E"/>
+              <a:rPr sz="1700" b="0" i="0">
+                <a:solidFill>
+                  <a:srgbClr val="1C1C1C"/>
                 </a:solidFill>
               </a:rPr>
-              <a:t>  • 4. 位置编码：可学习位置编码加到 token 序列</a:t>
-            </a:r>
-          </a:p>
-        </p:txBody>
-      </p:sp>
-      <p:sp>
-        <p:nvSpPr>
-          <p:cNvPr id="8" name="TextBox 7"/>
+              <a:t>▸ ② CLS Token：在序列头部拼接可学习的分类 token（1×192）</a:t>
+            </a:r>
+          </a:p>
+        </p:txBody>
+      </p:sp>
+      <p:sp>
+        <p:nvSpPr>
+          <p:cNvPr id="9" name="TextBox 8"/>
           <p:cNvSpPr txBox="1"/>
           <p:nvPr/>
         </p:nvSpPr>
         <p:spPr>
           <a:xfrm>
-            <a:off x="457200" y="3090672"/>
-            <a:ext cx="11247120" cy="502920"/>
+            <a:off x="411480" y="3017520"/>
+            <a:ext cx="11247120" cy="475488"/>
           </a:xfrm>
           <a:prstGeom prst="rect">
             <a:avLst/>
@@ -4152,26 +4407,26 @@
           <a:p>
             <a:pPr algn="l"/>
             <a:r>
-              <a:rPr sz="1800" b="0">
-                <a:solidFill>
-                  <a:srgbClr val="1A1A2E"/>
+              <a:rPr sz="1700" b="0" i="0">
+                <a:solidFill>
+                  <a:srgbClr val="1C1C1C"/>
                 </a:solidFill>
               </a:rPr>
-              <a:t>  • 5. Transformer Encoder：多层 [LayerNorm → MHA → 残差] + [LayerNorm → FFN → 残差]</a:t>
-            </a:r>
-          </a:p>
-        </p:txBody>
-      </p:sp>
-      <p:sp>
-        <p:nvSpPr>
-          <p:cNvPr id="9" name="TextBox 8"/>
+              <a:t>▸ ③ 位置编码：可学习位置嵌入，形状 (1, 65, 192)</a:t>
+            </a:r>
+          </a:p>
+        </p:txBody>
+      </p:sp>
+      <p:sp>
+        <p:nvSpPr>
+          <p:cNvPr id="10" name="TextBox 9"/>
           <p:cNvSpPr txBox="1"/>
           <p:nvPr/>
         </p:nvSpPr>
         <p:spPr>
           <a:xfrm>
-            <a:off x="457200" y="3566160"/>
-            <a:ext cx="11247120" cy="502920"/>
+            <a:off x="411480" y="3493008"/>
+            <a:ext cx="11247120" cy="475488"/>
           </a:xfrm>
           <a:prstGeom prst="rect">
             <a:avLst/>
@@ -4186,32 +4441,100 @@
           <a:p>
             <a:pPr algn="l"/>
             <a:r>
-              <a:rPr sz="1800" b="0">
-                <a:solidFill>
-                  <a:srgbClr val="1A1A2E"/>
+              <a:rPr sz="1700" b="0" i="0">
+                <a:solidFill>
+                  <a:srgbClr val="1C1C1C"/>
                 </a:solidFill>
               </a:rPr>
-              <a:t>  • 6. 分类：取 CLS token 最终隐状态 → 线性层</a:t>
-            </a:r>
-          </a:p>
-        </p:txBody>
-      </p:sp>
-      <p:sp>
-        <p:nvSpPr>
-          <p:cNvPr id="10" name="Rectangle 9"/>
+              <a:t>▸ ④ Transformer Encoder × 6：Pre-Norm + 多头自注意力（3头）+ FFN</a:t>
+            </a:r>
+          </a:p>
+        </p:txBody>
+      </p:sp>
+      <p:sp>
+        <p:nvSpPr>
+          <p:cNvPr id="11" name="TextBox 10"/>
+          <p:cNvSpPr txBox="1"/>
+          <p:nvPr/>
+        </p:nvSpPr>
+        <p:spPr>
+          <a:xfrm>
+            <a:off x="411480" y="3968496"/>
+            <a:ext cx="11247120" cy="475488"/>
+          </a:xfrm>
+          <a:prstGeom prst="rect">
+            <a:avLst/>
+          </a:prstGeom>
+          <a:noFill/>
+        </p:spPr>
+        <p:txBody>
+          <a:bodyPr wrap="square">
+            <a:spAutoFit/>
+          </a:bodyPr>
+          <a:lstStyle/>
+          <a:p>
+            <a:pPr algn="l"/>
+            <a:r>
+              <a:rPr sz="1600" b="0" i="0">
+                <a:solidFill>
+                  <a:srgbClr val="555555"/>
+                </a:solidFill>
+              </a:rPr>
+              <a:t>    – 每个 Block：x = x + Attn(LN(x))；x = x + FFN(LN(x))</a:t>
+            </a:r>
+          </a:p>
+        </p:txBody>
+      </p:sp>
+      <p:sp>
+        <p:nvSpPr>
+          <p:cNvPr id="12" name="TextBox 11"/>
+          <p:cNvSpPr txBox="1"/>
+          <p:nvPr/>
+        </p:nvSpPr>
+        <p:spPr>
+          <a:xfrm>
+            <a:off x="411480" y="4443983"/>
+            <a:ext cx="11247120" cy="475488"/>
+          </a:xfrm>
+          <a:prstGeom prst="rect">
+            <a:avLst/>
+          </a:prstGeom>
+          <a:noFill/>
+        </p:spPr>
+        <p:txBody>
+          <a:bodyPr wrap="square">
+            <a:spAutoFit/>
+          </a:bodyPr>
+          <a:lstStyle/>
+          <a:p>
+            <a:pPr algn="l"/>
+            <a:r>
+              <a:rPr sz="1700" b="0" i="0">
+                <a:solidFill>
+                  <a:srgbClr val="1C1C1C"/>
+                </a:solidFill>
+              </a:rPr>
+              <a:t>▸ ⑤ 分类头：取 CLS token 位置输出 → Linear(192→10)</a:t>
+            </a:r>
+          </a:p>
+        </p:txBody>
+      </p:sp>
+      <p:sp>
+        <p:nvSpPr>
+          <p:cNvPr id="13" name="Rectangle 12"/>
           <p:cNvSpPr/>
           <p:nvPr/>
         </p:nvSpPr>
         <p:spPr>
           <a:xfrm>
-            <a:off x="0" y="6675120"/>
-            <a:ext cx="12188952" cy="73152"/>
+            <a:off x="0" y="6748272"/>
+            <a:ext cx="12188952" cy="109728"/>
           </a:xfrm>
           <a:prstGeom prst="rect">
             <a:avLst/>
           </a:prstGeom>
           <a:solidFill>
-            <a:srgbClr val="1F497D"/>
+            <a:srgbClr val="1A335C"/>
           </a:solidFill>
           <a:ln>
             <a:noFill/>
@@ -4274,13 +4597,13 @@
         <p:spPr>
           <a:xfrm>
             <a:off x="0" y="0"/>
-            <a:ext cx="12188952" cy="1005840"/>
+            <a:ext cx="12188952" cy="960120"/>
           </a:xfrm>
           <a:prstGeom prst="rect">
             <a:avLst/>
           </a:prstGeom>
           <a:solidFill>
-            <a:srgbClr val="1F497D"/>
+            <a:srgbClr val="1A335C"/>
           </a:solidFill>
           <a:ln>
             <a:noFill/>
@@ -4310,54 +4633,20 @@
       </p:sp>
       <p:sp>
         <p:nvSpPr>
-          <p:cNvPr id="3" name="TextBox 2"/>
-          <p:cNvSpPr txBox="1"/>
-          <p:nvPr/>
-        </p:nvSpPr>
-        <p:spPr>
-          <a:xfrm>
-            <a:off x="274320" y="91440"/>
-            <a:ext cx="11612880" cy="822960"/>
-          </a:xfrm>
-          <a:prstGeom prst="rect">
-            <a:avLst/>
-          </a:prstGeom>
-          <a:noFill/>
-        </p:spPr>
-        <p:txBody>
-          <a:bodyPr wrap="square">
-            <a:spAutoFit/>
-          </a:bodyPr>
-          <a:lstStyle/>
-          <a:p>
-            <a:pPr algn="l"/>
-            <a:r>
-              <a:rPr sz="2400" b="1">
-                <a:solidFill>
-                  <a:srgbClr val="FFFFFF"/>
-                </a:solidFill>
-              </a:rPr>
-              <a:t>模型超参数配置</a:t>
-            </a:r>
-          </a:p>
-        </p:txBody>
-      </p:sp>
-      <p:sp>
-        <p:nvSpPr>
-          <p:cNvPr id="4" name="Rectangle 3"/>
+          <p:cNvPr id="3" name="Rectangle 2"/>
           <p:cNvSpPr/>
           <p:nvPr/>
         </p:nvSpPr>
         <p:spPr>
           <a:xfrm>
-            <a:off x="365760" y="1097280"/>
-            <a:ext cx="5394960" cy="457200"/>
+            <a:off x="0" y="0"/>
+            <a:ext cx="164592" cy="6858000"/>
           </a:xfrm>
           <a:prstGeom prst="rect">
             <a:avLst/>
           </a:prstGeom>
           <a:solidFill>
-            <a:srgbClr val="D6E4F0"/>
+            <a:srgbClr val="1A335C"/>
           </a:solidFill>
           <a:ln>
             <a:noFill/>
@@ -4387,14 +4676,14 @@
       </p:sp>
       <p:sp>
         <p:nvSpPr>
-          <p:cNvPr id="5" name="TextBox 4"/>
+          <p:cNvPr id="4" name="TextBox 3"/>
           <p:cNvSpPr txBox="1"/>
           <p:nvPr/>
         </p:nvSpPr>
         <p:spPr>
           <a:xfrm>
-            <a:off x="457200" y="1143000"/>
-            <a:ext cx="5212080" cy="411480"/>
+            <a:off x="347472" y="91440"/>
+            <a:ext cx="11521440" cy="777240"/>
           </a:xfrm>
           <a:prstGeom prst="rect">
             <a:avLst/>
@@ -4409,236 +4698,32 @@
           <a:p>
             <a:pPr algn="l"/>
             <a:r>
-              <a:rPr sz="1800" b="1">
-                <a:solidFill>
-                  <a:srgbClr val="1F497D"/>
+              <a:rPr sz="2300" b="1" i="0">
+                <a:solidFill>
+                  <a:srgbClr val="FFFFFF"/>
                 </a:solidFill>
               </a:rPr>
-              <a:t>结构超参</a:t>
-            </a:r>
-          </a:p>
-        </p:txBody>
-      </p:sp>
-      <p:sp>
-        <p:nvSpPr>
-          <p:cNvPr id="6" name="TextBox 5"/>
-          <p:cNvSpPr txBox="1"/>
-          <p:nvPr/>
-        </p:nvSpPr>
-        <p:spPr>
-          <a:xfrm>
-            <a:off x="457200" y="1645920"/>
-            <a:ext cx="5303520" cy="502920"/>
-          </a:xfrm>
-          <a:prstGeom prst="rect">
-            <a:avLst/>
-          </a:prstGeom>
-          <a:noFill/>
-        </p:spPr>
-        <p:txBody>
-          <a:bodyPr wrap="square">
-            <a:spAutoFit/>
-          </a:bodyPr>
-          <a:lstStyle/>
-          <a:p>
-            <a:pPr algn="l"/>
-            <a:r>
-              <a:rPr sz="1700" b="0">
-                <a:solidFill>
-                  <a:srgbClr val="1A1A2E"/>
-                </a:solidFill>
-              </a:rPr>
-              <a:t>• image_size = 32</a:t>
-            </a:r>
-          </a:p>
-        </p:txBody>
-      </p:sp>
-      <p:sp>
-        <p:nvSpPr>
-          <p:cNvPr id="7" name="TextBox 6"/>
-          <p:cNvSpPr txBox="1"/>
-          <p:nvPr/>
-        </p:nvSpPr>
-        <p:spPr>
-          <a:xfrm>
-            <a:off x="457200" y="2121408"/>
-            <a:ext cx="5303520" cy="502920"/>
-          </a:xfrm>
-          <a:prstGeom prst="rect">
-            <a:avLst/>
-          </a:prstGeom>
-          <a:noFill/>
-        </p:spPr>
-        <p:txBody>
-          <a:bodyPr wrap="square">
-            <a:spAutoFit/>
-          </a:bodyPr>
-          <a:lstStyle/>
-          <a:p>
-            <a:pPr algn="l"/>
-            <a:r>
-              <a:rPr sz="1700" b="0">
-                <a:solidFill>
-                  <a:srgbClr val="1A1A2E"/>
-                </a:solidFill>
-              </a:rPr>
-              <a:t>• patch_size = 4（num_patches=64）</a:t>
-            </a:r>
-          </a:p>
-        </p:txBody>
-      </p:sp>
-      <p:sp>
-        <p:nvSpPr>
-          <p:cNvPr id="8" name="TextBox 7"/>
-          <p:cNvSpPr txBox="1"/>
-          <p:nvPr/>
-        </p:nvSpPr>
-        <p:spPr>
-          <a:xfrm>
-            <a:off x="457200" y="2596896"/>
-            <a:ext cx="5303520" cy="502920"/>
-          </a:xfrm>
-          <a:prstGeom prst="rect">
-            <a:avLst/>
-          </a:prstGeom>
-          <a:noFill/>
-        </p:spPr>
-        <p:txBody>
-          <a:bodyPr wrap="square">
-            <a:spAutoFit/>
-          </a:bodyPr>
-          <a:lstStyle/>
-          <a:p>
-            <a:pPr algn="l"/>
-            <a:r>
-              <a:rPr sz="1700" b="0">
-                <a:solidFill>
-                  <a:srgbClr val="1A1A2E"/>
-                </a:solidFill>
-              </a:rPr>
-              <a:t>• embed_dim = 192</a:t>
-            </a:r>
-          </a:p>
-        </p:txBody>
-      </p:sp>
-      <p:sp>
-        <p:nvSpPr>
-          <p:cNvPr id="9" name="TextBox 8"/>
-          <p:cNvSpPr txBox="1"/>
-          <p:nvPr/>
-        </p:nvSpPr>
-        <p:spPr>
-          <a:xfrm>
-            <a:off x="457200" y="3072384"/>
-            <a:ext cx="5303520" cy="502920"/>
-          </a:xfrm>
-          <a:prstGeom prst="rect">
-            <a:avLst/>
-          </a:prstGeom>
-          <a:noFill/>
-        </p:spPr>
-        <p:txBody>
-          <a:bodyPr wrap="square">
-            <a:spAutoFit/>
-          </a:bodyPr>
-          <a:lstStyle/>
-          <a:p>
-            <a:pPr algn="l"/>
-            <a:r>
-              <a:rPr sz="1700" b="0">
-                <a:solidFill>
-                  <a:srgbClr val="1A1A2E"/>
-                </a:solidFill>
-              </a:rPr>
-              <a:t>• depth = 6（Transformer 层数）</a:t>
-            </a:r>
-          </a:p>
-        </p:txBody>
-      </p:sp>
-      <p:sp>
-        <p:nvSpPr>
-          <p:cNvPr id="10" name="TextBox 9"/>
-          <p:cNvSpPr txBox="1"/>
-          <p:nvPr/>
-        </p:nvSpPr>
-        <p:spPr>
-          <a:xfrm>
-            <a:off x="457200" y="3547872"/>
-            <a:ext cx="5303520" cy="502920"/>
-          </a:xfrm>
-          <a:prstGeom prst="rect">
-            <a:avLst/>
-          </a:prstGeom>
-          <a:noFill/>
-        </p:spPr>
-        <p:txBody>
-          <a:bodyPr wrap="square">
-            <a:spAutoFit/>
-          </a:bodyPr>
-          <a:lstStyle/>
-          <a:p>
-            <a:pPr algn="l"/>
-            <a:r>
-              <a:rPr sz="1700" b="0">
-                <a:solidFill>
-                  <a:srgbClr val="1A1A2E"/>
-                </a:solidFill>
-              </a:rPr>
-              <a:t>• num_heads = 3</a:t>
-            </a:r>
-          </a:p>
-        </p:txBody>
-      </p:sp>
-      <p:sp>
-        <p:nvSpPr>
-          <p:cNvPr id="11" name="TextBox 10"/>
-          <p:cNvSpPr txBox="1"/>
-          <p:nvPr/>
-        </p:nvSpPr>
-        <p:spPr>
-          <a:xfrm>
-            <a:off x="457200" y="4023360"/>
-            <a:ext cx="5303520" cy="502920"/>
-          </a:xfrm>
-          <a:prstGeom prst="rect">
-            <a:avLst/>
-          </a:prstGeom>
-          <a:noFill/>
-        </p:spPr>
-        <p:txBody>
-          <a:bodyPr wrap="square">
-            <a:spAutoFit/>
-          </a:bodyPr>
-          <a:lstStyle/>
-          <a:p>
-            <a:pPr algn="l"/>
-            <a:r>
-              <a:rPr sz="1700" b="0">
-                <a:solidFill>
-                  <a:srgbClr val="1A1A2E"/>
-                </a:solidFill>
-              </a:rPr>
-              <a:t>• mlp_ratio = 4.0</a:t>
-            </a:r>
-          </a:p>
-        </p:txBody>
-      </p:sp>
-      <p:sp>
-        <p:nvSpPr>
-          <p:cNvPr id="12" name="Rectangle 11"/>
+              <a:t>解决方案：训练策略与超参数</a:t>
+            </a:r>
+          </a:p>
+        </p:txBody>
+      </p:sp>
+      <p:sp>
+        <p:nvSpPr>
+          <p:cNvPr id="5" name="Rectangle 4"/>
           <p:cNvSpPr/>
           <p:nvPr/>
         </p:nvSpPr>
         <p:spPr>
           <a:xfrm>
-            <a:off x="6400800" y="1097280"/>
-            <a:ext cx="5394960" cy="457200"/>
+            <a:off x="347472" y="1051560"/>
+            <a:ext cx="5394960" cy="438912"/>
           </a:xfrm>
           <a:prstGeom prst="rect">
             <a:avLst/>
           </a:prstGeom>
           <a:solidFill>
-            <a:srgbClr val="D6E4F0"/>
+            <a:srgbClr val="E8F0F8"/>
           </a:solidFill>
           <a:ln>
             <a:noFill/>
@@ -4668,14 +4753,14 @@
       </p:sp>
       <p:sp>
         <p:nvSpPr>
-          <p:cNvPr id="13" name="TextBox 12"/>
+          <p:cNvPr id="6" name="TextBox 5"/>
           <p:cNvSpPr txBox="1"/>
           <p:nvPr/>
         </p:nvSpPr>
         <p:spPr>
           <a:xfrm>
-            <a:off x="6492240" y="1143000"/>
-            <a:ext cx="5212080" cy="411480"/>
+            <a:off x="438912" y="1097280"/>
+            <a:ext cx="5212080" cy="347472"/>
           </a:xfrm>
           <a:prstGeom prst="rect">
             <a:avLst/>
@@ -4690,26 +4775,26 @@
           <a:p>
             <a:pPr algn="l"/>
             <a:r>
-              <a:rPr sz="1800" b="1">
-                <a:solidFill>
-                  <a:srgbClr val="1F497D"/>
+              <a:rPr sz="1700" b="1" i="0">
+                <a:solidFill>
+                  <a:srgbClr val="1A335C"/>
                 </a:solidFill>
               </a:rPr>
-              <a:t>训练超参</a:t>
-            </a:r>
-          </a:p>
-        </p:txBody>
-      </p:sp>
-      <p:sp>
-        <p:nvSpPr>
-          <p:cNvPr id="14" name="TextBox 13"/>
+              <a:t>模型超参</a:t>
+            </a:r>
+          </a:p>
+        </p:txBody>
+      </p:sp>
+      <p:sp>
+        <p:nvSpPr>
+          <p:cNvPr id="7" name="TextBox 6"/>
           <p:cNvSpPr txBox="1"/>
           <p:nvPr/>
         </p:nvSpPr>
         <p:spPr>
           <a:xfrm>
-            <a:off x="6492240" y="1645920"/>
-            <a:ext cx="5212080" cy="502920"/>
+            <a:off x="411480" y="1572768"/>
+            <a:ext cx="5321808" cy="475488"/>
           </a:xfrm>
           <a:prstGeom prst="rect">
             <a:avLst/>
@@ -4724,26 +4809,26 @@
           <a:p>
             <a:pPr algn="l"/>
             <a:r>
-              <a:rPr sz="1700" b="0">
-                <a:solidFill>
-                  <a:srgbClr val="1A1A2E"/>
+              <a:rPr sz="1600" b="0" i="0">
+                <a:solidFill>
+                  <a:srgbClr val="1C1C1C"/>
                 </a:solidFill>
               </a:rPr>
-              <a:t>• epochs = 50</a:t>
-            </a:r>
-          </a:p>
-        </p:txBody>
-      </p:sp>
-      <p:sp>
-        <p:nvSpPr>
-          <p:cNvPr id="15" name="TextBox 14"/>
+              <a:t>▸ image_size=32, patch_size=4</a:t>
+            </a:r>
+          </a:p>
+        </p:txBody>
+      </p:sp>
+      <p:sp>
+        <p:nvSpPr>
+          <p:cNvPr id="8" name="TextBox 7"/>
           <p:cNvSpPr txBox="1"/>
           <p:nvPr/>
         </p:nvSpPr>
         <p:spPr>
           <a:xfrm>
-            <a:off x="6492240" y="2121408"/>
-            <a:ext cx="5212080" cy="502920"/>
+            <a:off x="411480" y="2048256"/>
+            <a:ext cx="5321808" cy="475488"/>
           </a:xfrm>
           <a:prstGeom prst="rect">
             <a:avLst/>
@@ -4758,26 +4843,26 @@
           <a:p>
             <a:pPr algn="l"/>
             <a:r>
-              <a:rPr sz="1700" b="0">
-                <a:solidFill>
-                  <a:srgbClr val="1A1A2E"/>
+              <a:rPr sz="1600" b="0" i="0">
+                <a:solidFill>
+                  <a:srgbClr val="1C1C1C"/>
                 </a:solidFill>
               </a:rPr>
-              <a:t>• batch_size = 128</a:t>
-            </a:r>
-          </a:p>
-        </p:txBody>
-      </p:sp>
-      <p:sp>
-        <p:nvSpPr>
-          <p:cNvPr id="16" name="TextBox 15"/>
+              <a:t>▸ embed_dim=192, depth=6</a:t>
+            </a:r>
+          </a:p>
+        </p:txBody>
+      </p:sp>
+      <p:sp>
+        <p:nvSpPr>
+          <p:cNvPr id="9" name="TextBox 8"/>
           <p:cNvSpPr txBox="1"/>
           <p:nvPr/>
         </p:nvSpPr>
         <p:spPr>
           <a:xfrm>
-            <a:off x="6492240" y="2596896"/>
-            <a:ext cx="5212080" cy="502920"/>
+            <a:off x="411480" y="2523744"/>
+            <a:ext cx="5321808" cy="475488"/>
           </a:xfrm>
           <a:prstGeom prst="rect">
             <a:avLst/>
@@ -4792,26 +4877,26 @@
           <a:p>
             <a:pPr algn="l"/>
             <a:r>
-              <a:rPr sz="1700" b="0">
-                <a:solidFill>
-                  <a:srgbClr val="1A1A2E"/>
+              <a:rPr sz="1600" b="0" i="0">
+                <a:solidFill>
+                  <a:srgbClr val="1C1C1C"/>
                 </a:solidFill>
               </a:rPr>
-              <a:t>• optimizer = AdamW</a:t>
-            </a:r>
-          </a:p>
-        </p:txBody>
-      </p:sp>
-      <p:sp>
-        <p:nvSpPr>
-          <p:cNvPr id="17" name="TextBox 16"/>
+              <a:t>▸ num_heads=3, mlp_ratio=4.0</a:t>
+            </a:r>
+          </a:p>
+        </p:txBody>
+      </p:sp>
+      <p:sp>
+        <p:nvSpPr>
+          <p:cNvPr id="10" name="TextBox 9"/>
           <p:cNvSpPr txBox="1"/>
           <p:nvPr/>
         </p:nvSpPr>
         <p:spPr>
           <a:xfrm>
-            <a:off x="6492240" y="3072384"/>
-            <a:ext cx="5212080" cy="502920"/>
+            <a:off x="411480" y="2999232"/>
+            <a:ext cx="5321808" cy="475488"/>
           </a:xfrm>
           <a:prstGeom prst="rect">
             <a:avLst/>
@@ -4826,26 +4911,26 @@
           <a:p>
             <a:pPr algn="l"/>
             <a:r>
-              <a:rPr sz="1700" b="0">
-                <a:solidFill>
-                  <a:srgbClr val="1A1A2E"/>
+              <a:rPr sz="1600" b="0" i="0">
+                <a:solidFill>
+                  <a:srgbClr val="1C1C1C"/>
                 </a:solidFill>
               </a:rPr>
-              <a:t>• lr = 3e-4</a:t>
-            </a:r>
-          </a:p>
-        </p:txBody>
-      </p:sp>
-      <p:sp>
-        <p:nvSpPr>
-          <p:cNvPr id="18" name="TextBox 17"/>
+              <a:t>▸ dropout=0.1</a:t>
+            </a:r>
+          </a:p>
+        </p:txBody>
+      </p:sp>
+      <p:sp>
+        <p:nvSpPr>
+          <p:cNvPr id="11" name="TextBox 10"/>
           <p:cNvSpPr txBox="1"/>
           <p:nvPr/>
         </p:nvSpPr>
         <p:spPr>
           <a:xfrm>
-            <a:off x="6492240" y="3547872"/>
-            <a:ext cx="5212080" cy="502920"/>
+            <a:off x="411480" y="3474720"/>
+            <a:ext cx="5321808" cy="475488"/>
           </a:xfrm>
           <a:prstGeom prst="rect">
             <a:avLst/>
@@ -4860,26 +4945,69 @@
           <a:p>
             <a:pPr algn="l"/>
             <a:r>
-              <a:rPr sz="1700" b="0">
-                <a:solidFill>
-                  <a:srgbClr val="1A1A2E"/>
+              <a:rPr sz="1600" b="0" i="0">
+                <a:solidFill>
+                  <a:srgbClr val="1C1C1C"/>
                 </a:solidFill>
               </a:rPr>
-              <a:t>• weight_decay = 0.05</a:t>
-            </a:r>
-          </a:p>
-        </p:txBody>
-      </p:sp>
-      <p:sp>
-        <p:nvSpPr>
-          <p:cNvPr id="19" name="TextBox 18"/>
+              <a:t>▸ 总参数量：约 3.7M</a:t>
+            </a:r>
+          </a:p>
+        </p:txBody>
+      </p:sp>
+      <p:sp>
+        <p:nvSpPr>
+          <p:cNvPr id="12" name="Rectangle 11"/>
+          <p:cNvSpPr/>
+          <p:nvPr/>
+        </p:nvSpPr>
+        <p:spPr>
+          <a:xfrm>
+            <a:off x="6355080" y="1051560"/>
+            <a:ext cx="5394960" cy="438912"/>
+          </a:xfrm>
+          <a:prstGeom prst="rect">
+            <a:avLst/>
+          </a:prstGeom>
+          <a:solidFill>
+            <a:srgbClr val="E8F0F8"/>
+          </a:solidFill>
+          <a:ln>
+            <a:noFill/>
+          </a:ln>
+        </p:spPr>
+        <p:style>
+          <a:lnRef idx="1">
+            <a:schemeClr val="accent1"/>
+          </a:lnRef>
+          <a:fillRef idx="3">
+            <a:schemeClr val="accent1"/>
+          </a:fillRef>
+          <a:effectRef idx="2">
+            <a:schemeClr val="accent1"/>
+          </a:effectRef>
+          <a:fontRef idx="minor">
+            <a:schemeClr val="lt1"/>
+          </a:fontRef>
+        </p:style>
+        <p:txBody>
+          <a:bodyPr rtlCol="0" anchor="ctr"/>
+          <a:lstStyle/>
+          <a:p>
+            <a:pPr algn="ctr"/>
+          </a:p>
+        </p:txBody>
+      </p:sp>
+      <p:sp>
+        <p:nvSpPr>
+          <p:cNvPr id="13" name="TextBox 12"/>
           <p:cNvSpPr txBox="1"/>
           <p:nvPr/>
         </p:nvSpPr>
         <p:spPr>
           <a:xfrm>
-            <a:off x="6492240" y="4023360"/>
-            <a:ext cx="5212080" cy="502920"/>
+            <a:off x="6446520" y="1097280"/>
+            <a:ext cx="5212080" cy="347472"/>
           </a:xfrm>
           <a:prstGeom prst="rect">
             <a:avLst/>
@@ -4894,32 +5022,202 @@
           <a:p>
             <a:pPr algn="l"/>
             <a:r>
-              <a:rPr sz="1700" b="0">
-                <a:solidFill>
-                  <a:srgbClr val="1A1A2E"/>
+              <a:rPr sz="1700" b="1" i="0">
+                <a:solidFill>
+                  <a:srgbClr val="1A335C"/>
                 </a:solidFill>
               </a:rPr>
-              <a:t>• scheduler = CosineAnnealingLR</a:t>
-            </a:r>
-          </a:p>
-        </p:txBody>
-      </p:sp>
-      <p:sp>
-        <p:nvSpPr>
-          <p:cNvPr id="20" name="Rectangle 19"/>
+              <a:t>训练超参</a:t>
+            </a:r>
+          </a:p>
+        </p:txBody>
+      </p:sp>
+      <p:sp>
+        <p:nvSpPr>
+          <p:cNvPr id="14" name="TextBox 13"/>
+          <p:cNvSpPr txBox="1"/>
+          <p:nvPr/>
+        </p:nvSpPr>
+        <p:spPr>
+          <a:xfrm>
+            <a:off x="6400800" y="1572768"/>
+            <a:ext cx="5321808" cy="475488"/>
+          </a:xfrm>
+          <a:prstGeom prst="rect">
+            <a:avLst/>
+          </a:prstGeom>
+          <a:noFill/>
+        </p:spPr>
+        <p:txBody>
+          <a:bodyPr wrap="square">
+            <a:spAutoFit/>
+          </a:bodyPr>
+          <a:lstStyle/>
+          <a:p>
+            <a:pPr algn="l"/>
+            <a:r>
+              <a:rPr sz="1600" b="0" i="0">
+                <a:solidFill>
+                  <a:srgbClr val="1C1C1C"/>
+                </a:solidFill>
+              </a:rPr>
+              <a:t>▸ epochs=50（从零训练需要更多轮）</a:t>
+            </a:r>
+          </a:p>
+        </p:txBody>
+      </p:sp>
+      <p:sp>
+        <p:nvSpPr>
+          <p:cNvPr id="15" name="TextBox 14"/>
+          <p:cNvSpPr txBox="1"/>
+          <p:nvPr/>
+        </p:nvSpPr>
+        <p:spPr>
+          <a:xfrm>
+            <a:off x="6400800" y="2048256"/>
+            <a:ext cx="5321808" cy="475488"/>
+          </a:xfrm>
+          <a:prstGeom prst="rect">
+            <a:avLst/>
+          </a:prstGeom>
+          <a:noFill/>
+        </p:spPr>
+        <p:txBody>
+          <a:bodyPr wrap="square">
+            <a:spAutoFit/>
+          </a:bodyPr>
+          <a:lstStyle/>
+          <a:p>
+            <a:pPr algn="l"/>
+            <a:r>
+              <a:rPr sz="1600" b="0" i="0">
+                <a:solidFill>
+                  <a:srgbClr val="1C1C1C"/>
+                </a:solidFill>
+              </a:rPr>
+              <a:t>▸ batch_size=128</a:t>
+            </a:r>
+          </a:p>
+        </p:txBody>
+      </p:sp>
+      <p:sp>
+        <p:nvSpPr>
+          <p:cNvPr id="16" name="TextBox 15"/>
+          <p:cNvSpPr txBox="1"/>
+          <p:nvPr/>
+        </p:nvSpPr>
+        <p:spPr>
+          <a:xfrm>
+            <a:off x="6400800" y="2523744"/>
+            <a:ext cx="5321808" cy="475488"/>
+          </a:xfrm>
+          <a:prstGeom prst="rect">
+            <a:avLst/>
+          </a:prstGeom>
+          <a:noFill/>
+        </p:spPr>
+        <p:txBody>
+          <a:bodyPr wrap="square">
+            <a:spAutoFit/>
+          </a:bodyPr>
+          <a:lstStyle/>
+          <a:p>
+            <a:pPr algn="l"/>
+            <a:r>
+              <a:rPr sz="1600" b="0" i="0">
+                <a:solidFill>
+                  <a:srgbClr val="1C1C1C"/>
+                </a:solidFill>
+              </a:rPr>
+              <a:t>▸ optimizer=AdamW, lr=3e-4</a:t>
+            </a:r>
+          </a:p>
+        </p:txBody>
+      </p:sp>
+      <p:sp>
+        <p:nvSpPr>
+          <p:cNvPr id="17" name="TextBox 16"/>
+          <p:cNvSpPr txBox="1"/>
+          <p:nvPr/>
+        </p:nvSpPr>
+        <p:spPr>
+          <a:xfrm>
+            <a:off x="6400800" y="2999232"/>
+            <a:ext cx="5321808" cy="475488"/>
+          </a:xfrm>
+          <a:prstGeom prst="rect">
+            <a:avLst/>
+          </a:prstGeom>
+          <a:noFill/>
+        </p:spPr>
+        <p:txBody>
+          <a:bodyPr wrap="square">
+            <a:spAutoFit/>
+          </a:bodyPr>
+          <a:lstStyle/>
+          <a:p>
+            <a:pPr algn="l"/>
+            <a:r>
+              <a:rPr sz="1600" b="0" i="0">
+                <a:solidFill>
+                  <a:srgbClr val="1C1C1C"/>
+                </a:solidFill>
+              </a:rPr>
+              <a:t>▸ weight_decay=0.05（ViT 需要强正则）</a:t>
+            </a:r>
+          </a:p>
+        </p:txBody>
+      </p:sp>
+      <p:sp>
+        <p:nvSpPr>
+          <p:cNvPr id="18" name="TextBox 17"/>
+          <p:cNvSpPr txBox="1"/>
+          <p:nvPr/>
+        </p:nvSpPr>
+        <p:spPr>
+          <a:xfrm>
+            <a:off x="6400800" y="3474720"/>
+            <a:ext cx="5321808" cy="475488"/>
+          </a:xfrm>
+          <a:prstGeom prst="rect">
+            <a:avLst/>
+          </a:prstGeom>
+          <a:noFill/>
+        </p:spPr>
+        <p:txBody>
+          <a:bodyPr wrap="square">
+            <a:spAutoFit/>
+          </a:bodyPr>
+          <a:lstStyle/>
+          <a:p>
+            <a:pPr algn="l"/>
+            <a:r>
+              <a:rPr sz="1600" b="0" i="0">
+                <a:solidFill>
+                  <a:srgbClr val="1C1C1C"/>
+                </a:solidFill>
+              </a:rPr>
+              <a:t>▸ scheduler=CosineAnnealingLR</a:t>
+            </a:r>
+          </a:p>
+        </p:txBody>
+      </p:sp>
+      <p:sp>
+        <p:nvSpPr>
+          <p:cNvPr id="19" name="Rectangle 18"/>
           <p:cNvSpPr/>
           <p:nvPr/>
         </p:nvSpPr>
         <p:spPr>
           <a:xfrm>
-            <a:off x="0" y="6675120"/>
-            <a:ext cx="12188952" cy="73152"/>
+            <a:off x="0" y="6748272"/>
+            <a:ext cx="12188952" cy="109728"/>
           </a:xfrm>
           <a:prstGeom prst="rect">
             <a:avLst/>
           </a:prstGeom>
           <a:solidFill>
-            <a:srgbClr val="1F497D"/>
+            <a:srgbClr val="1A335C"/>
           </a:solidFill>
           <a:ln>
             <a:noFill/>
@@ -4982,13 +5280,13 @@
         <p:spPr>
           <a:xfrm>
             <a:off x="0" y="0"/>
-            <a:ext cx="12188952" cy="1005840"/>
+            <a:ext cx="12188952" cy="960120"/>
           </a:xfrm>
           <a:prstGeom prst="rect">
             <a:avLst/>
           </a:prstGeom>
           <a:solidFill>
-            <a:srgbClr val="1F497D"/>
+            <a:srgbClr val="1A335C"/>
           </a:solidFill>
           <a:ln>
             <a:noFill/>
@@ -5018,54 +5316,20 @@
       </p:sp>
       <p:sp>
         <p:nvSpPr>
-          <p:cNvPr id="3" name="TextBox 2"/>
-          <p:cNvSpPr txBox="1"/>
-          <p:nvPr/>
-        </p:nvSpPr>
-        <p:spPr>
-          <a:xfrm>
-            <a:off x="274320" y="91440"/>
-            <a:ext cx="11612880" cy="822960"/>
-          </a:xfrm>
-          <a:prstGeom prst="rect">
-            <a:avLst/>
-          </a:prstGeom>
-          <a:noFill/>
-        </p:spPr>
-        <p:txBody>
-          <a:bodyPr wrap="square">
-            <a:spAutoFit/>
-          </a:bodyPr>
-          <a:lstStyle/>
-          <a:p>
-            <a:pPr algn="l"/>
-            <a:r>
-              <a:rPr sz="2400" b="1">
-                <a:solidFill>
-                  <a:srgbClr val="FFFFFF"/>
-                </a:solidFill>
-              </a:rPr>
-              <a:t>核心代码：TransformerBlock（Pre-Norm）</a:t>
-            </a:r>
-          </a:p>
-        </p:txBody>
-      </p:sp>
-      <p:sp>
-        <p:nvSpPr>
-          <p:cNvPr id="4" name="Rectangle 3"/>
+          <p:cNvPr id="3" name="Rectangle 2"/>
           <p:cNvSpPr/>
           <p:nvPr/>
         </p:nvSpPr>
         <p:spPr>
           <a:xfrm>
-            <a:off x="365760" y="1097280"/>
-            <a:ext cx="11430000" cy="5394960"/>
+            <a:off x="0" y="0"/>
+            <a:ext cx="164592" cy="6858000"/>
           </a:xfrm>
           <a:prstGeom prst="rect">
             <a:avLst/>
           </a:prstGeom>
           <a:solidFill>
-            <a:srgbClr val="1E1E1E"/>
+            <a:srgbClr val="1A335C"/>
           </a:solidFill>
           <a:ln>
             <a:noFill/>
@@ -5095,14 +5359,14 @@
       </p:sp>
       <p:sp>
         <p:nvSpPr>
-          <p:cNvPr id="5" name="TextBox 4"/>
+          <p:cNvPr id="4" name="TextBox 3"/>
           <p:cNvSpPr txBox="1"/>
           <p:nvPr/>
         </p:nvSpPr>
         <p:spPr>
           <a:xfrm>
-            <a:off x="502920" y="1188720"/>
-            <a:ext cx="11155680" cy="5212080"/>
+            <a:off x="347472" y="91440"/>
+            <a:ext cx="11521440" cy="777240"/>
           </a:xfrm>
           <a:prstGeom prst="rect">
             <a:avLst/>
@@ -5117,25 +5381,102 @@
           <a:p>
             <a:pPr algn="l"/>
             <a:r>
-              <a:rPr sz="1300" b="0">
-                <a:solidFill>
-                  <a:srgbClr val="D4D4D4"/>
+              <a:rPr sz="2300" b="1" i="0">
+                <a:solidFill>
+                  <a:srgbClr val="FFFFFF"/>
+                </a:solidFill>
+              </a:rPr>
+              <a:t>核心代码：TransformerBlock（Pre-Norm）</a:t>
+            </a:r>
+          </a:p>
+        </p:txBody>
+      </p:sp>
+      <p:sp>
+        <p:nvSpPr>
+          <p:cNvPr id="5" name="Rectangle 4"/>
+          <p:cNvSpPr/>
+          <p:nvPr/>
+        </p:nvSpPr>
+        <p:spPr>
+          <a:xfrm>
+            <a:off x="347472" y="1051560"/>
+            <a:ext cx="11475720" cy="4206240"/>
+          </a:xfrm>
+          <a:prstGeom prst="rect">
+            <a:avLst/>
+          </a:prstGeom>
+          <a:solidFill>
+            <a:srgbClr val="1E1E2E"/>
+          </a:solidFill>
+          <a:ln>
+            <a:noFill/>
+          </a:ln>
+        </p:spPr>
+        <p:style>
+          <a:lnRef idx="1">
+            <a:schemeClr val="accent1"/>
+          </a:lnRef>
+          <a:fillRef idx="3">
+            <a:schemeClr val="accent1"/>
+          </a:fillRef>
+          <a:effectRef idx="2">
+            <a:schemeClr val="accent1"/>
+          </a:effectRef>
+          <a:fontRef idx="minor">
+            <a:schemeClr val="lt1"/>
+          </a:fontRef>
+        </p:style>
+        <p:txBody>
+          <a:bodyPr rtlCol="0" anchor="ctr"/>
+          <a:lstStyle/>
+          <a:p>
+            <a:pPr algn="ctr"/>
+          </a:p>
+        </p:txBody>
+      </p:sp>
+      <p:sp>
+        <p:nvSpPr>
+          <p:cNvPr id="6" name="TextBox 5"/>
+          <p:cNvSpPr txBox="1"/>
+          <p:nvPr/>
+        </p:nvSpPr>
+        <p:spPr>
+          <a:xfrm>
+            <a:off x="475488" y="1115568"/>
+            <a:ext cx="11201400" cy="4114800"/>
+          </a:xfrm>
+          <a:prstGeom prst="rect">
+            <a:avLst/>
+          </a:prstGeom>
+          <a:noFill/>
+        </p:spPr>
+        <p:txBody>
+          <a:bodyPr wrap="square">
+            <a:spAutoFit/>
+          </a:bodyPr>
+          <a:lstStyle/>
+          <a:p>
+            <a:pPr algn="l"/>
+            <a:r>
+              <a:rPr sz="1200" b="0" i="0">
+                <a:solidFill>
+                  <a:srgbClr val="CBD3E3"/>
                 </a:solidFill>
               </a:rPr>
               <a:t>class TransformerBlock(nn.Module):
     def __init__(self, dim, num_heads, mlp_ratio, dropout):
         super().__init__()
         self.norm1 = nn.LayerNorm(dim)
-        # 多头自注意力（batch_first=True）
-        self.attn  = nn.MultiheadAttention(dim, num_heads,
-                         dropout=dropout, batch_first=True)
+        self.attn  = nn.MultiheadAttention(
+            dim, num_heads, dropout=dropout, batch_first=True)
         self.norm2 = nn.LayerNorm(dim)
         self.mlp   = MLP(dim, int(dim * mlp_ratio), dropout)
     def forward(self, x):
-        # Pre-Norm + 残差连接
-        attn_out, _ = self.attn(self.norm1(x), self.norm1(x),
-                                self.norm1(x), need_weights=False)
-        x = x + attn_out
+        # Pre-Norm 形式：先做 LayerNorm 再进 Attention，训练更稳定
+        attn_out, _ = self.attn(
+            self.norm1(x), self.norm1(x), self.norm1(x),
+            need_weights=False)
+        x = x + attn_out        # 残差连接
         x = x + self.mlp(self.norm2(x))
         return x</a:t>
             </a:r>
@@ -5144,20 +5485,54 @@
       </p:sp>
       <p:sp>
         <p:nvSpPr>
-          <p:cNvPr id="6" name="Rectangle 5"/>
+          <p:cNvPr id="7" name="TextBox 6"/>
+          <p:cNvSpPr txBox="1"/>
+          <p:nvPr/>
+        </p:nvSpPr>
+        <p:spPr>
+          <a:xfrm>
+            <a:off x="411480" y="5349240"/>
+            <a:ext cx="11247120" cy="731520"/>
+          </a:xfrm>
+          <a:prstGeom prst="rect">
+            <a:avLst/>
+          </a:prstGeom>
+          <a:noFill/>
+        </p:spPr>
+        <p:txBody>
+          <a:bodyPr wrap="square">
+            <a:spAutoFit/>
+          </a:bodyPr>
+          <a:lstStyle/>
+          <a:p>
+            <a:pPr algn="l"/>
+            <a:r>
+              <a:rPr sz="1400" b="0" i="1">
+                <a:solidFill>
+                  <a:srgbClr val="555555"/>
+                </a:solidFill>
+              </a:rPr>
+              <a:t>Pre-Norm 相比 Post-Norm 在深层网络中梯度更稳定，是 ViT 的标准做法。</a:t>
+            </a:r>
+          </a:p>
+        </p:txBody>
+      </p:sp>
+      <p:sp>
+        <p:nvSpPr>
+          <p:cNvPr id="8" name="Rectangle 7"/>
           <p:cNvSpPr/>
           <p:nvPr/>
         </p:nvSpPr>
         <p:spPr>
           <a:xfrm>
-            <a:off x="0" y="6675120"/>
-            <a:ext cx="12188952" cy="73152"/>
+            <a:off x="0" y="6748272"/>
+            <a:ext cx="12188952" cy="109728"/>
           </a:xfrm>
           <a:prstGeom prst="rect">
             <a:avLst/>
           </a:prstGeom>
           <a:solidFill>
-            <a:srgbClr val="1F497D"/>
+            <a:srgbClr val="1A335C"/>
           </a:solidFill>
           <a:ln>
             <a:noFill/>
@@ -5220,13 +5595,13 @@
         <p:spPr>
           <a:xfrm>
             <a:off x="0" y="0"/>
-            <a:ext cx="12188952" cy="1005840"/>
+            <a:ext cx="12188952" cy="960120"/>
           </a:xfrm>
           <a:prstGeom prst="rect">
             <a:avLst/>
           </a:prstGeom>
           <a:solidFill>
-            <a:srgbClr val="1F497D"/>
+            <a:srgbClr val="1A335C"/>
           </a:solidFill>
           <a:ln>
             <a:noFill/>
@@ -5256,54 +5631,20 @@
       </p:sp>
       <p:sp>
         <p:nvSpPr>
-          <p:cNvPr id="3" name="TextBox 2"/>
-          <p:cNvSpPr txBox="1"/>
-          <p:nvPr/>
-        </p:nvSpPr>
-        <p:spPr>
-          <a:xfrm>
-            <a:off x="274320" y="91440"/>
-            <a:ext cx="11612880" cy="822960"/>
-          </a:xfrm>
-          <a:prstGeom prst="rect">
-            <a:avLst/>
-          </a:prstGeom>
-          <a:noFill/>
-        </p:spPr>
-        <p:txBody>
-          <a:bodyPr wrap="square">
-            <a:spAutoFit/>
-          </a:bodyPr>
-          <a:lstStyle/>
-          <a:p>
-            <a:pPr algn="l"/>
-            <a:r>
-              <a:rPr sz="2400" b="1">
-                <a:solidFill>
-                  <a:srgbClr val="FFFFFF"/>
-                </a:solidFill>
-              </a:rPr>
-              <a:t>实验结果</a:t>
-            </a:r>
-          </a:p>
-        </p:txBody>
-      </p:sp>
-      <p:sp>
-        <p:nvSpPr>
-          <p:cNvPr id="4" name="Rectangle 3"/>
+          <p:cNvPr id="3" name="Rectangle 2"/>
           <p:cNvSpPr/>
           <p:nvPr/>
         </p:nvSpPr>
         <p:spPr>
           <a:xfrm>
-            <a:off x="457200" y="1280160"/>
-            <a:ext cx="2743200" cy="2011680"/>
+            <a:off x="0" y="0"/>
+            <a:ext cx="164592" cy="6858000"/>
           </a:xfrm>
           <a:prstGeom prst="rect">
             <a:avLst/>
           </a:prstGeom>
           <a:solidFill>
-            <a:srgbClr val="D6E4F0"/>
+            <a:srgbClr val="1A335C"/>
           </a:solidFill>
           <a:ln>
             <a:noFill/>
@@ -5333,14 +5674,14 @@
       </p:sp>
       <p:sp>
         <p:nvSpPr>
-          <p:cNvPr id="5" name="TextBox 4"/>
+          <p:cNvPr id="4" name="TextBox 3"/>
           <p:cNvSpPr txBox="1"/>
           <p:nvPr/>
         </p:nvSpPr>
         <p:spPr>
           <a:xfrm>
-            <a:off x="457200" y="1463040"/>
-            <a:ext cx="2743200" cy="914400"/>
+            <a:off x="347472" y="91440"/>
+            <a:ext cx="11521440" cy="777240"/>
           </a:xfrm>
           <a:prstGeom prst="rect">
             <a:avLst/>
@@ -5353,68 +5694,34 @@
           </a:bodyPr>
           <a:lstStyle/>
           <a:p>
-            <a:pPr algn="ctr"/>
-            <a:r>
-              <a:rPr sz="3200" b="1">
-                <a:solidFill>
-                  <a:srgbClr val="0A7A43"/>
+            <a:pPr algn="l"/>
+            <a:r>
+              <a:rPr sz="2300" b="1" i="0">
+                <a:solidFill>
+                  <a:srgbClr val="FFFFFF"/>
                 </a:solidFill>
               </a:rPr>
-              <a:t>80.48%</a:t>
-            </a:r>
-          </a:p>
-        </p:txBody>
-      </p:sp>
-      <p:sp>
-        <p:nvSpPr>
-          <p:cNvPr id="6" name="TextBox 5"/>
-          <p:cNvSpPr txBox="1"/>
-          <p:nvPr/>
-        </p:nvSpPr>
-        <p:spPr>
-          <a:xfrm>
-            <a:off x="457200" y="2468880"/>
-            <a:ext cx="2743200" cy="548640"/>
-          </a:xfrm>
-          <a:prstGeom prst="rect">
-            <a:avLst/>
-          </a:prstGeom>
-          <a:noFill/>
-        </p:spPr>
-        <p:txBody>
-          <a:bodyPr wrap="square">
-            <a:spAutoFit/>
-          </a:bodyPr>
-          <a:lstStyle/>
-          <a:p>
-            <a:pPr algn="ctr"/>
-            <a:r>
-              <a:rPr sz="1500" b="0">
-                <a:solidFill>
-                  <a:srgbClr val="1A1A2E"/>
-                </a:solidFill>
-              </a:rPr>
-              <a:t>测试准确率</a:t>
-            </a:r>
-          </a:p>
-        </p:txBody>
-      </p:sp>
-      <p:sp>
-        <p:nvSpPr>
-          <p:cNvPr id="7" name="Rectangle 6"/>
+              <a:t>实验结果与分析</a:t>
+            </a:r>
+          </a:p>
+        </p:txBody>
+      </p:sp>
+      <p:sp>
+        <p:nvSpPr>
+          <p:cNvPr id="5" name="Rectangle 4"/>
           <p:cNvSpPr/>
           <p:nvPr/>
         </p:nvSpPr>
         <p:spPr>
           <a:xfrm>
-            <a:off x="3291840" y="1280160"/>
-            <a:ext cx="2743200" cy="2011680"/>
+            <a:off x="365760" y="1097280"/>
+            <a:ext cx="3681983" cy="1920240"/>
           </a:xfrm>
           <a:prstGeom prst="rect">
             <a:avLst/>
           </a:prstGeom>
           <a:solidFill>
-            <a:srgbClr val="D6E4F0"/>
+            <a:srgbClr val="E8F0F8"/>
           </a:solidFill>
           <a:ln>
             <a:noFill/>
@@ -5444,88 +5751,20 @@
       </p:sp>
       <p:sp>
         <p:nvSpPr>
-          <p:cNvPr id="8" name="TextBox 7"/>
-          <p:cNvSpPr txBox="1"/>
-          <p:nvPr/>
-        </p:nvSpPr>
-        <p:spPr>
-          <a:xfrm>
-            <a:off x="3291840" y="1463040"/>
-            <a:ext cx="2743200" cy="914400"/>
-          </a:xfrm>
-          <a:prstGeom prst="rect">
-            <a:avLst/>
-          </a:prstGeom>
-          <a:noFill/>
-        </p:spPr>
-        <p:txBody>
-          <a:bodyPr wrap="square">
-            <a:spAutoFit/>
-          </a:bodyPr>
-          <a:lstStyle/>
-          <a:p>
-            <a:pPr algn="ctr"/>
-            <a:r>
-              <a:rPr sz="3200" b="1">
-                <a:solidFill>
-                  <a:srgbClr val="0A7A43"/>
-                </a:solidFill>
-              </a:rPr>
-              <a:t>80.52%</a:t>
-            </a:r>
-          </a:p>
-        </p:txBody>
-      </p:sp>
-      <p:sp>
-        <p:nvSpPr>
-          <p:cNvPr id="9" name="TextBox 8"/>
-          <p:cNvSpPr txBox="1"/>
-          <p:nvPr/>
-        </p:nvSpPr>
-        <p:spPr>
-          <a:xfrm>
-            <a:off x="3291840" y="2468880"/>
-            <a:ext cx="2743200" cy="548640"/>
-          </a:xfrm>
-          <a:prstGeom prst="rect">
-            <a:avLst/>
-          </a:prstGeom>
-          <a:noFill/>
-        </p:spPr>
-        <p:txBody>
-          <a:bodyPr wrap="square">
-            <a:spAutoFit/>
-          </a:bodyPr>
-          <a:lstStyle/>
-          <a:p>
-            <a:pPr algn="ctr"/>
-            <a:r>
-              <a:rPr sz="1500" b="0">
-                <a:solidFill>
-                  <a:srgbClr val="1A1A2E"/>
-                </a:solidFill>
-              </a:rPr>
-              <a:t>最优验证准确率</a:t>
-            </a:r>
-          </a:p>
-        </p:txBody>
-      </p:sp>
-      <p:sp>
-        <p:nvSpPr>
-          <p:cNvPr id="10" name="Rectangle 9"/>
+          <p:cNvPr id="6" name="Rectangle 5"/>
           <p:cNvSpPr/>
           <p:nvPr/>
         </p:nvSpPr>
         <p:spPr>
           <a:xfrm>
-            <a:off x="6126480" y="1280160"/>
-            <a:ext cx="2743200" cy="2011680"/>
+            <a:off x="365760" y="1097280"/>
+            <a:ext cx="3681983" cy="73152"/>
           </a:xfrm>
           <a:prstGeom prst="rect">
             <a:avLst/>
           </a:prstGeom>
           <a:solidFill>
-            <a:srgbClr val="D6E4F0"/>
+            <a:srgbClr val="1A335C"/>
           </a:solidFill>
           <a:ln>
             <a:noFill/>
@@ -5555,14 +5794,14 @@
       </p:sp>
       <p:sp>
         <p:nvSpPr>
-          <p:cNvPr id="11" name="TextBox 10"/>
+          <p:cNvPr id="7" name="TextBox 6"/>
           <p:cNvSpPr txBox="1"/>
           <p:nvPr/>
         </p:nvSpPr>
         <p:spPr>
           <a:xfrm>
-            <a:off x="6126480" y="1463040"/>
-            <a:ext cx="2743200" cy="914400"/>
+            <a:off x="365760" y="1234440"/>
+            <a:ext cx="3681983" cy="914400"/>
           </a:xfrm>
           <a:prstGeom prst="rect">
             <a:avLst/>
@@ -5577,26 +5816,26 @@
           <a:p>
             <a:pPr algn="ctr"/>
             <a:r>
-              <a:rPr sz="3200" b="1">
-                <a:solidFill>
-                  <a:srgbClr val="0A7A43"/>
+              <a:rPr sz="3000" b="1" i="0">
+                <a:solidFill>
+                  <a:srgbClr val="1A7A3C"/>
                 </a:solidFill>
               </a:rPr>
-              <a:t>44 / 50</a:t>
-            </a:r>
-          </a:p>
-        </p:txBody>
-      </p:sp>
-      <p:sp>
-        <p:nvSpPr>
-          <p:cNvPr id="12" name="TextBox 11"/>
+              <a:t>80.48%</a:t>
+            </a:r>
+          </a:p>
+        </p:txBody>
+      </p:sp>
+      <p:sp>
+        <p:nvSpPr>
+          <p:cNvPr id="8" name="TextBox 7"/>
           <p:cNvSpPr txBox="1"/>
           <p:nvPr/>
         </p:nvSpPr>
         <p:spPr>
           <a:xfrm>
-            <a:off x="6126480" y="2468880"/>
-            <a:ext cx="2743200" cy="548640"/>
+            <a:off x="365760" y="2194560"/>
+            <a:ext cx="3681983" cy="457200"/>
           </a:xfrm>
           <a:prstGeom prst="rect">
             <a:avLst/>
@@ -5611,32 +5850,66 @@
           <a:p>
             <a:pPr algn="ctr"/>
             <a:r>
-              <a:rPr sz="1500" b="0">
-                <a:solidFill>
-                  <a:srgbClr val="1A1A2E"/>
+              <a:rPr sz="1300" b="0" i="0">
+                <a:solidFill>
+                  <a:srgbClr val="1C1C1C"/>
                 </a:solidFill>
               </a:rPr>
-              <a:t>最优 epoch</a:t>
-            </a:r>
-          </a:p>
-        </p:txBody>
-      </p:sp>
-      <p:sp>
-        <p:nvSpPr>
-          <p:cNvPr id="13" name="Rectangle 12"/>
+              <a:t>测试准确率</a:t>
+            </a:r>
+          </a:p>
+        </p:txBody>
+      </p:sp>
+      <p:sp>
+        <p:nvSpPr>
+          <p:cNvPr id="9" name="TextBox 8"/>
+          <p:cNvSpPr txBox="1"/>
+          <p:nvPr/>
+        </p:nvSpPr>
+        <p:spPr>
+          <a:xfrm>
+            <a:off x="365760" y="2633472"/>
+            <a:ext cx="3681983" cy="320040"/>
+          </a:xfrm>
+          <a:prstGeom prst="rect">
+            <a:avLst/>
+          </a:prstGeom>
+          <a:noFill/>
+        </p:spPr>
+        <p:txBody>
+          <a:bodyPr wrap="square">
+            <a:spAutoFit/>
+          </a:bodyPr>
+          <a:lstStyle/>
+          <a:p>
+            <a:pPr algn="ctr"/>
+            <a:r>
+              <a:rPr sz="1100" b="0" i="1">
+                <a:solidFill>
+                  <a:srgbClr val="555555"/>
+                </a:solidFill>
+              </a:rPr>
+              <a:t>✅ 满足 ≥80%</a:t>
+            </a:r>
+          </a:p>
+        </p:txBody>
+      </p:sp>
+      <p:sp>
+        <p:nvSpPr>
+          <p:cNvPr id="10" name="Rectangle 9"/>
           <p:cNvSpPr/>
           <p:nvPr/>
         </p:nvSpPr>
         <p:spPr>
           <a:xfrm>
-            <a:off x="8961120" y="1280160"/>
-            <a:ext cx="2743200" cy="2011680"/>
+            <a:off x="4184904" y="1097280"/>
+            <a:ext cx="3681983" cy="1920240"/>
           </a:xfrm>
           <a:prstGeom prst="rect">
             <a:avLst/>
           </a:prstGeom>
           <a:solidFill>
-            <a:srgbClr val="D6E4F0"/>
+            <a:srgbClr val="E8F0F8"/>
           </a:solidFill>
           <a:ln>
             <a:noFill/>
@@ -5666,14 +5939,57 @@
       </p:sp>
       <p:sp>
         <p:nvSpPr>
-          <p:cNvPr id="14" name="TextBox 13"/>
+          <p:cNvPr id="11" name="Rectangle 10"/>
+          <p:cNvSpPr/>
+          <p:nvPr/>
+        </p:nvSpPr>
+        <p:spPr>
+          <a:xfrm>
+            <a:off x="4184904" y="1097280"/>
+            <a:ext cx="3681983" cy="73152"/>
+          </a:xfrm>
+          <a:prstGeom prst="rect">
+            <a:avLst/>
+          </a:prstGeom>
+          <a:solidFill>
+            <a:srgbClr val="1A335C"/>
+          </a:solidFill>
+          <a:ln>
+            <a:noFill/>
+          </a:ln>
+        </p:spPr>
+        <p:style>
+          <a:lnRef idx="1">
+            <a:schemeClr val="accent1"/>
+          </a:lnRef>
+          <a:fillRef idx="3">
+            <a:schemeClr val="accent1"/>
+          </a:fillRef>
+          <a:effectRef idx="2">
+            <a:schemeClr val="accent1"/>
+          </a:effectRef>
+          <a:fontRef idx="minor">
+            <a:schemeClr val="lt1"/>
+          </a:fontRef>
+        </p:style>
+        <p:txBody>
+          <a:bodyPr rtlCol="0" anchor="ctr"/>
+          <a:lstStyle/>
+          <a:p>
+            <a:pPr algn="ctr"/>
+          </a:p>
+        </p:txBody>
+      </p:sp>
+      <p:sp>
+        <p:nvSpPr>
+          <p:cNvPr id="12" name="TextBox 11"/>
           <p:cNvSpPr txBox="1"/>
           <p:nvPr/>
         </p:nvSpPr>
         <p:spPr>
           <a:xfrm>
-            <a:off x="8961120" y="1463040"/>
-            <a:ext cx="2743200" cy="914400"/>
+            <a:off x="4184904" y="1234440"/>
+            <a:ext cx="3681983" cy="914400"/>
           </a:xfrm>
           <a:prstGeom prst="rect">
             <a:avLst/>
@@ -5688,26 +6004,26 @@
           <a:p>
             <a:pPr algn="ctr"/>
             <a:r>
-              <a:rPr sz="3200" b="1">
-                <a:solidFill>
-                  <a:srgbClr val="0A7A43"/>
+              <a:rPr sz="3000" b="1" i="0">
+                <a:solidFill>
+                  <a:srgbClr val="1A7A3C"/>
                 </a:solidFill>
               </a:rPr>
-              <a:t>✅ 达标</a:t>
-            </a:r>
-          </a:p>
-        </p:txBody>
-      </p:sp>
-      <p:sp>
-        <p:nvSpPr>
-          <p:cNvPr id="15" name="TextBox 14"/>
+              <a:t>80.52%</a:t>
+            </a:r>
+          </a:p>
+        </p:txBody>
+      </p:sp>
+      <p:sp>
+        <p:nvSpPr>
+          <p:cNvPr id="13" name="TextBox 12"/>
           <p:cNvSpPr txBox="1"/>
           <p:nvPr/>
         </p:nvSpPr>
         <p:spPr>
           <a:xfrm>
-            <a:off x="8961120" y="2468880"/>
-            <a:ext cx="2743200" cy="548640"/>
+            <a:off x="4184904" y="2194560"/>
+            <a:ext cx="3681983" cy="457200"/>
           </a:xfrm>
           <a:prstGeom prst="rect">
             <a:avLst/>
@@ -5722,26 +6038,26 @@
           <a:p>
             <a:pPr algn="ctr"/>
             <a:r>
-              <a:rPr sz="1500" b="0">
-                <a:solidFill>
-                  <a:srgbClr val="1A1A2E"/>
+              <a:rPr sz="1300" b="0" i="0">
+                <a:solidFill>
+                  <a:srgbClr val="1C1C1C"/>
                 </a:solidFill>
               </a:rPr>
-              <a:t>目标（≥80%）</a:t>
-            </a:r>
-          </a:p>
-        </p:txBody>
-      </p:sp>
-      <p:sp>
-        <p:nvSpPr>
-          <p:cNvPr id="16" name="TextBox 15"/>
+              <a:t>最优验证准确率</a:t>
+            </a:r>
+          </a:p>
+        </p:txBody>
+      </p:sp>
+      <p:sp>
+        <p:nvSpPr>
+          <p:cNvPr id="14" name="TextBox 13"/>
           <p:cNvSpPr txBox="1"/>
           <p:nvPr/>
         </p:nvSpPr>
         <p:spPr>
           <a:xfrm>
-            <a:off x="457200" y="3657600"/>
-            <a:ext cx="11247120" cy="2743200"/>
+            <a:off x="4184904" y="2633472"/>
+            <a:ext cx="3681983" cy="320040"/>
           </a:xfrm>
           <a:prstGeom prst="rect">
             <a:avLst/>
@@ -5754,36 +6070,324 @@
           </a:bodyPr>
           <a:lstStyle/>
           <a:p>
+            <a:pPr algn="ctr"/>
+            <a:r>
+              <a:rPr sz="1100" b="0" i="1">
+                <a:solidFill>
+                  <a:srgbClr val="555555"/>
+                </a:solidFill>
+              </a:rPr>
+              <a:t>epoch 44</a:t>
+            </a:r>
+          </a:p>
+        </p:txBody>
+      </p:sp>
+      <p:sp>
+        <p:nvSpPr>
+          <p:cNvPr id="15" name="Rectangle 14"/>
+          <p:cNvSpPr/>
+          <p:nvPr/>
+        </p:nvSpPr>
+        <p:spPr>
+          <a:xfrm>
+            <a:off x="8004048" y="1097280"/>
+            <a:ext cx="3681983" cy="1920240"/>
+          </a:xfrm>
+          <a:prstGeom prst="rect">
+            <a:avLst/>
+          </a:prstGeom>
+          <a:solidFill>
+            <a:srgbClr val="E8F0F8"/>
+          </a:solidFill>
+          <a:ln>
+            <a:noFill/>
+          </a:ln>
+        </p:spPr>
+        <p:style>
+          <a:lnRef idx="1">
+            <a:schemeClr val="accent1"/>
+          </a:lnRef>
+          <a:fillRef idx="3">
+            <a:schemeClr val="accent1"/>
+          </a:fillRef>
+          <a:effectRef idx="2">
+            <a:schemeClr val="accent1"/>
+          </a:effectRef>
+          <a:fontRef idx="minor">
+            <a:schemeClr val="lt1"/>
+          </a:fontRef>
+        </p:style>
+        <p:txBody>
+          <a:bodyPr rtlCol="0" anchor="ctr"/>
+          <a:lstStyle/>
+          <a:p>
+            <a:pPr algn="ctr"/>
+          </a:p>
+        </p:txBody>
+      </p:sp>
+      <p:sp>
+        <p:nvSpPr>
+          <p:cNvPr id="16" name="Rectangle 15"/>
+          <p:cNvSpPr/>
+          <p:nvPr/>
+        </p:nvSpPr>
+        <p:spPr>
+          <a:xfrm>
+            <a:off x="8004048" y="1097280"/>
+            <a:ext cx="3681983" cy="73152"/>
+          </a:xfrm>
+          <a:prstGeom prst="rect">
+            <a:avLst/>
+          </a:prstGeom>
+          <a:solidFill>
+            <a:srgbClr val="1A335C"/>
+          </a:solidFill>
+          <a:ln>
+            <a:noFill/>
+          </a:ln>
+        </p:spPr>
+        <p:style>
+          <a:lnRef idx="1">
+            <a:schemeClr val="accent1"/>
+          </a:lnRef>
+          <a:fillRef idx="3">
+            <a:schemeClr val="accent1"/>
+          </a:fillRef>
+          <a:effectRef idx="2">
+            <a:schemeClr val="accent1"/>
+          </a:effectRef>
+          <a:fontRef idx="minor">
+            <a:schemeClr val="lt1"/>
+          </a:fontRef>
+        </p:style>
+        <p:txBody>
+          <a:bodyPr rtlCol="0" anchor="ctr"/>
+          <a:lstStyle/>
+          <a:p>
+            <a:pPr algn="ctr"/>
+          </a:p>
+        </p:txBody>
+      </p:sp>
+      <p:sp>
+        <p:nvSpPr>
+          <p:cNvPr id="17" name="TextBox 16"/>
+          <p:cNvSpPr txBox="1"/>
+          <p:nvPr/>
+        </p:nvSpPr>
+        <p:spPr>
+          <a:xfrm>
+            <a:off x="8004048" y="1234440"/>
+            <a:ext cx="3681983" cy="914400"/>
+          </a:xfrm>
+          <a:prstGeom prst="rect">
+            <a:avLst/>
+          </a:prstGeom>
+          <a:noFill/>
+        </p:spPr>
+        <p:txBody>
+          <a:bodyPr wrap="square">
+            <a:spAutoFit/>
+          </a:bodyPr>
+          <a:lstStyle/>
+          <a:p>
+            <a:pPr algn="ctr"/>
+            <a:r>
+              <a:rPr sz="3000" b="1" i="0">
+                <a:solidFill>
+                  <a:srgbClr val="1A7A3C"/>
+                </a:solidFill>
+              </a:rPr>
+              <a:t>epoch 36</a:t>
+            </a:r>
+          </a:p>
+        </p:txBody>
+      </p:sp>
+      <p:sp>
+        <p:nvSpPr>
+          <p:cNvPr id="18" name="TextBox 17"/>
+          <p:cNvSpPr txBox="1"/>
+          <p:nvPr/>
+        </p:nvSpPr>
+        <p:spPr>
+          <a:xfrm>
+            <a:off x="8004048" y="2194560"/>
+            <a:ext cx="3681983" cy="457200"/>
+          </a:xfrm>
+          <a:prstGeom prst="rect">
+            <a:avLst/>
+          </a:prstGeom>
+          <a:noFill/>
+        </p:spPr>
+        <p:txBody>
+          <a:bodyPr wrap="square">
+            <a:spAutoFit/>
+          </a:bodyPr>
+          <a:lstStyle/>
+          <a:p>
+            <a:pPr algn="ctr"/>
+            <a:r>
+              <a:rPr sz="1300" b="0" i="0">
+                <a:solidFill>
+                  <a:srgbClr val="1C1C1C"/>
+                </a:solidFill>
+              </a:rPr>
+              <a:t>突破 80% 时间</a:t>
+            </a:r>
+          </a:p>
+        </p:txBody>
+      </p:sp>
+      <p:sp>
+        <p:nvSpPr>
+          <p:cNvPr id="19" name="TextBox 18"/>
+          <p:cNvSpPr txBox="1"/>
+          <p:nvPr/>
+        </p:nvSpPr>
+        <p:spPr>
+          <a:xfrm>
+            <a:off x="411480" y="3154680"/>
+            <a:ext cx="11247120" cy="475488"/>
+          </a:xfrm>
+          <a:prstGeom prst="rect">
+            <a:avLst/>
+          </a:prstGeom>
+          <a:noFill/>
+        </p:spPr>
+        <p:txBody>
+          <a:bodyPr wrap="square">
+            <a:spAutoFit/>
+          </a:bodyPr>
+          <a:lstStyle/>
+          <a:p>
             <a:pPr algn="l"/>
             <a:r>
-              <a:rPr sz="1600" b="0">
-                <a:solidFill>
-                  <a:srgbClr val="1A1A2E"/>
+              <a:rPr sz="1600" b="0" i="0">
+                <a:solidFill>
+                  <a:srgbClr val="1C1C1C"/>
                 </a:solidFill>
               </a:rPr>
-              <a:t>• 从零训练 ViT 收敛较慢，约 36 epoch 才突破 80%
-• CosineAnnealingLR 在后期有效防止振荡
-• 若使用 ImageNet 预训练权重，准确率可达 95%+</a:t>
-            </a:r>
-          </a:p>
-        </p:txBody>
-      </p:sp>
-      <p:sp>
-        <p:nvSpPr>
-          <p:cNvPr id="17" name="Rectangle 16"/>
+              <a:t>▸ 从零训练 ViT 收敛较慢——缺乏图像归纳偏置（平移不变性）是主因</a:t>
+            </a:r>
+          </a:p>
+        </p:txBody>
+      </p:sp>
+      <p:sp>
+        <p:nvSpPr>
+          <p:cNvPr id="20" name="TextBox 19"/>
+          <p:cNvSpPr txBox="1"/>
+          <p:nvPr/>
+        </p:nvSpPr>
+        <p:spPr>
+          <a:xfrm>
+            <a:off x="411480" y="3630168"/>
+            <a:ext cx="11247120" cy="475488"/>
+          </a:xfrm>
+          <a:prstGeom prst="rect">
+            <a:avLst/>
+          </a:prstGeom>
+          <a:noFill/>
+        </p:spPr>
+        <p:txBody>
+          <a:bodyPr wrap="square">
+            <a:spAutoFit/>
+          </a:bodyPr>
+          <a:lstStyle/>
+          <a:p>
+            <a:pPr algn="l"/>
+            <a:r>
+              <a:rPr sz="1600" b="0" i="0">
+                <a:solidFill>
+                  <a:srgbClr val="1C1C1C"/>
+                </a:solidFill>
+              </a:rPr>
+              <a:t>▸ CosineAnnealingLR 在训练后期有效抑制振荡，是最终达标的关键</a:t>
+            </a:r>
+          </a:p>
+        </p:txBody>
+      </p:sp>
+      <p:sp>
+        <p:nvSpPr>
+          <p:cNvPr id="21" name="TextBox 20"/>
+          <p:cNvSpPr txBox="1"/>
+          <p:nvPr/>
+        </p:nvSpPr>
+        <p:spPr>
+          <a:xfrm>
+            <a:off x="411480" y="4105656"/>
+            <a:ext cx="11247120" cy="475488"/>
+          </a:xfrm>
+          <a:prstGeom prst="rect">
+            <a:avLst/>
+          </a:prstGeom>
+          <a:noFill/>
+        </p:spPr>
+        <p:txBody>
+          <a:bodyPr wrap="square">
+            <a:spAutoFit/>
+          </a:bodyPr>
+          <a:lstStyle/>
+          <a:p>
+            <a:pPr algn="l"/>
+            <a:r>
+              <a:rPr sz="1600" b="0" i="0">
+                <a:solidFill>
+                  <a:srgbClr val="1C1C1C"/>
+                </a:solidFill>
+              </a:rPr>
+              <a:t>▸ weight_decay=0.05 比常规设置大，对 Transformer 类模型泛化很重要</a:t>
+            </a:r>
+          </a:p>
+        </p:txBody>
+      </p:sp>
+      <p:sp>
+        <p:nvSpPr>
+          <p:cNvPr id="22" name="TextBox 21"/>
+          <p:cNvSpPr txBox="1"/>
+          <p:nvPr/>
+        </p:nvSpPr>
+        <p:spPr>
+          <a:xfrm>
+            <a:off x="411480" y="4581144"/>
+            <a:ext cx="11247120" cy="475488"/>
+          </a:xfrm>
+          <a:prstGeom prst="rect">
+            <a:avLst/>
+          </a:prstGeom>
+          <a:noFill/>
+        </p:spPr>
+        <p:txBody>
+          <a:bodyPr wrap="square">
+            <a:spAutoFit/>
+          </a:bodyPr>
+          <a:lstStyle/>
+          <a:p>
+            <a:pPr algn="l"/>
+            <a:r>
+              <a:rPr sz="1600" b="0" i="0">
+                <a:solidFill>
+                  <a:srgbClr val="1C1C1C"/>
+                </a:solidFill>
+              </a:rPr>
+              <a:t>▸ 对比：使用 ImageNet 预训练权重微调，同模型可达 95%+（迁移学习优势）</a:t>
+            </a:r>
+          </a:p>
+        </p:txBody>
+      </p:sp>
+      <p:sp>
+        <p:nvSpPr>
+          <p:cNvPr id="23" name="Rectangle 22"/>
           <p:cNvSpPr/>
           <p:nvPr/>
         </p:nvSpPr>
         <p:spPr>
           <a:xfrm>
-            <a:off x="0" y="6675120"/>
-            <a:ext cx="12188952" cy="73152"/>
+            <a:off x="0" y="6748272"/>
+            <a:ext cx="12188952" cy="109728"/>
           </a:xfrm>
           <a:prstGeom prst="rect">
             <a:avLst/>
           </a:prstGeom>
           <a:solidFill>
-            <a:srgbClr val="1F497D"/>
+            <a:srgbClr val="1A335C"/>
           </a:solidFill>
           <a:ln>
             <a:noFill/>
@@ -5846,13 +6450,13 @@
         <p:spPr>
           <a:xfrm>
             <a:off x="0" y="0"/>
-            <a:ext cx="12188952" cy="1005840"/>
+            <a:ext cx="12188952" cy="960120"/>
           </a:xfrm>
           <a:prstGeom prst="rect">
             <a:avLst/>
           </a:prstGeom>
           <a:solidFill>
-            <a:srgbClr val="1F497D"/>
+            <a:srgbClr val="1A335C"/>
           </a:solidFill>
           <a:ln>
             <a:noFill/>
@@ -5882,14 +6486,57 @@
       </p:sp>
       <p:sp>
         <p:nvSpPr>
-          <p:cNvPr id="3" name="TextBox 2"/>
+          <p:cNvPr id="3" name="Rectangle 2"/>
+          <p:cNvSpPr/>
+          <p:nvPr/>
+        </p:nvSpPr>
+        <p:spPr>
+          <a:xfrm>
+            <a:off x="0" y="0"/>
+            <a:ext cx="164592" cy="6858000"/>
+          </a:xfrm>
+          <a:prstGeom prst="rect">
+            <a:avLst/>
+          </a:prstGeom>
+          <a:solidFill>
+            <a:srgbClr val="1A335C"/>
+          </a:solidFill>
+          <a:ln>
+            <a:noFill/>
+          </a:ln>
+        </p:spPr>
+        <p:style>
+          <a:lnRef idx="1">
+            <a:schemeClr val="accent1"/>
+          </a:lnRef>
+          <a:fillRef idx="3">
+            <a:schemeClr val="accent1"/>
+          </a:fillRef>
+          <a:effectRef idx="2">
+            <a:schemeClr val="accent1"/>
+          </a:effectRef>
+          <a:fontRef idx="minor">
+            <a:schemeClr val="lt1"/>
+          </a:fontRef>
+        </p:style>
+        <p:txBody>
+          <a:bodyPr rtlCol="0" anchor="ctr"/>
+          <a:lstStyle/>
+          <a:p>
+            <a:pPr algn="ctr"/>
+          </a:p>
+        </p:txBody>
+      </p:sp>
+      <p:sp>
+        <p:nvSpPr>
+          <p:cNvPr id="4" name="TextBox 3"/>
           <p:cNvSpPr txBox="1"/>
           <p:nvPr/>
         </p:nvSpPr>
         <p:spPr>
           <a:xfrm>
-            <a:off x="274320" y="91440"/>
-            <a:ext cx="11612880" cy="822960"/>
+            <a:off x="347472" y="91440"/>
+            <a:ext cx="11521440" cy="777240"/>
           </a:xfrm>
           <a:prstGeom prst="rect">
             <a:avLst/>
@@ -5904,26 +6551,26 @@
           <a:p>
             <a:pPr algn="l"/>
             <a:r>
-              <a:rPr sz="2400" b="1">
+              <a:rPr sz="2300" b="1" i="0">
                 <a:solidFill>
                   <a:srgbClr val="FFFFFF"/>
                 </a:solidFill>
               </a:rPr>
-              <a:t>总结</a:t>
-            </a:r>
-          </a:p>
-        </p:txBody>
-      </p:sp>
-      <p:sp>
-        <p:nvSpPr>
-          <p:cNvPr id="4" name="TextBox 3"/>
+              <a:t>总结与展望</a:t>
+            </a:r>
+          </a:p>
+        </p:txBody>
+      </p:sp>
+      <p:sp>
+        <p:nvSpPr>
+          <p:cNvPr id="5" name="TextBox 4"/>
           <p:cNvSpPr txBox="1"/>
           <p:nvPr/>
         </p:nvSpPr>
         <p:spPr>
           <a:xfrm>
-            <a:off x="457200" y="1188720"/>
-            <a:ext cx="11247120" cy="502920"/>
+            <a:off x="411480" y="1115568"/>
+            <a:ext cx="11247120" cy="475488"/>
           </a:xfrm>
           <a:prstGeom prst="rect">
             <a:avLst/>
@@ -5938,26 +6585,26 @@
           <a:p>
             <a:pPr algn="l"/>
             <a:r>
-              <a:rPr sz="1800" b="0">
-                <a:solidFill>
-                  <a:srgbClr val="1A1A2E"/>
+              <a:rPr sz="1700" b="0" i="0">
+                <a:solidFill>
+                  <a:srgbClr val="1C1C1C"/>
                 </a:solidFill>
               </a:rPr>
-              <a:t>  • ✅ 测试准确率 80.48%，满足 ≥80% 目标</a:t>
-            </a:r>
-          </a:p>
-        </p:txBody>
-      </p:sp>
-      <p:sp>
-        <p:nvSpPr>
-          <p:cNvPr id="5" name="TextBox 4"/>
+              <a:t>▸ 从零实现了完整 ViT，包含 PatchEmbed、CLS Token、位置编码、TransformerBlock</a:t>
+            </a:r>
+          </a:p>
+        </p:txBody>
+      </p:sp>
+      <p:sp>
+        <p:nvSpPr>
+          <p:cNvPr id="6" name="TextBox 5"/>
           <p:cNvSpPr txBox="1"/>
           <p:nvPr/>
         </p:nvSpPr>
         <p:spPr>
           <a:xfrm>
-            <a:off x="457200" y="1664208"/>
-            <a:ext cx="11247120" cy="502920"/>
+            <a:off x="411480" y="1591056"/>
+            <a:ext cx="11247120" cy="475488"/>
           </a:xfrm>
           <a:prstGeom prst="rect">
             <a:avLst/>
@@ -5972,26 +6619,26 @@
           <a:p>
             <a:pPr algn="l"/>
             <a:r>
-              <a:rPr sz="1800" b="0">
-                <a:solidFill>
-                  <a:srgbClr val="1A1A2E"/>
+              <a:rPr sz="1700" b="0" i="0">
+                <a:solidFill>
+                  <a:srgbClr val="1C1C1C"/>
                 </a:solidFill>
               </a:rPr>
-              <a:t>  • 从零实现了完整 ViT：PatchEmbed + CLS token + 位置编码 + TransformerBlock</a:t>
-            </a:r>
-          </a:p>
-        </p:txBody>
-      </p:sp>
-      <p:sp>
-        <p:nvSpPr>
-          <p:cNvPr id="6" name="TextBox 5"/>
+              <a:t>▸ 经过 50 epoch 训练达到 80.48% 测试准确率，满足实验要求</a:t>
+            </a:r>
+          </a:p>
+        </p:txBody>
+      </p:sp>
+      <p:sp>
+        <p:nvSpPr>
+          <p:cNvPr id="7" name="TextBox 6"/>
           <p:cNvSpPr txBox="1"/>
           <p:nvPr/>
         </p:nvSpPr>
         <p:spPr>
           <a:xfrm>
-            <a:off x="457200" y="2139696"/>
-            <a:ext cx="11247120" cy="502920"/>
+            <a:off x="411480" y="2066543"/>
+            <a:ext cx="11247120" cy="475488"/>
           </a:xfrm>
           <a:prstGeom prst="rect">
             <a:avLst/>
@@ -6006,26 +6653,26 @@
           <a:p>
             <a:pPr algn="l"/>
             <a:r>
-              <a:rPr sz="1800" b="0">
-                <a:solidFill>
-                  <a:srgbClr val="1A1A2E"/>
+              <a:rPr sz="1700" b="0" i="0">
+                <a:solidFill>
+                  <a:srgbClr val="1C1C1C"/>
                 </a:solidFill>
               </a:rPr>
-              <a:t>  • Pre-Norm 结构比 Post-Norm 训练更稳定</a:t>
-            </a:r>
-          </a:p>
-        </p:txBody>
-      </p:sp>
-      <p:sp>
-        <p:nvSpPr>
-          <p:cNvPr id="7" name="TextBox 6"/>
+              <a:t>▸ Pre-Norm + 残差结构保证了深层网络训练的稳定性</a:t>
+            </a:r>
+          </a:p>
+        </p:txBody>
+      </p:sp>
+      <p:sp>
+        <p:nvSpPr>
+          <p:cNvPr id="8" name="TextBox 7"/>
           <p:cNvSpPr txBox="1"/>
           <p:nvPr/>
         </p:nvSpPr>
         <p:spPr>
           <a:xfrm>
-            <a:off x="457200" y="2615184"/>
-            <a:ext cx="11247120" cy="502920"/>
+            <a:off x="411480" y="2542032"/>
+            <a:ext cx="11247120" cy="475488"/>
           </a:xfrm>
           <a:prstGeom prst="rect">
             <a:avLst/>
@@ -6040,26 +6687,26 @@
           <a:p>
             <a:pPr algn="l"/>
             <a:r>
-              <a:rPr sz="1800" b="0">
-                <a:solidFill>
-                  <a:srgbClr val="1A1A2E"/>
+              <a:rPr sz="1700" b="0" i="0">
+                <a:solidFill>
+                  <a:srgbClr val="1C1C1C"/>
                 </a:solidFill>
               </a:rPr>
-              <a:t>  • ViT 缺乏图像归纳偏置，从零训练需要更多 epoch 和更强正则化</a:t>
-            </a:r>
-          </a:p>
-        </p:txBody>
-      </p:sp>
-      <p:sp>
-        <p:nvSpPr>
-          <p:cNvPr id="8" name="TextBox 7"/>
+              <a:t>▸ ViT 相比 CNN 的优势在于全局建模能力，劣势是样本效率较低</a:t>
+            </a:r>
+          </a:p>
+        </p:txBody>
+      </p:sp>
+      <p:sp>
+        <p:nvSpPr>
+          <p:cNvPr id="9" name="TextBox 8"/>
           <p:cNvSpPr txBox="1"/>
           <p:nvPr/>
         </p:nvSpPr>
         <p:spPr>
           <a:xfrm>
-            <a:off x="457200" y="3090672"/>
-            <a:ext cx="11247120" cy="502920"/>
+            <a:off x="411480" y="3017520"/>
+            <a:ext cx="11247120" cy="475488"/>
           </a:xfrm>
           <a:prstGeom prst="rect">
             <a:avLst/>
@@ -6074,32 +6721,66 @@
           <a:p>
             <a:pPr algn="l"/>
             <a:r>
-              <a:rPr sz="1800" b="0">
-                <a:solidFill>
-                  <a:srgbClr val="1A1A2E"/>
+              <a:rPr sz="1600" b="0" i="0">
+                <a:solidFill>
+                  <a:srgbClr val="555555"/>
                 </a:solidFill>
               </a:rPr>
-              <a:t>  • 改进方向：预训练微调 / DeiT 蒸馏 / 数据增强（Mixup/CutMix）</a:t>
-            </a:r>
-          </a:p>
-        </p:txBody>
-      </p:sp>
-      <p:sp>
-        <p:nvSpPr>
-          <p:cNvPr id="9" name="Rectangle 8"/>
+              <a:t>    – 改进方向①：使用预训练权重（DeiT/MAE）微调，大幅减少所需 epoch</a:t>
+            </a:r>
+          </a:p>
+        </p:txBody>
+      </p:sp>
+      <p:sp>
+        <p:nvSpPr>
+          <p:cNvPr id="10" name="TextBox 9"/>
+          <p:cNvSpPr txBox="1"/>
+          <p:nvPr/>
+        </p:nvSpPr>
+        <p:spPr>
+          <a:xfrm>
+            <a:off x="411480" y="3493008"/>
+            <a:ext cx="11247120" cy="475488"/>
+          </a:xfrm>
+          <a:prstGeom prst="rect">
+            <a:avLst/>
+          </a:prstGeom>
+          <a:noFill/>
+        </p:spPr>
+        <p:txBody>
+          <a:bodyPr wrap="square">
+            <a:spAutoFit/>
+          </a:bodyPr>
+          <a:lstStyle/>
+          <a:p>
+            <a:pPr algn="l"/>
+            <a:r>
+              <a:rPr sz="1600" b="0" i="0">
+                <a:solidFill>
+                  <a:srgbClr val="555555"/>
+                </a:solidFill>
+              </a:rPr>
+              <a:t>    – 改进方向②：引入 Mixup / CutMix 数据增强，进一步提升泛化</a:t>
+            </a:r>
+          </a:p>
+        </p:txBody>
+      </p:sp>
+      <p:sp>
+        <p:nvSpPr>
+          <p:cNvPr id="11" name="Rectangle 10"/>
           <p:cNvSpPr/>
           <p:nvPr/>
         </p:nvSpPr>
         <p:spPr>
           <a:xfrm>
-            <a:off x="0" y="6675120"/>
-            <a:ext cx="12188952" cy="73152"/>
+            <a:off x="0" y="6748272"/>
+            <a:ext cx="12188952" cy="109728"/>
           </a:xfrm>
           <a:prstGeom prst="rect">
             <a:avLst/>
           </a:prstGeom>
           <a:solidFill>
-            <a:srgbClr val="1F497D"/>
+            <a:srgbClr val="1A335C"/>
           </a:solidFill>
           <a:ln>
             <a:noFill/>

--- a/reports/exp2_vit_cifar10.pptx
+++ b/reports/exp2_vit_cifar10.pptx
@@ -13,6 +13,8 @@
     <p:sldId id="261" r:id="rId12"/>
     <p:sldId id="262" r:id="rId13"/>
     <p:sldId id="263" r:id="rId14"/>
+    <p:sldId id="264" r:id="rId15"/>
+    <p:sldId id="265" r:id="rId16"/>
   </p:sldIdLst>
   <p:sldSz cx="12188952" cy="6858000" type="screen4x3"/>
   <p:notesSz cx="6858000" cy="9144000"/>
@@ -3148,7 +3150,7 @@
       </p:sp>
       <p:pic>
         <p:nvPicPr>
-          <p:cNvPr id="3" name="Picture 2" descr="ucas_seal.png"/>
+          <p:cNvPr id="3" name="Picture 2" descr="国科大标准Logo横式一（白色）.png"/>
           <p:cNvPicPr>
             <a:picLocks noChangeAspect="1"/>
           </p:cNvPicPr>
@@ -3162,8 +3164,8 @@
         </p:blipFill>
         <p:spPr>
           <a:xfrm>
-            <a:off x="10771632" y="228600"/>
-            <a:ext cx="1188720" cy="1069848"/>
+            <a:off x="8714232" y="256032"/>
+            <a:ext cx="3200400" cy="777240"/>
           </a:xfrm>
           <a:prstGeom prst="rect">
             <a:avLst/>
@@ -3312,6 +3314,433 @@
               </a:rPr>
               <a:t>WevYang　|　中国科学院大学  深度学习</a:t>
             </a:r>
+          </a:p>
+        </p:txBody>
+      </p:sp>
+    </p:spTree>
+  </p:cSld>
+  <p:clrMapOvr>
+    <a:masterClrMapping/>
+  </p:clrMapOvr>
+</p:sld>
+</file>
+
+<file path=ppt/slides/slide10.xml><?xml version="1.0" encoding="utf-8"?>
+<p:sld xmlns:a="http://schemas.openxmlformats.org/drawingml/2006/main" xmlns:p="http://schemas.openxmlformats.org/presentationml/2006/main" xmlns:r="http://schemas.openxmlformats.org/officeDocument/2006/relationships">
+  <p:cSld>
+    <p:bg>
+      <p:bgPr>
+        <a:solidFill>
+          <a:srgbClr val="FFFFFF"/>
+        </a:solidFill>
+        <a:effectLst/>
+      </p:bgPr>
+    </p:bg>
+    <p:spTree>
+      <p:nvGrpSpPr>
+        <p:cNvPr id="1" name=""/>
+        <p:cNvGrpSpPr/>
+        <p:nvPr/>
+      </p:nvGrpSpPr>
+      <p:grpSpPr/>
+      <p:sp>
+        <p:nvSpPr>
+          <p:cNvPr id="2" name="Rectangle 1"/>
+          <p:cNvSpPr/>
+          <p:nvPr/>
+        </p:nvSpPr>
+        <p:spPr>
+          <a:xfrm>
+            <a:off x="0" y="0"/>
+            <a:ext cx="12188952" cy="960120"/>
+          </a:xfrm>
+          <a:prstGeom prst="rect">
+            <a:avLst/>
+          </a:prstGeom>
+          <a:solidFill>
+            <a:srgbClr val="1A335C"/>
+          </a:solidFill>
+          <a:ln>
+            <a:noFill/>
+          </a:ln>
+        </p:spPr>
+        <p:style>
+          <a:lnRef idx="1">
+            <a:schemeClr val="accent1"/>
+          </a:lnRef>
+          <a:fillRef idx="3">
+            <a:schemeClr val="accent1"/>
+          </a:fillRef>
+          <a:effectRef idx="2">
+            <a:schemeClr val="accent1"/>
+          </a:effectRef>
+          <a:fontRef idx="minor">
+            <a:schemeClr val="lt1"/>
+          </a:fontRef>
+        </p:style>
+        <p:txBody>
+          <a:bodyPr rtlCol="0" anchor="ctr"/>
+          <a:lstStyle/>
+          <a:p>
+            <a:pPr algn="ctr"/>
+          </a:p>
+        </p:txBody>
+      </p:sp>
+      <p:sp>
+        <p:nvSpPr>
+          <p:cNvPr id="3" name="Rectangle 2"/>
+          <p:cNvSpPr/>
+          <p:nvPr/>
+        </p:nvSpPr>
+        <p:spPr>
+          <a:xfrm>
+            <a:off x="0" y="0"/>
+            <a:ext cx="164592" cy="6858000"/>
+          </a:xfrm>
+          <a:prstGeom prst="rect">
+            <a:avLst/>
+          </a:prstGeom>
+          <a:solidFill>
+            <a:srgbClr val="1A335C"/>
+          </a:solidFill>
+          <a:ln>
+            <a:noFill/>
+          </a:ln>
+        </p:spPr>
+        <p:style>
+          <a:lnRef idx="1">
+            <a:schemeClr val="accent1"/>
+          </a:lnRef>
+          <a:fillRef idx="3">
+            <a:schemeClr val="accent1"/>
+          </a:fillRef>
+          <a:effectRef idx="2">
+            <a:schemeClr val="accent1"/>
+          </a:effectRef>
+          <a:fontRef idx="minor">
+            <a:schemeClr val="lt1"/>
+          </a:fontRef>
+        </p:style>
+        <p:txBody>
+          <a:bodyPr rtlCol="0" anchor="ctr"/>
+          <a:lstStyle/>
+          <a:p>
+            <a:pPr algn="ctr"/>
+          </a:p>
+        </p:txBody>
+      </p:sp>
+      <p:sp>
+        <p:nvSpPr>
+          <p:cNvPr id="4" name="TextBox 3"/>
+          <p:cNvSpPr txBox="1"/>
+          <p:nvPr/>
+        </p:nvSpPr>
+        <p:spPr>
+          <a:xfrm>
+            <a:off x="347472" y="91440"/>
+            <a:ext cx="11521440" cy="777240"/>
+          </a:xfrm>
+          <a:prstGeom prst="rect">
+            <a:avLst/>
+          </a:prstGeom>
+          <a:noFill/>
+        </p:spPr>
+        <p:txBody>
+          <a:bodyPr wrap="square">
+            <a:spAutoFit/>
+          </a:bodyPr>
+          <a:lstStyle/>
+          <a:p>
+            <a:pPr algn="l"/>
+            <a:r>
+              <a:rPr sz="2300" b="1" i="0">
+                <a:solidFill>
+                  <a:srgbClr val="FFFFFF"/>
+                </a:solidFill>
+              </a:rPr>
+              <a:t>总结与展望</a:t>
+            </a:r>
+          </a:p>
+        </p:txBody>
+      </p:sp>
+      <p:sp>
+        <p:nvSpPr>
+          <p:cNvPr id="5" name="TextBox 4"/>
+          <p:cNvSpPr txBox="1"/>
+          <p:nvPr/>
+        </p:nvSpPr>
+        <p:spPr>
+          <a:xfrm>
+            <a:off x="411480" y="1115568"/>
+            <a:ext cx="11247120" cy="475488"/>
+          </a:xfrm>
+          <a:prstGeom prst="rect">
+            <a:avLst/>
+          </a:prstGeom>
+          <a:noFill/>
+        </p:spPr>
+        <p:txBody>
+          <a:bodyPr wrap="square">
+            <a:spAutoFit/>
+          </a:bodyPr>
+          <a:lstStyle/>
+          <a:p>
+            <a:pPr algn="l"/>
+            <a:r>
+              <a:rPr sz="1700" b="0" i="0">
+                <a:solidFill>
+                  <a:srgbClr val="1C1C1C"/>
+                </a:solidFill>
+              </a:rPr>
+              <a:t>▸ 从零实现了完整 ViT，包含 PatchEmbed、CLS Token、位置编码、Pre-Norm Block</a:t>
+            </a:r>
+          </a:p>
+        </p:txBody>
+      </p:sp>
+      <p:sp>
+        <p:nvSpPr>
+          <p:cNvPr id="6" name="TextBox 5"/>
+          <p:cNvSpPr txBox="1"/>
+          <p:nvPr/>
+        </p:nvSpPr>
+        <p:spPr>
+          <a:xfrm>
+            <a:off x="411480" y="1591056"/>
+            <a:ext cx="11247120" cy="475488"/>
+          </a:xfrm>
+          <a:prstGeom prst="rect">
+            <a:avLst/>
+          </a:prstGeom>
+          <a:noFill/>
+        </p:spPr>
+        <p:txBody>
+          <a:bodyPr wrap="square">
+            <a:spAutoFit/>
+          </a:bodyPr>
+          <a:lstStyle/>
+          <a:p>
+            <a:pPr algn="l"/>
+            <a:r>
+              <a:rPr sz="1700" b="0" i="0">
+                <a:solidFill>
+                  <a:srgbClr val="1C1C1C"/>
+                </a:solidFill>
+              </a:rPr>
+              <a:t>▸ 经过 50 epoch 训练达到 80.48% 测试准确率，满足实验目标</a:t>
+            </a:r>
+          </a:p>
+        </p:txBody>
+      </p:sp>
+      <p:sp>
+        <p:nvSpPr>
+          <p:cNvPr id="7" name="TextBox 6"/>
+          <p:cNvSpPr txBox="1"/>
+          <p:nvPr/>
+        </p:nvSpPr>
+        <p:spPr>
+          <a:xfrm>
+            <a:off x="411480" y="2066543"/>
+            <a:ext cx="11247120" cy="475488"/>
+          </a:xfrm>
+          <a:prstGeom prst="rect">
+            <a:avLst/>
+          </a:prstGeom>
+          <a:noFill/>
+        </p:spPr>
+        <p:txBody>
+          <a:bodyPr wrap="square">
+            <a:spAutoFit/>
+          </a:bodyPr>
+          <a:lstStyle/>
+          <a:p>
+            <a:pPr algn="l"/>
+            <a:r>
+              <a:rPr sz="1700" b="0" i="0">
+                <a:solidFill>
+                  <a:srgbClr val="1C1C1C"/>
+                </a:solidFill>
+              </a:rPr>
+              <a:t>▸ Pre-Norm + 残差结构保证了深层网络训练的稳定性</a:t>
+            </a:r>
+          </a:p>
+        </p:txBody>
+      </p:sp>
+      <p:sp>
+        <p:nvSpPr>
+          <p:cNvPr id="8" name="TextBox 7"/>
+          <p:cNvSpPr txBox="1"/>
+          <p:nvPr/>
+        </p:nvSpPr>
+        <p:spPr>
+          <a:xfrm>
+            <a:off x="411480" y="2542032"/>
+            <a:ext cx="11247120" cy="475488"/>
+          </a:xfrm>
+          <a:prstGeom prst="rect">
+            <a:avLst/>
+          </a:prstGeom>
+          <a:noFill/>
+        </p:spPr>
+        <p:txBody>
+          <a:bodyPr wrap="square">
+            <a:spAutoFit/>
+          </a:bodyPr>
+          <a:lstStyle/>
+          <a:p>
+            <a:pPr algn="l"/>
+            <a:r>
+              <a:rPr sz="1700" b="0" i="0">
+                <a:solidFill>
+                  <a:srgbClr val="1C1C1C"/>
+                </a:solidFill>
+              </a:rPr>
+              <a:t>▸ ViT 相比 CNN 的优势在于全局建模和可扩展性，劣势是样本效率较低</a:t>
+            </a:r>
+          </a:p>
+        </p:txBody>
+      </p:sp>
+      <p:sp>
+        <p:nvSpPr>
+          <p:cNvPr id="9" name="TextBox 8"/>
+          <p:cNvSpPr txBox="1"/>
+          <p:nvPr/>
+        </p:nvSpPr>
+        <p:spPr>
+          <a:xfrm>
+            <a:off x="411480" y="3017520"/>
+            <a:ext cx="11247120" cy="475488"/>
+          </a:xfrm>
+          <a:prstGeom prst="rect">
+            <a:avLst/>
+          </a:prstGeom>
+          <a:noFill/>
+        </p:spPr>
+        <p:txBody>
+          <a:bodyPr wrap="square">
+            <a:spAutoFit/>
+          </a:bodyPr>
+          <a:lstStyle/>
+          <a:p>
+            <a:pPr algn="l"/>
+            <a:r>
+              <a:rPr sz="1600" b="0" i="0">
+                <a:solidFill>
+                  <a:srgbClr val="555555"/>
+                </a:solidFill>
+              </a:rPr>
+              <a:t>    – 改进方向①：使用预训练权重（DeiT/MAE）微调，大幅减少所需 epoch</a:t>
+            </a:r>
+          </a:p>
+        </p:txBody>
+      </p:sp>
+      <p:sp>
+        <p:nvSpPr>
+          <p:cNvPr id="10" name="TextBox 9"/>
+          <p:cNvSpPr txBox="1"/>
+          <p:nvPr/>
+        </p:nvSpPr>
+        <p:spPr>
+          <a:xfrm>
+            <a:off x="411480" y="3493008"/>
+            <a:ext cx="11247120" cy="475488"/>
+          </a:xfrm>
+          <a:prstGeom prst="rect">
+            <a:avLst/>
+          </a:prstGeom>
+          <a:noFill/>
+        </p:spPr>
+        <p:txBody>
+          <a:bodyPr wrap="square">
+            <a:spAutoFit/>
+          </a:bodyPr>
+          <a:lstStyle/>
+          <a:p>
+            <a:pPr algn="l"/>
+            <a:r>
+              <a:rPr sz="1600" b="0" i="0">
+                <a:solidFill>
+                  <a:srgbClr val="555555"/>
+                </a:solidFill>
+              </a:rPr>
+              <a:t>    – 改进方向②：引入 Mixup / CutMix 数据增强，进一步提升泛化</a:t>
+            </a:r>
+          </a:p>
+        </p:txBody>
+      </p:sp>
+      <p:sp>
+        <p:nvSpPr>
+          <p:cNvPr id="11" name="TextBox 10"/>
+          <p:cNvSpPr txBox="1"/>
+          <p:nvPr/>
+        </p:nvSpPr>
+        <p:spPr>
+          <a:xfrm>
+            <a:off x="411480" y="3968496"/>
+            <a:ext cx="11247120" cy="475488"/>
+          </a:xfrm>
+          <a:prstGeom prst="rect">
+            <a:avLst/>
+          </a:prstGeom>
+          <a:noFill/>
+        </p:spPr>
+        <p:txBody>
+          <a:bodyPr wrap="square">
+            <a:spAutoFit/>
+          </a:bodyPr>
+          <a:lstStyle/>
+          <a:p>
+            <a:pPr algn="l"/>
+            <a:r>
+              <a:rPr sz="1600" b="0" i="0">
+                <a:solidFill>
+                  <a:srgbClr val="555555"/>
+                </a:solidFill>
+              </a:rPr>
+              <a:t>    – 改进方向③：增大 patch_size=8，减少序列长度，加速训练</a:t>
+            </a:r>
+          </a:p>
+        </p:txBody>
+      </p:sp>
+      <p:sp>
+        <p:nvSpPr>
+          <p:cNvPr id="12" name="Rectangle 11"/>
+          <p:cNvSpPr/>
+          <p:nvPr/>
+        </p:nvSpPr>
+        <p:spPr>
+          <a:xfrm>
+            <a:off x="0" y="6748272"/>
+            <a:ext cx="12188952" cy="109728"/>
+          </a:xfrm>
+          <a:prstGeom prst="rect">
+            <a:avLst/>
+          </a:prstGeom>
+          <a:solidFill>
+            <a:srgbClr val="1A335C"/>
+          </a:solidFill>
+          <a:ln>
+            <a:noFill/>
+          </a:ln>
+        </p:spPr>
+        <p:style>
+          <a:lnRef idx="1">
+            <a:schemeClr val="accent1"/>
+          </a:lnRef>
+          <a:fillRef idx="3">
+            <a:schemeClr val="accent1"/>
+          </a:fillRef>
+          <a:effectRef idx="2">
+            <a:schemeClr val="accent1"/>
+          </a:effectRef>
+          <a:fontRef idx="minor">
+            <a:schemeClr val="lt1"/>
+          </a:fontRef>
+        </p:style>
+        <p:txBody>
+          <a:bodyPr rtlCol="0" anchor="ctr"/>
+          <a:lstStyle/>
+          <a:p>
+            <a:pPr algn="ctr"/>
           </a:p>
         </p:txBody>
       </p:sp>
@@ -3951,7 +4380,7 @@
                   <a:srgbClr val="1C1C1C"/>
                 </a:solidFill>
               </a:rPr>
-              <a:t>▸ 图像大小：32×32 像素，3 通道 RGB</a:t>
+              <a:t>▸ 图像大小：32×32 像素，3 通道 RGB，像素值范围归一化到 [-1, 1]</a:t>
             </a:r>
           </a:p>
         </p:txBody>
@@ -4053,7 +4482,7 @@
                   <a:srgbClr val="555555"/>
                 </a:solidFill>
               </a:rPr>
-              <a:t>    – 切出 10% 训练样本作验证集；测试集不做增强，仅做标准化</a:t>
+              <a:t>    – 切出 10% 训练样本作验证集；测试集仅做标准化，不做增强</a:t>
             </a:r>
           </a:p>
         </p:txBody>
@@ -4310,7 +4739,7 @@
                   <a:srgbClr val="1C1C1C"/>
                 </a:solidFill>
               </a:rPr>
-              <a:t>▸ ① Patch 分割：image(32×32) → 64 个 4×4 的 patch</a:t>
+              <a:t>▸ ① Patch 分割：image(32×32) → 64 个 4×4 的 patch（patch_size=4）</a:t>
             </a:r>
           </a:p>
         </p:txBody>
@@ -4412,7 +4841,7 @@
                   <a:srgbClr val="1C1C1C"/>
                 </a:solidFill>
               </a:rPr>
-              <a:t>▸ ③ 位置编码：可学习位置嵌入，形状 (1, 65, 192)</a:t>
+              <a:t>▸ ③ 位置编码：可学习位置嵌入，形状 (1, 65, 192)，序列长度 64+1</a:t>
             </a:r>
           </a:p>
         </p:txBody>
@@ -4446,7 +4875,7 @@
                   <a:srgbClr val="1C1C1C"/>
                 </a:solidFill>
               </a:rPr>
-              <a:t>▸ ④ Transformer Encoder × 6：Pre-Norm + 多头自注意力（3头）+ FFN</a:t>
+              <a:t>▸ ④ Transformer Encoder × 6：Pre-Norm + 多头自注意力（3头）+ FFN(768)</a:t>
             </a:r>
           </a:p>
         </p:txBody>
@@ -4475,53 +4904,19 @@
           <a:p>
             <a:pPr algn="l"/>
             <a:r>
-              <a:rPr sz="1600" b="0" i="0">
-                <a:solidFill>
-                  <a:srgbClr val="555555"/>
+              <a:rPr sz="1700" b="0" i="0">
+                <a:solidFill>
+                  <a:srgbClr val="1C1C1C"/>
                 </a:solidFill>
               </a:rPr>
-              <a:t>    – 每个 Block：x = x + Attn(LN(x))；x = x + FFN(LN(x))</a:t>
-            </a:r>
-          </a:p>
-        </p:txBody>
-      </p:sp>
-      <p:sp>
-        <p:nvSpPr>
-          <p:cNvPr id="12" name="TextBox 11"/>
-          <p:cNvSpPr txBox="1"/>
-          <p:nvPr/>
-        </p:nvSpPr>
-        <p:spPr>
-          <a:xfrm>
-            <a:off x="411480" y="4443983"/>
-            <a:ext cx="11247120" cy="475488"/>
-          </a:xfrm>
-          <a:prstGeom prst="rect">
-            <a:avLst/>
-          </a:prstGeom>
-          <a:noFill/>
-        </p:spPr>
-        <p:txBody>
-          <a:bodyPr wrap="square">
-            <a:spAutoFit/>
-          </a:bodyPr>
-          <a:lstStyle/>
-          <a:p>
-            <a:pPr algn="l"/>
-            <a:r>
-              <a:rPr sz="1700" b="0" i="0">
-                <a:solidFill>
-                  <a:srgbClr val="1C1C1C"/>
-                </a:solidFill>
-              </a:rPr>
-              <a:t>▸ ⑤ 分类头：取 CLS token 位置输出 → Linear(192→10)</a:t>
-            </a:r>
-          </a:p>
-        </p:txBody>
-      </p:sp>
-      <p:sp>
-        <p:nvSpPr>
-          <p:cNvPr id="13" name="Rectangle 12"/>
+              <a:t>▸ ⑤ 分类头：取 CLS token 输出 → Linear(192→10)，输出 10 类 logits</a:t>
+            </a:r>
+          </a:p>
+        </p:txBody>
+      </p:sp>
+      <p:sp>
+        <p:nvSpPr>
+          <p:cNvPr id="12" name="Rectangle 11"/>
           <p:cNvSpPr/>
           <p:nvPr/>
         </p:nvSpPr>
@@ -4882,7 +5277,7 @@
                   <a:srgbClr val="1C1C1C"/>
                 </a:solidFill>
               </a:rPr>
-              <a:t>▸ num_heads=3, mlp_ratio=4.0</a:t>
+              <a:t>▸ num_heads=3（每头 64 维）</a:t>
             </a:r>
           </a:p>
         </p:txBody>
@@ -4916,7 +5311,7 @@
                   <a:srgbClr val="1C1C1C"/>
                 </a:solidFill>
               </a:rPr>
-              <a:t>▸ dropout=0.1</a:t>
+              <a:t>▸ mlp_ratio=4.0，dropout=0.1</a:t>
             </a:r>
           </a:p>
         </p:txBody>
@@ -5061,7 +5456,7 @@
                   <a:srgbClr val="1C1C1C"/>
                 </a:solidFill>
               </a:rPr>
-              <a:t>▸ epochs=50（从零训练需要更多轮）</a:t>
+              <a:t>▸ epochs=50（从零训练需更多轮）</a:t>
             </a:r>
           </a:p>
         </p:txBody>
@@ -5197,7 +5592,7 @@
                   <a:srgbClr val="1C1C1C"/>
                 </a:solidFill>
               </a:rPr>
-              <a:t>▸ scheduler=CosineAnnealingLR</a:t>
+              <a:t>▸ scheduler=CosineAnnealingLR(T_max=50)</a:t>
             </a:r>
           </a:p>
         </p:txBody>
@@ -5386,7 +5781,7 @@
                   <a:srgbClr val="FFFFFF"/>
                 </a:solidFill>
               </a:rPr>
-              <a:t>核心代码：TransformerBlock（Pre-Norm）</a:t>
+              <a:t>核心代码：PatchEmbedding 与位置编码</a:t>
             </a:r>
           </a:p>
         </p:txBody>
@@ -5463,22 +5858,21 @@
                   <a:srgbClr val="CBD3E3"/>
                 </a:solidFill>
               </a:rPr>
-              <a:t>class TransformerBlock(nn.Module):
-    def __init__(self, dim, num_heads, mlp_ratio, dropout):
+              <a:t>class PatchEmbedding(nn.Module):
+    def __init__(self, img_size=32, patch_size=4,
+                 in_ch=3, embed_dim=192):
         super().__init__()
-        self.norm1 = nn.LayerNorm(dim)
-        self.attn  = nn.MultiheadAttention(
-            dim, num_heads, dropout=dropout, batch_first=True)
-        self.norm2 = nn.LayerNorm(dim)
-        self.mlp   = MLP(dim, int(dim * mlp_ratio), dropout)
-    def forward(self, x):
-        # Pre-Norm 形式：先做 LayerNorm 再进 Attention，训练更稳定
-        attn_out, _ = self.attn(
-            self.norm1(x), self.norm1(x), self.norm1(x),
-            need_weights=False)
-        x = x + attn_out        # 残差连接
-        x = x + self.mlp(self.norm2(x))
-        return x</a:t>
+        self.n_patches = (img_size // patch_size) ** 2   # 64
+        # Conv2d stride=patch_size 等价于将每个 patch 线性投影
+        self.proj = nn.Conv2d(in_ch, embed_dim,
+                              kernel_size=patch_size,
+                              stride=patch_size)
+    def forward(self, x):          # x: (B, 3, 32, 32)
+        x = self.proj(x)           # (B, 192, 8, 8)
+        return x.flatten(2).transpose(1, 2)  # (B, 64, 192)
+# 在 VisionTransformer.__init__ 中：
+self.cls_token  = nn.Parameter(torch.zeros(1, 1, embed_dim))
+self.pos_embed  = nn.Parameter(torch.zeros(1, n_patches+1, embed_dim))</a:t>
             </a:r>
           </a:p>
         </p:txBody>
@@ -5512,7 +5906,7 @@
                   <a:srgbClr val="555555"/>
                 </a:solidFill>
               </a:rPr>
-              <a:t>Pre-Norm 相比 Post-Norm 在深层网络中梯度更稳定，是 ViT 的标准做法。</a:t>
+              <a:t>用 Conv2d 实现 patch 投影比手动 reshape 更简洁，且可被 GPU 高效并行。</a:t>
             </a:r>
           </a:p>
         </p:txBody>
@@ -5701,7 +6095,7 @@
                   <a:srgbClr val="FFFFFF"/>
                 </a:solidFill>
               </a:rPr>
-              <a:t>实验结果与分析</a:t>
+              <a:t>核心代码：TransformerBlock（Pre-Norm）</a:t>
             </a:r>
           </a:p>
         </p:txBody>
@@ -5714,14 +6108,14 @@
         </p:nvSpPr>
         <p:spPr>
           <a:xfrm>
-            <a:off x="365760" y="1097280"/>
-            <a:ext cx="3681983" cy="1920240"/>
+            <a:off x="347472" y="1051560"/>
+            <a:ext cx="11475720" cy="4206240"/>
           </a:xfrm>
           <a:prstGeom prst="rect">
             <a:avLst/>
           </a:prstGeom>
           <a:solidFill>
-            <a:srgbClr val="E8F0F8"/>
+            <a:srgbClr val="1E1E2E"/>
           </a:solidFill>
           <a:ln>
             <a:noFill/>
@@ -5751,57 +6145,14 @@
       </p:sp>
       <p:sp>
         <p:nvSpPr>
-          <p:cNvPr id="6" name="Rectangle 5"/>
-          <p:cNvSpPr/>
-          <p:nvPr/>
-        </p:nvSpPr>
-        <p:spPr>
-          <a:xfrm>
-            <a:off x="365760" y="1097280"/>
-            <a:ext cx="3681983" cy="73152"/>
-          </a:xfrm>
-          <a:prstGeom prst="rect">
-            <a:avLst/>
-          </a:prstGeom>
-          <a:solidFill>
-            <a:srgbClr val="1A335C"/>
-          </a:solidFill>
-          <a:ln>
-            <a:noFill/>
-          </a:ln>
-        </p:spPr>
-        <p:style>
-          <a:lnRef idx="1">
-            <a:schemeClr val="accent1"/>
-          </a:lnRef>
-          <a:fillRef idx="3">
-            <a:schemeClr val="accent1"/>
-          </a:fillRef>
-          <a:effectRef idx="2">
-            <a:schemeClr val="accent1"/>
-          </a:effectRef>
-          <a:fontRef idx="minor">
-            <a:schemeClr val="lt1"/>
-          </a:fontRef>
-        </p:style>
-        <p:txBody>
-          <a:bodyPr rtlCol="0" anchor="ctr"/>
-          <a:lstStyle/>
-          <a:p>
-            <a:pPr algn="ctr"/>
-          </a:p>
-        </p:txBody>
-      </p:sp>
-      <p:sp>
-        <p:nvSpPr>
-          <p:cNvPr id="7" name="TextBox 6"/>
+          <p:cNvPr id="6" name="TextBox 5"/>
           <p:cNvSpPr txBox="1"/>
           <p:nvPr/>
         </p:nvSpPr>
         <p:spPr>
           <a:xfrm>
-            <a:off x="365760" y="1234440"/>
-            <a:ext cx="3681983" cy="914400"/>
+            <a:off x="475488" y="1115568"/>
+            <a:ext cx="11201400" cy="4114800"/>
           </a:xfrm>
           <a:prstGeom prst="rect">
             <a:avLst/>
@@ -5814,28 +6165,43 @@
           </a:bodyPr>
           <a:lstStyle/>
           <a:p>
-            <a:pPr algn="ctr"/>
-            <a:r>
-              <a:rPr sz="3000" b="1" i="0">
-                <a:solidFill>
-                  <a:srgbClr val="1A7A3C"/>
+            <a:pPr algn="l"/>
+            <a:r>
+              <a:rPr sz="1200" b="0" i="0">
+                <a:solidFill>
+                  <a:srgbClr val="CBD3E3"/>
                 </a:solidFill>
               </a:rPr>
-              <a:t>80.48%</a:t>
-            </a:r>
-          </a:p>
-        </p:txBody>
-      </p:sp>
-      <p:sp>
-        <p:nvSpPr>
-          <p:cNvPr id="8" name="TextBox 7"/>
+              <a:t>class TransformerBlock(nn.Module):
+    def __init__(self, dim, num_heads, mlp_ratio, dropout):
+        super().__init__()
+        self.norm1 = nn.LayerNorm(dim)
+        self.attn  = nn.MultiheadAttention(
+            dim, num_heads, dropout=dropout, batch_first=True)
+        self.norm2 = nn.LayerNorm(dim)
+        self.mlp   = MLP(dim, int(dim * mlp_ratio), dropout)
+    def forward(self, x):
+        # Pre-Norm：先 LayerNorm 再进 Attention，比 Post-Norm 更稳定
+        attn_out, _ = self.attn(
+            self.norm1(x), self.norm1(x), self.norm1(x),
+            need_weights=False)
+        x = x + attn_out        # 残差连接
+        x = x + self.mlp(self.norm2(x))
+        return x</a:t>
+            </a:r>
+          </a:p>
+        </p:txBody>
+      </p:sp>
+      <p:sp>
+        <p:nvSpPr>
+          <p:cNvPr id="7" name="TextBox 6"/>
           <p:cNvSpPr txBox="1"/>
           <p:nvPr/>
         </p:nvSpPr>
         <p:spPr>
           <a:xfrm>
-            <a:off x="365760" y="2194560"/>
-            <a:ext cx="3681983" cy="457200"/>
+            <a:off x="411480" y="5349240"/>
+            <a:ext cx="11247120" cy="731520"/>
           </a:xfrm>
           <a:prstGeom prst="rect">
             <a:avLst/>
@@ -5848,533 +6214,21 @@
           </a:bodyPr>
           <a:lstStyle/>
           <a:p>
-            <a:pPr algn="ctr"/>
-            <a:r>
-              <a:rPr sz="1300" b="0" i="0">
-                <a:solidFill>
-                  <a:srgbClr val="1C1C1C"/>
+            <a:pPr algn="l"/>
+            <a:r>
+              <a:rPr sz="1400" b="0" i="1">
+                <a:solidFill>
+                  <a:srgbClr val="555555"/>
                 </a:solidFill>
               </a:rPr>
-              <a:t>测试准确率</a:t>
-            </a:r>
-          </a:p>
-        </p:txBody>
-      </p:sp>
-      <p:sp>
-        <p:nvSpPr>
-          <p:cNvPr id="9" name="TextBox 8"/>
-          <p:cNvSpPr txBox="1"/>
-          <p:nvPr/>
-        </p:nvSpPr>
-        <p:spPr>
-          <a:xfrm>
-            <a:off x="365760" y="2633472"/>
-            <a:ext cx="3681983" cy="320040"/>
-          </a:xfrm>
-          <a:prstGeom prst="rect">
-            <a:avLst/>
-          </a:prstGeom>
-          <a:noFill/>
-        </p:spPr>
-        <p:txBody>
-          <a:bodyPr wrap="square">
-            <a:spAutoFit/>
-          </a:bodyPr>
-          <a:lstStyle/>
-          <a:p>
-            <a:pPr algn="ctr"/>
-            <a:r>
-              <a:rPr sz="1100" b="0" i="1">
-                <a:solidFill>
-                  <a:srgbClr val="555555"/>
-                </a:solidFill>
-              </a:rPr>
-              <a:t>✅ 满足 ≥80%</a:t>
-            </a:r>
-          </a:p>
-        </p:txBody>
-      </p:sp>
-      <p:sp>
-        <p:nvSpPr>
-          <p:cNvPr id="10" name="Rectangle 9"/>
-          <p:cNvSpPr/>
-          <p:nvPr/>
-        </p:nvSpPr>
-        <p:spPr>
-          <a:xfrm>
-            <a:off x="4184904" y="1097280"/>
-            <a:ext cx="3681983" cy="1920240"/>
-          </a:xfrm>
-          <a:prstGeom prst="rect">
-            <a:avLst/>
-          </a:prstGeom>
-          <a:solidFill>
-            <a:srgbClr val="E8F0F8"/>
-          </a:solidFill>
-          <a:ln>
-            <a:noFill/>
-          </a:ln>
-        </p:spPr>
-        <p:style>
-          <a:lnRef idx="1">
-            <a:schemeClr val="accent1"/>
-          </a:lnRef>
-          <a:fillRef idx="3">
-            <a:schemeClr val="accent1"/>
-          </a:fillRef>
-          <a:effectRef idx="2">
-            <a:schemeClr val="accent1"/>
-          </a:effectRef>
-          <a:fontRef idx="minor">
-            <a:schemeClr val="lt1"/>
-          </a:fontRef>
-        </p:style>
-        <p:txBody>
-          <a:bodyPr rtlCol="0" anchor="ctr"/>
-          <a:lstStyle/>
-          <a:p>
-            <a:pPr algn="ctr"/>
-          </a:p>
-        </p:txBody>
-      </p:sp>
-      <p:sp>
-        <p:nvSpPr>
-          <p:cNvPr id="11" name="Rectangle 10"/>
-          <p:cNvSpPr/>
-          <p:nvPr/>
-        </p:nvSpPr>
-        <p:spPr>
-          <a:xfrm>
-            <a:off x="4184904" y="1097280"/>
-            <a:ext cx="3681983" cy="73152"/>
-          </a:xfrm>
-          <a:prstGeom prst="rect">
-            <a:avLst/>
-          </a:prstGeom>
-          <a:solidFill>
-            <a:srgbClr val="1A335C"/>
-          </a:solidFill>
-          <a:ln>
-            <a:noFill/>
-          </a:ln>
-        </p:spPr>
-        <p:style>
-          <a:lnRef idx="1">
-            <a:schemeClr val="accent1"/>
-          </a:lnRef>
-          <a:fillRef idx="3">
-            <a:schemeClr val="accent1"/>
-          </a:fillRef>
-          <a:effectRef idx="2">
-            <a:schemeClr val="accent1"/>
-          </a:effectRef>
-          <a:fontRef idx="minor">
-            <a:schemeClr val="lt1"/>
-          </a:fontRef>
-        </p:style>
-        <p:txBody>
-          <a:bodyPr rtlCol="0" anchor="ctr"/>
-          <a:lstStyle/>
-          <a:p>
-            <a:pPr algn="ctr"/>
-          </a:p>
-        </p:txBody>
-      </p:sp>
-      <p:sp>
-        <p:nvSpPr>
-          <p:cNvPr id="12" name="TextBox 11"/>
-          <p:cNvSpPr txBox="1"/>
-          <p:nvPr/>
-        </p:nvSpPr>
-        <p:spPr>
-          <a:xfrm>
-            <a:off x="4184904" y="1234440"/>
-            <a:ext cx="3681983" cy="914400"/>
-          </a:xfrm>
-          <a:prstGeom prst="rect">
-            <a:avLst/>
-          </a:prstGeom>
-          <a:noFill/>
-        </p:spPr>
-        <p:txBody>
-          <a:bodyPr wrap="square">
-            <a:spAutoFit/>
-          </a:bodyPr>
-          <a:lstStyle/>
-          <a:p>
-            <a:pPr algn="ctr"/>
-            <a:r>
-              <a:rPr sz="3000" b="1" i="0">
-                <a:solidFill>
-                  <a:srgbClr val="1A7A3C"/>
-                </a:solidFill>
-              </a:rPr>
-              <a:t>80.52%</a:t>
-            </a:r>
-          </a:p>
-        </p:txBody>
-      </p:sp>
-      <p:sp>
-        <p:nvSpPr>
-          <p:cNvPr id="13" name="TextBox 12"/>
-          <p:cNvSpPr txBox="1"/>
-          <p:nvPr/>
-        </p:nvSpPr>
-        <p:spPr>
-          <a:xfrm>
-            <a:off x="4184904" y="2194560"/>
-            <a:ext cx="3681983" cy="457200"/>
-          </a:xfrm>
-          <a:prstGeom prst="rect">
-            <a:avLst/>
-          </a:prstGeom>
-          <a:noFill/>
-        </p:spPr>
-        <p:txBody>
-          <a:bodyPr wrap="square">
-            <a:spAutoFit/>
-          </a:bodyPr>
-          <a:lstStyle/>
-          <a:p>
-            <a:pPr algn="ctr"/>
-            <a:r>
-              <a:rPr sz="1300" b="0" i="0">
-                <a:solidFill>
-                  <a:srgbClr val="1C1C1C"/>
-                </a:solidFill>
-              </a:rPr>
-              <a:t>最优验证准确率</a:t>
-            </a:r>
-          </a:p>
-        </p:txBody>
-      </p:sp>
-      <p:sp>
-        <p:nvSpPr>
-          <p:cNvPr id="14" name="TextBox 13"/>
-          <p:cNvSpPr txBox="1"/>
-          <p:nvPr/>
-        </p:nvSpPr>
-        <p:spPr>
-          <a:xfrm>
-            <a:off x="4184904" y="2633472"/>
-            <a:ext cx="3681983" cy="320040"/>
-          </a:xfrm>
-          <a:prstGeom prst="rect">
-            <a:avLst/>
-          </a:prstGeom>
-          <a:noFill/>
-        </p:spPr>
-        <p:txBody>
-          <a:bodyPr wrap="square">
-            <a:spAutoFit/>
-          </a:bodyPr>
-          <a:lstStyle/>
-          <a:p>
-            <a:pPr algn="ctr"/>
-            <a:r>
-              <a:rPr sz="1100" b="0" i="1">
-                <a:solidFill>
-                  <a:srgbClr val="555555"/>
-                </a:solidFill>
-              </a:rPr>
-              <a:t>epoch 44</a:t>
-            </a:r>
-          </a:p>
-        </p:txBody>
-      </p:sp>
-      <p:sp>
-        <p:nvSpPr>
-          <p:cNvPr id="15" name="Rectangle 14"/>
-          <p:cNvSpPr/>
-          <p:nvPr/>
-        </p:nvSpPr>
-        <p:spPr>
-          <a:xfrm>
-            <a:off x="8004048" y="1097280"/>
-            <a:ext cx="3681983" cy="1920240"/>
-          </a:xfrm>
-          <a:prstGeom prst="rect">
-            <a:avLst/>
-          </a:prstGeom>
-          <a:solidFill>
-            <a:srgbClr val="E8F0F8"/>
-          </a:solidFill>
-          <a:ln>
-            <a:noFill/>
-          </a:ln>
-        </p:spPr>
-        <p:style>
-          <a:lnRef idx="1">
-            <a:schemeClr val="accent1"/>
-          </a:lnRef>
-          <a:fillRef idx="3">
-            <a:schemeClr val="accent1"/>
-          </a:fillRef>
-          <a:effectRef idx="2">
-            <a:schemeClr val="accent1"/>
-          </a:effectRef>
-          <a:fontRef idx="minor">
-            <a:schemeClr val="lt1"/>
-          </a:fontRef>
-        </p:style>
-        <p:txBody>
-          <a:bodyPr rtlCol="0" anchor="ctr"/>
-          <a:lstStyle/>
-          <a:p>
-            <a:pPr algn="ctr"/>
-          </a:p>
-        </p:txBody>
-      </p:sp>
-      <p:sp>
-        <p:nvSpPr>
-          <p:cNvPr id="16" name="Rectangle 15"/>
-          <p:cNvSpPr/>
-          <p:nvPr/>
-        </p:nvSpPr>
-        <p:spPr>
-          <a:xfrm>
-            <a:off x="8004048" y="1097280"/>
-            <a:ext cx="3681983" cy="73152"/>
-          </a:xfrm>
-          <a:prstGeom prst="rect">
-            <a:avLst/>
-          </a:prstGeom>
-          <a:solidFill>
-            <a:srgbClr val="1A335C"/>
-          </a:solidFill>
-          <a:ln>
-            <a:noFill/>
-          </a:ln>
-        </p:spPr>
-        <p:style>
-          <a:lnRef idx="1">
-            <a:schemeClr val="accent1"/>
-          </a:lnRef>
-          <a:fillRef idx="3">
-            <a:schemeClr val="accent1"/>
-          </a:fillRef>
-          <a:effectRef idx="2">
-            <a:schemeClr val="accent1"/>
-          </a:effectRef>
-          <a:fontRef idx="minor">
-            <a:schemeClr val="lt1"/>
-          </a:fontRef>
-        </p:style>
-        <p:txBody>
-          <a:bodyPr rtlCol="0" anchor="ctr"/>
-          <a:lstStyle/>
-          <a:p>
-            <a:pPr algn="ctr"/>
-          </a:p>
-        </p:txBody>
-      </p:sp>
-      <p:sp>
-        <p:nvSpPr>
-          <p:cNvPr id="17" name="TextBox 16"/>
-          <p:cNvSpPr txBox="1"/>
-          <p:nvPr/>
-        </p:nvSpPr>
-        <p:spPr>
-          <a:xfrm>
-            <a:off x="8004048" y="1234440"/>
-            <a:ext cx="3681983" cy="914400"/>
-          </a:xfrm>
-          <a:prstGeom prst="rect">
-            <a:avLst/>
-          </a:prstGeom>
-          <a:noFill/>
-        </p:spPr>
-        <p:txBody>
-          <a:bodyPr wrap="square">
-            <a:spAutoFit/>
-          </a:bodyPr>
-          <a:lstStyle/>
-          <a:p>
-            <a:pPr algn="ctr"/>
-            <a:r>
-              <a:rPr sz="3000" b="1" i="0">
-                <a:solidFill>
-                  <a:srgbClr val="1A7A3C"/>
-                </a:solidFill>
-              </a:rPr>
-              <a:t>epoch 36</a:t>
-            </a:r>
-          </a:p>
-        </p:txBody>
-      </p:sp>
-      <p:sp>
-        <p:nvSpPr>
-          <p:cNvPr id="18" name="TextBox 17"/>
-          <p:cNvSpPr txBox="1"/>
-          <p:nvPr/>
-        </p:nvSpPr>
-        <p:spPr>
-          <a:xfrm>
-            <a:off x="8004048" y="2194560"/>
-            <a:ext cx="3681983" cy="457200"/>
-          </a:xfrm>
-          <a:prstGeom prst="rect">
-            <a:avLst/>
-          </a:prstGeom>
-          <a:noFill/>
-        </p:spPr>
-        <p:txBody>
-          <a:bodyPr wrap="square">
-            <a:spAutoFit/>
-          </a:bodyPr>
-          <a:lstStyle/>
-          <a:p>
-            <a:pPr algn="ctr"/>
-            <a:r>
-              <a:rPr sz="1300" b="0" i="0">
-                <a:solidFill>
-                  <a:srgbClr val="1C1C1C"/>
-                </a:solidFill>
-              </a:rPr>
-              <a:t>突破 80% 时间</a:t>
-            </a:r>
-          </a:p>
-        </p:txBody>
-      </p:sp>
-      <p:sp>
-        <p:nvSpPr>
-          <p:cNvPr id="19" name="TextBox 18"/>
-          <p:cNvSpPr txBox="1"/>
-          <p:nvPr/>
-        </p:nvSpPr>
-        <p:spPr>
-          <a:xfrm>
-            <a:off x="411480" y="3154680"/>
-            <a:ext cx="11247120" cy="475488"/>
-          </a:xfrm>
-          <a:prstGeom prst="rect">
-            <a:avLst/>
-          </a:prstGeom>
-          <a:noFill/>
-        </p:spPr>
-        <p:txBody>
-          <a:bodyPr wrap="square">
-            <a:spAutoFit/>
-          </a:bodyPr>
-          <a:lstStyle/>
-          <a:p>
-            <a:pPr algn="l"/>
-            <a:r>
-              <a:rPr sz="1600" b="0" i="0">
-                <a:solidFill>
-                  <a:srgbClr val="1C1C1C"/>
-                </a:solidFill>
-              </a:rPr>
-              <a:t>▸ 从零训练 ViT 收敛较慢——缺乏图像归纳偏置（平移不变性）是主因</a:t>
-            </a:r>
-          </a:p>
-        </p:txBody>
-      </p:sp>
-      <p:sp>
-        <p:nvSpPr>
-          <p:cNvPr id="20" name="TextBox 19"/>
-          <p:cNvSpPr txBox="1"/>
-          <p:nvPr/>
-        </p:nvSpPr>
-        <p:spPr>
-          <a:xfrm>
-            <a:off x="411480" y="3630168"/>
-            <a:ext cx="11247120" cy="475488"/>
-          </a:xfrm>
-          <a:prstGeom prst="rect">
-            <a:avLst/>
-          </a:prstGeom>
-          <a:noFill/>
-        </p:spPr>
-        <p:txBody>
-          <a:bodyPr wrap="square">
-            <a:spAutoFit/>
-          </a:bodyPr>
-          <a:lstStyle/>
-          <a:p>
-            <a:pPr algn="l"/>
-            <a:r>
-              <a:rPr sz="1600" b="0" i="0">
-                <a:solidFill>
-                  <a:srgbClr val="1C1C1C"/>
-                </a:solidFill>
-              </a:rPr>
-              <a:t>▸ CosineAnnealingLR 在训练后期有效抑制振荡，是最终达标的关键</a:t>
-            </a:r>
-          </a:p>
-        </p:txBody>
-      </p:sp>
-      <p:sp>
-        <p:nvSpPr>
-          <p:cNvPr id="21" name="TextBox 20"/>
-          <p:cNvSpPr txBox="1"/>
-          <p:nvPr/>
-        </p:nvSpPr>
-        <p:spPr>
-          <a:xfrm>
-            <a:off x="411480" y="4105656"/>
-            <a:ext cx="11247120" cy="475488"/>
-          </a:xfrm>
-          <a:prstGeom prst="rect">
-            <a:avLst/>
-          </a:prstGeom>
-          <a:noFill/>
-        </p:spPr>
-        <p:txBody>
-          <a:bodyPr wrap="square">
-            <a:spAutoFit/>
-          </a:bodyPr>
-          <a:lstStyle/>
-          <a:p>
-            <a:pPr algn="l"/>
-            <a:r>
-              <a:rPr sz="1600" b="0" i="0">
-                <a:solidFill>
-                  <a:srgbClr val="1C1C1C"/>
-                </a:solidFill>
-              </a:rPr>
-              <a:t>▸ weight_decay=0.05 比常规设置大，对 Transformer 类模型泛化很重要</a:t>
-            </a:r>
-          </a:p>
-        </p:txBody>
-      </p:sp>
-      <p:sp>
-        <p:nvSpPr>
-          <p:cNvPr id="22" name="TextBox 21"/>
-          <p:cNvSpPr txBox="1"/>
-          <p:nvPr/>
-        </p:nvSpPr>
-        <p:spPr>
-          <a:xfrm>
-            <a:off x="411480" y="4581144"/>
-            <a:ext cx="11247120" cy="475488"/>
-          </a:xfrm>
-          <a:prstGeom prst="rect">
-            <a:avLst/>
-          </a:prstGeom>
-          <a:noFill/>
-        </p:spPr>
-        <p:txBody>
-          <a:bodyPr wrap="square">
-            <a:spAutoFit/>
-          </a:bodyPr>
-          <a:lstStyle/>
-          <a:p>
-            <a:pPr algn="l"/>
-            <a:r>
-              <a:rPr sz="1600" b="0" i="0">
-                <a:solidFill>
-                  <a:srgbClr val="1C1C1C"/>
-                </a:solidFill>
-              </a:rPr>
-              <a:t>▸ 对比：使用 ImageNet 预训练权重微调，同模型可达 95%+（迁移学习优势）</a:t>
-            </a:r>
-          </a:p>
-        </p:txBody>
-      </p:sp>
-      <p:sp>
-        <p:nvSpPr>
-          <p:cNvPr id="23" name="Rectangle 22"/>
+              <a:t>Pre-Norm 在深层网络中梯度更稳定，是 ViT 原论文及后续工作的标准做法。</a:t>
+            </a:r>
+          </a:p>
+        </p:txBody>
+      </p:sp>
+      <p:sp>
+        <p:nvSpPr>
+          <p:cNvPr id="8" name="Rectangle 7"/>
           <p:cNvSpPr/>
           <p:nvPr/>
         </p:nvSpPr>
@@ -6556,21 +6410,107 @@
                   <a:srgbClr val="FFFFFF"/>
                 </a:solidFill>
               </a:rPr>
-              <a:t>总结与展望</a:t>
-            </a:r>
-          </a:p>
-        </p:txBody>
-      </p:sp>
-      <p:sp>
-        <p:nvSpPr>
-          <p:cNvPr id="5" name="TextBox 4"/>
+              <a:t>实验结果与分析</a:t>
+            </a:r>
+          </a:p>
+        </p:txBody>
+      </p:sp>
+      <p:sp>
+        <p:nvSpPr>
+          <p:cNvPr id="5" name="Rectangle 4"/>
+          <p:cNvSpPr/>
+          <p:nvPr/>
+        </p:nvSpPr>
+        <p:spPr>
+          <a:xfrm>
+            <a:off x="365760" y="1097280"/>
+            <a:ext cx="3681983" cy="1920240"/>
+          </a:xfrm>
+          <a:prstGeom prst="rect">
+            <a:avLst/>
+          </a:prstGeom>
+          <a:solidFill>
+            <a:srgbClr val="E8F0F8"/>
+          </a:solidFill>
+          <a:ln>
+            <a:noFill/>
+          </a:ln>
+        </p:spPr>
+        <p:style>
+          <a:lnRef idx="1">
+            <a:schemeClr val="accent1"/>
+          </a:lnRef>
+          <a:fillRef idx="3">
+            <a:schemeClr val="accent1"/>
+          </a:fillRef>
+          <a:effectRef idx="2">
+            <a:schemeClr val="accent1"/>
+          </a:effectRef>
+          <a:fontRef idx="minor">
+            <a:schemeClr val="lt1"/>
+          </a:fontRef>
+        </p:style>
+        <p:txBody>
+          <a:bodyPr rtlCol="0" anchor="ctr"/>
+          <a:lstStyle/>
+          <a:p>
+            <a:pPr algn="ctr"/>
+          </a:p>
+        </p:txBody>
+      </p:sp>
+      <p:sp>
+        <p:nvSpPr>
+          <p:cNvPr id="6" name="Rectangle 5"/>
+          <p:cNvSpPr/>
+          <p:nvPr/>
+        </p:nvSpPr>
+        <p:spPr>
+          <a:xfrm>
+            <a:off x="365760" y="1097280"/>
+            <a:ext cx="3681983" cy="73152"/>
+          </a:xfrm>
+          <a:prstGeom prst="rect">
+            <a:avLst/>
+          </a:prstGeom>
+          <a:solidFill>
+            <a:srgbClr val="1A335C"/>
+          </a:solidFill>
+          <a:ln>
+            <a:noFill/>
+          </a:ln>
+        </p:spPr>
+        <p:style>
+          <a:lnRef idx="1">
+            <a:schemeClr val="accent1"/>
+          </a:lnRef>
+          <a:fillRef idx="3">
+            <a:schemeClr val="accent1"/>
+          </a:fillRef>
+          <a:effectRef idx="2">
+            <a:schemeClr val="accent1"/>
+          </a:effectRef>
+          <a:fontRef idx="minor">
+            <a:schemeClr val="lt1"/>
+          </a:fontRef>
+        </p:style>
+        <p:txBody>
+          <a:bodyPr rtlCol="0" anchor="ctr"/>
+          <a:lstStyle/>
+          <a:p>
+            <a:pPr algn="ctr"/>
+          </a:p>
+        </p:txBody>
+      </p:sp>
+      <p:sp>
+        <p:nvSpPr>
+          <p:cNvPr id="7" name="TextBox 6"/>
           <p:cNvSpPr txBox="1"/>
           <p:nvPr/>
         </p:nvSpPr>
         <p:spPr>
           <a:xfrm>
-            <a:off x="411480" y="1115568"/>
-            <a:ext cx="11247120" cy="475488"/>
+            <a:off x="365760" y="1234440"/>
+            <a:ext cx="3681983" cy="914400"/>
           </a:xfrm>
           <a:prstGeom prst="rect">
             <a:avLst/>
@@ -6583,28 +6523,28 @@
           </a:bodyPr>
           <a:lstStyle/>
           <a:p>
-            <a:pPr algn="l"/>
-            <a:r>
-              <a:rPr sz="1700" b="0" i="0">
-                <a:solidFill>
-                  <a:srgbClr val="1C1C1C"/>
+            <a:pPr algn="ctr"/>
+            <a:r>
+              <a:rPr sz="3000" b="1" i="0">
+                <a:solidFill>
+                  <a:srgbClr val="1A7A3C"/>
                 </a:solidFill>
               </a:rPr>
-              <a:t>▸ 从零实现了完整 ViT，包含 PatchEmbed、CLS Token、位置编码、TransformerBlock</a:t>
-            </a:r>
-          </a:p>
-        </p:txBody>
-      </p:sp>
-      <p:sp>
-        <p:nvSpPr>
-          <p:cNvPr id="6" name="TextBox 5"/>
+              <a:t>80.48%</a:t>
+            </a:r>
+          </a:p>
+        </p:txBody>
+      </p:sp>
+      <p:sp>
+        <p:nvSpPr>
+          <p:cNvPr id="8" name="TextBox 7"/>
           <p:cNvSpPr txBox="1"/>
           <p:nvPr/>
         </p:nvSpPr>
         <p:spPr>
           <a:xfrm>
-            <a:off x="411480" y="1591056"/>
-            <a:ext cx="11247120" cy="475488"/>
+            <a:off x="365760" y="2194560"/>
+            <a:ext cx="3681983" cy="457200"/>
           </a:xfrm>
           <a:prstGeom prst="rect">
             <a:avLst/>
@@ -6617,28 +6557,28 @@
           </a:bodyPr>
           <a:lstStyle/>
           <a:p>
-            <a:pPr algn="l"/>
-            <a:r>
-              <a:rPr sz="1700" b="0" i="0">
+            <a:pPr algn="ctr"/>
+            <a:r>
+              <a:rPr sz="1300" b="0" i="0">
                 <a:solidFill>
                   <a:srgbClr val="1C1C1C"/>
                 </a:solidFill>
               </a:rPr>
-              <a:t>▸ 经过 50 epoch 训练达到 80.48% 测试准确率，满足实验要求</a:t>
-            </a:r>
-          </a:p>
-        </p:txBody>
-      </p:sp>
-      <p:sp>
-        <p:nvSpPr>
-          <p:cNvPr id="7" name="TextBox 6"/>
+              <a:t>测试准确率</a:t>
+            </a:r>
+          </a:p>
+        </p:txBody>
+      </p:sp>
+      <p:sp>
+        <p:nvSpPr>
+          <p:cNvPr id="9" name="TextBox 8"/>
           <p:cNvSpPr txBox="1"/>
           <p:nvPr/>
         </p:nvSpPr>
         <p:spPr>
           <a:xfrm>
-            <a:off x="411480" y="2066543"/>
-            <a:ext cx="11247120" cy="475488"/>
+            <a:off x="365760" y="2633472"/>
+            <a:ext cx="3681983" cy="320040"/>
           </a:xfrm>
           <a:prstGeom prst="rect">
             <a:avLst/>
@@ -6651,28 +6591,114 @@
           </a:bodyPr>
           <a:lstStyle/>
           <a:p>
-            <a:pPr algn="l"/>
-            <a:r>
-              <a:rPr sz="1700" b="0" i="0">
-                <a:solidFill>
-                  <a:srgbClr val="1C1C1C"/>
+            <a:pPr algn="ctr"/>
+            <a:r>
+              <a:rPr sz="1100" b="0" i="1">
+                <a:solidFill>
+                  <a:srgbClr val="555555"/>
                 </a:solidFill>
               </a:rPr>
-              <a:t>▸ Pre-Norm + 残差结构保证了深层网络训练的稳定性</a:t>
-            </a:r>
-          </a:p>
-        </p:txBody>
-      </p:sp>
-      <p:sp>
-        <p:nvSpPr>
-          <p:cNvPr id="8" name="TextBox 7"/>
+              <a:t>✅ 满足 ≥80%</a:t>
+            </a:r>
+          </a:p>
+        </p:txBody>
+      </p:sp>
+      <p:sp>
+        <p:nvSpPr>
+          <p:cNvPr id="10" name="Rectangle 9"/>
+          <p:cNvSpPr/>
+          <p:nvPr/>
+        </p:nvSpPr>
+        <p:spPr>
+          <a:xfrm>
+            <a:off x="4184904" y="1097280"/>
+            <a:ext cx="3681983" cy="1920240"/>
+          </a:xfrm>
+          <a:prstGeom prst="rect">
+            <a:avLst/>
+          </a:prstGeom>
+          <a:solidFill>
+            <a:srgbClr val="E8F0F8"/>
+          </a:solidFill>
+          <a:ln>
+            <a:noFill/>
+          </a:ln>
+        </p:spPr>
+        <p:style>
+          <a:lnRef idx="1">
+            <a:schemeClr val="accent1"/>
+          </a:lnRef>
+          <a:fillRef idx="3">
+            <a:schemeClr val="accent1"/>
+          </a:fillRef>
+          <a:effectRef idx="2">
+            <a:schemeClr val="accent1"/>
+          </a:effectRef>
+          <a:fontRef idx="minor">
+            <a:schemeClr val="lt1"/>
+          </a:fontRef>
+        </p:style>
+        <p:txBody>
+          <a:bodyPr rtlCol="0" anchor="ctr"/>
+          <a:lstStyle/>
+          <a:p>
+            <a:pPr algn="ctr"/>
+          </a:p>
+        </p:txBody>
+      </p:sp>
+      <p:sp>
+        <p:nvSpPr>
+          <p:cNvPr id="11" name="Rectangle 10"/>
+          <p:cNvSpPr/>
+          <p:nvPr/>
+        </p:nvSpPr>
+        <p:spPr>
+          <a:xfrm>
+            <a:off x="4184904" y="1097280"/>
+            <a:ext cx="3681983" cy="73152"/>
+          </a:xfrm>
+          <a:prstGeom prst="rect">
+            <a:avLst/>
+          </a:prstGeom>
+          <a:solidFill>
+            <a:srgbClr val="1A335C"/>
+          </a:solidFill>
+          <a:ln>
+            <a:noFill/>
+          </a:ln>
+        </p:spPr>
+        <p:style>
+          <a:lnRef idx="1">
+            <a:schemeClr val="accent1"/>
+          </a:lnRef>
+          <a:fillRef idx="3">
+            <a:schemeClr val="accent1"/>
+          </a:fillRef>
+          <a:effectRef idx="2">
+            <a:schemeClr val="accent1"/>
+          </a:effectRef>
+          <a:fontRef idx="minor">
+            <a:schemeClr val="lt1"/>
+          </a:fontRef>
+        </p:style>
+        <p:txBody>
+          <a:bodyPr rtlCol="0" anchor="ctr"/>
+          <a:lstStyle/>
+          <a:p>
+            <a:pPr algn="ctr"/>
+          </a:p>
+        </p:txBody>
+      </p:sp>
+      <p:sp>
+        <p:nvSpPr>
+          <p:cNvPr id="12" name="TextBox 11"/>
           <p:cNvSpPr txBox="1"/>
           <p:nvPr/>
         </p:nvSpPr>
         <p:spPr>
           <a:xfrm>
-            <a:off x="411480" y="2542032"/>
-            <a:ext cx="11247120" cy="475488"/>
+            <a:off x="4184904" y="1234440"/>
+            <a:ext cx="3681983" cy="914400"/>
           </a:xfrm>
           <a:prstGeom prst="rect">
             <a:avLst/>
@@ -6685,28 +6711,28 @@
           </a:bodyPr>
           <a:lstStyle/>
           <a:p>
-            <a:pPr algn="l"/>
-            <a:r>
-              <a:rPr sz="1700" b="0" i="0">
-                <a:solidFill>
-                  <a:srgbClr val="1C1C1C"/>
+            <a:pPr algn="ctr"/>
+            <a:r>
+              <a:rPr sz="3000" b="1" i="0">
+                <a:solidFill>
+                  <a:srgbClr val="1A7A3C"/>
                 </a:solidFill>
               </a:rPr>
-              <a:t>▸ ViT 相比 CNN 的优势在于全局建模能力，劣势是样本效率较低</a:t>
-            </a:r>
-          </a:p>
-        </p:txBody>
-      </p:sp>
-      <p:sp>
-        <p:nvSpPr>
-          <p:cNvPr id="9" name="TextBox 8"/>
+              <a:t>80.52%</a:t>
+            </a:r>
+          </a:p>
+        </p:txBody>
+      </p:sp>
+      <p:sp>
+        <p:nvSpPr>
+          <p:cNvPr id="13" name="TextBox 12"/>
           <p:cNvSpPr txBox="1"/>
           <p:nvPr/>
         </p:nvSpPr>
         <p:spPr>
           <a:xfrm>
-            <a:off x="411480" y="3017520"/>
-            <a:ext cx="11247120" cy="475488"/>
+            <a:off x="4184904" y="2194560"/>
+            <a:ext cx="3681983" cy="457200"/>
           </a:xfrm>
           <a:prstGeom prst="rect">
             <a:avLst/>
@@ -6719,28 +6745,28 @@
           </a:bodyPr>
           <a:lstStyle/>
           <a:p>
-            <a:pPr algn="l"/>
-            <a:r>
-              <a:rPr sz="1600" b="0" i="0">
-                <a:solidFill>
-                  <a:srgbClr val="555555"/>
+            <a:pPr algn="ctr"/>
+            <a:r>
+              <a:rPr sz="1300" b="0" i="0">
+                <a:solidFill>
+                  <a:srgbClr val="1C1C1C"/>
                 </a:solidFill>
               </a:rPr>
-              <a:t>    – 改进方向①：使用预训练权重（DeiT/MAE）微调，大幅减少所需 epoch</a:t>
-            </a:r>
-          </a:p>
-        </p:txBody>
-      </p:sp>
-      <p:sp>
-        <p:nvSpPr>
-          <p:cNvPr id="10" name="TextBox 9"/>
+              <a:t>最优验证准确率</a:t>
+            </a:r>
+          </a:p>
+        </p:txBody>
+      </p:sp>
+      <p:sp>
+        <p:nvSpPr>
+          <p:cNvPr id="14" name="TextBox 13"/>
           <p:cNvSpPr txBox="1"/>
           <p:nvPr/>
         </p:nvSpPr>
         <p:spPr>
           <a:xfrm>
-            <a:off x="411480" y="3493008"/>
-            <a:ext cx="11247120" cy="475488"/>
+            <a:off x="4184904" y="2633472"/>
+            <a:ext cx="3681983" cy="320040"/>
           </a:xfrm>
           <a:prstGeom prst="rect">
             <a:avLst/>
@@ -6753,21 +6779,994 @@
           </a:bodyPr>
           <a:lstStyle/>
           <a:p>
+            <a:pPr algn="ctr"/>
+            <a:r>
+              <a:rPr sz="1100" b="0" i="1">
+                <a:solidFill>
+                  <a:srgbClr val="555555"/>
+                </a:solidFill>
+              </a:rPr>
+              <a:t>epoch 44</a:t>
+            </a:r>
+          </a:p>
+        </p:txBody>
+      </p:sp>
+      <p:sp>
+        <p:nvSpPr>
+          <p:cNvPr id="15" name="Rectangle 14"/>
+          <p:cNvSpPr/>
+          <p:nvPr/>
+        </p:nvSpPr>
+        <p:spPr>
+          <a:xfrm>
+            <a:off x="8004048" y="1097280"/>
+            <a:ext cx="3681983" cy="1920240"/>
+          </a:xfrm>
+          <a:prstGeom prst="rect">
+            <a:avLst/>
+          </a:prstGeom>
+          <a:solidFill>
+            <a:srgbClr val="E8F0F8"/>
+          </a:solidFill>
+          <a:ln>
+            <a:noFill/>
+          </a:ln>
+        </p:spPr>
+        <p:style>
+          <a:lnRef idx="1">
+            <a:schemeClr val="accent1"/>
+          </a:lnRef>
+          <a:fillRef idx="3">
+            <a:schemeClr val="accent1"/>
+          </a:fillRef>
+          <a:effectRef idx="2">
+            <a:schemeClr val="accent1"/>
+          </a:effectRef>
+          <a:fontRef idx="minor">
+            <a:schemeClr val="lt1"/>
+          </a:fontRef>
+        </p:style>
+        <p:txBody>
+          <a:bodyPr rtlCol="0" anchor="ctr"/>
+          <a:lstStyle/>
+          <a:p>
+            <a:pPr algn="ctr"/>
+          </a:p>
+        </p:txBody>
+      </p:sp>
+      <p:sp>
+        <p:nvSpPr>
+          <p:cNvPr id="16" name="Rectangle 15"/>
+          <p:cNvSpPr/>
+          <p:nvPr/>
+        </p:nvSpPr>
+        <p:spPr>
+          <a:xfrm>
+            <a:off x="8004048" y="1097280"/>
+            <a:ext cx="3681983" cy="73152"/>
+          </a:xfrm>
+          <a:prstGeom prst="rect">
+            <a:avLst/>
+          </a:prstGeom>
+          <a:solidFill>
+            <a:srgbClr val="1A335C"/>
+          </a:solidFill>
+          <a:ln>
+            <a:noFill/>
+          </a:ln>
+        </p:spPr>
+        <p:style>
+          <a:lnRef idx="1">
+            <a:schemeClr val="accent1"/>
+          </a:lnRef>
+          <a:fillRef idx="3">
+            <a:schemeClr val="accent1"/>
+          </a:fillRef>
+          <a:effectRef idx="2">
+            <a:schemeClr val="accent1"/>
+          </a:effectRef>
+          <a:fontRef idx="minor">
+            <a:schemeClr val="lt1"/>
+          </a:fontRef>
+        </p:style>
+        <p:txBody>
+          <a:bodyPr rtlCol="0" anchor="ctr"/>
+          <a:lstStyle/>
+          <a:p>
+            <a:pPr algn="ctr"/>
+          </a:p>
+        </p:txBody>
+      </p:sp>
+      <p:sp>
+        <p:nvSpPr>
+          <p:cNvPr id="17" name="TextBox 16"/>
+          <p:cNvSpPr txBox="1"/>
+          <p:nvPr/>
+        </p:nvSpPr>
+        <p:spPr>
+          <a:xfrm>
+            <a:off x="8004048" y="1234440"/>
+            <a:ext cx="3681983" cy="914400"/>
+          </a:xfrm>
+          <a:prstGeom prst="rect">
+            <a:avLst/>
+          </a:prstGeom>
+          <a:noFill/>
+        </p:spPr>
+        <p:txBody>
+          <a:bodyPr wrap="square">
+            <a:spAutoFit/>
+          </a:bodyPr>
+          <a:lstStyle/>
+          <a:p>
+            <a:pPr algn="ctr"/>
+            <a:r>
+              <a:rPr sz="3000" b="1" i="0">
+                <a:solidFill>
+                  <a:srgbClr val="1A7A3C"/>
+                </a:solidFill>
+              </a:rPr>
+              <a:t>epoch 36</a:t>
+            </a:r>
+          </a:p>
+        </p:txBody>
+      </p:sp>
+      <p:sp>
+        <p:nvSpPr>
+          <p:cNvPr id="18" name="TextBox 17"/>
+          <p:cNvSpPr txBox="1"/>
+          <p:nvPr/>
+        </p:nvSpPr>
+        <p:spPr>
+          <a:xfrm>
+            <a:off x="8004048" y="2194560"/>
+            <a:ext cx="3681983" cy="457200"/>
+          </a:xfrm>
+          <a:prstGeom prst="rect">
+            <a:avLst/>
+          </a:prstGeom>
+          <a:noFill/>
+        </p:spPr>
+        <p:txBody>
+          <a:bodyPr wrap="square">
+            <a:spAutoFit/>
+          </a:bodyPr>
+          <a:lstStyle/>
+          <a:p>
+            <a:pPr algn="ctr"/>
+            <a:r>
+              <a:rPr sz="1300" b="0" i="0">
+                <a:solidFill>
+                  <a:srgbClr val="1C1C1C"/>
+                </a:solidFill>
+              </a:rPr>
+              <a:t>突破 80%</a:t>
+            </a:r>
+          </a:p>
+        </p:txBody>
+      </p:sp>
+      <p:sp>
+        <p:nvSpPr>
+          <p:cNvPr id="19" name="TextBox 18"/>
+          <p:cNvSpPr txBox="1"/>
+          <p:nvPr/>
+        </p:nvSpPr>
+        <p:spPr>
+          <a:xfrm>
+            <a:off x="411480" y="3154680"/>
+            <a:ext cx="11247120" cy="475488"/>
+          </a:xfrm>
+          <a:prstGeom prst="rect">
+            <a:avLst/>
+          </a:prstGeom>
+          <a:noFill/>
+        </p:spPr>
+        <p:txBody>
+          <a:bodyPr wrap="square">
+            <a:spAutoFit/>
+          </a:bodyPr>
+          <a:lstStyle/>
+          <a:p>
             <a:pPr algn="l"/>
             <a:r>
               <a:rPr sz="1600" b="0" i="0">
                 <a:solidFill>
+                  <a:srgbClr val="1C1C1C"/>
+                </a:solidFill>
+              </a:rPr>
+              <a:t>▸ 从零训练 ViT 收敛较慢——缺乏图像归纳偏置（平移不变性、局部性）是主因</a:t>
+            </a:r>
+          </a:p>
+        </p:txBody>
+      </p:sp>
+      <p:sp>
+        <p:nvSpPr>
+          <p:cNvPr id="20" name="TextBox 19"/>
+          <p:cNvSpPr txBox="1"/>
+          <p:nvPr/>
+        </p:nvSpPr>
+        <p:spPr>
+          <a:xfrm>
+            <a:off x="411480" y="3630168"/>
+            <a:ext cx="11247120" cy="475488"/>
+          </a:xfrm>
+          <a:prstGeom prst="rect">
+            <a:avLst/>
+          </a:prstGeom>
+          <a:noFill/>
+        </p:spPr>
+        <p:txBody>
+          <a:bodyPr wrap="square">
+            <a:spAutoFit/>
+          </a:bodyPr>
+          <a:lstStyle/>
+          <a:p>
+            <a:pPr algn="l"/>
+            <a:r>
+              <a:rPr sz="1600" b="0" i="0">
+                <a:solidFill>
+                  <a:srgbClr val="1C1C1C"/>
+                </a:solidFill>
+              </a:rPr>
+              <a:t>▸ CosineAnnealingLR 在训练后期有效抑制 loss 振荡，是最终达标的关键</a:t>
+            </a:r>
+          </a:p>
+        </p:txBody>
+      </p:sp>
+      <p:sp>
+        <p:nvSpPr>
+          <p:cNvPr id="21" name="TextBox 20"/>
+          <p:cNvSpPr txBox="1"/>
+          <p:nvPr/>
+        </p:nvSpPr>
+        <p:spPr>
+          <a:xfrm>
+            <a:off x="411480" y="4105656"/>
+            <a:ext cx="11247120" cy="475488"/>
+          </a:xfrm>
+          <a:prstGeom prst="rect">
+            <a:avLst/>
+          </a:prstGeom>
+          <a:noFill/>
+        </p:spPr>
+        <p:txBody>
+          <a:bodyPr wrap="square">
+            <a:spAutoFit/>
+          </a:bodyPr>
+          <a:lstStyle/>
+          <a:p>
+            <a:pPr algn="l"/>
+            <a:r>
+              <a:rPr sz="1600" b="0" i="0">
+                <a:solidFill>
+                  <a:srgbClr val="1C1C1C"/>
+                </a:solidFill>
+              </a:rPr>
+              <a:t>▸ weight_decay=0.05（比常规大 5×）对 Transformer 泛化很重要</a:t>
+            </a:r>
+          </a:p>
+        </p:txBody>
+      </p:sp>
+      <p:sp>
+        <p:nvSpPr>
+          <p:cNvPr id="22" name="TextBox 21"/>
+          <p:cNvSpPr txBox="1"/>
+          <p:nvPr/>
+        </p:nvSpPr>
+        <p:spPr>
+          <a:xfrm>
+            <a:off x="411480" y="4581144"/>
+            <a:ext cx="11247120" cy="475488"/>
+          </a:xfrm>
+          <a:prstGeom prst="rect">
+            <a:avLst/>
+          </a:prstGeom>
+          <a:noFill/>
+        </p:spPr>
+        <p:txBody>
+          <a:bodyPr wrap="square">
+            <a:spAutoFit/>
+          </a:bodyPr>
+          <a:lstStyle/>
+          <a:p>
+            <a:pPr algn="l"/>
+            <a:r>
+              <a:rPr sz="1600" b="0" i="0">
+                <a:solidFill>
+                  <a:srgbClr val="1C1C1C"/>
+                </a:solidFill>
+              </a:rPr>
+              <a:t>▸ 对比：使用 ImageNet 预训练权重微调，同模型可达 95%+</a:t>
+            </a:r>
+          </a:p>
+        </p:txBody>
+      </p:sp>
+      <p:sp>
+        <p:nvSpPr>
+          <p:cNvPr id="23" name="Rectangle 22"/>
+          <p:cNvSpPr/>
+          <p:nvPr/>
+        </p:nvSpPr>
+        <p:spPr>
+          <a:xfrm>
+            <a:off x="0" y="6748272"/>
+            <a:ext cx="12188952" cy="109728"/>
+          </a:xfrm>
+          <a:prstGeom prst="rect">
+            <a:avLst/>
+          </a:prstGeom>
+          <a:solidFill>
+            <a:srgbClr val="1A335C"/>
+          </a:solidFill>
+          <a:ln>
+            <a:noFill/>
+          </a:ln>
+        </p:spPr>
+        <p:style>
+          <a:lnRef idx="1">
+            <a:schemeClr val="accent1"/>
+          </a:lnRef>
+          <a:fillRef idx="3">
+            <a:schemeClr val="accent1"/>
+          </a:fillRef>
+          <a:effectRef idx="2">
+            <a:schemeClr val="accent1"/>
+          </a:effectRef>
+          <a:fontRef idx="minor">
+            <a:schemeClr val="lt1"/>
+          </a:fontRef>
+        </p:style>
+        <p:txBody>
+          <a:bodyPr rtlCol="0" anchor="ctr"/>
+          <a:lstStyle/>
+          <a:p>
+            <a:pPr algn="ctr"/>
+          </a:p>
+        </p:txBody>
+      </p:sp>
+    </p:spTree>
+  </p:cSld>
+  <p:clrMapOvr>
+    <a:masterClrMapping/>
+  </p:clrMapOvr>
+</p:sld>
+</file>
+
+<file path=ppt/slides/slide9.xml><?xml version="1.0" encoding="utf-8"?>
+<p:sld xmlns:a="http://schemas.openxmlformats.org/drawingml/2006/main" xmlns:p="http://schemas.openxmlformats.org/presentationml/2006/main" xmlns:r="http://schemas.openxmlformats.org/officeDocument/2006/relationships">
+  <p:cSld>
+    <p:bg>
+      <p:bgPr>
+        <a:solidFill>
+          <a:srgbClr val="FFFFFF"/>
+        </a:solidFill>
+        <a:effectLst/>
+      </p:bgPr>
+    </p:bg>
+    <p:spTree>
+      <p:nvGrpSpPr>
+        <p:cNvPr id="1" name=""/>
+        <p:cNvGrpSpPr/>
+        <p:nvPr/>
+      </p:nvGrpSpPr>
+      <p:grpSpPr/>
+      <p:sp>
+        <p:nvSpPr>
+          <p:cNvPr id="2" name="Rectangle 1"/>
+          <p:cNvSpPr/>
+          <p:nvPr/>
+        </p:nvSpPr>
+        <p:spPr>
+          <a:xfrm>
+            <a:off x="0" y="0"/>
+            <a:ext cx="12188952" cy="960120"/>
+          </a:xfrm>
+          <a:prstGeom prst="rect">
+            <a:avLst/>
+          </a:prstGeom>
+          <a:solidFill>
+            <a:srgbClr val="1A335C"/>
+          </a:solidFill>
+          <a:ln>
+            <a:noFill/>
+          </a:ln>
+        </p:spPr>
+        <p:style>
+          <a:lnRef idx="1">
+            <a:schemeClr val="accent1"/>
+          </a:lnRef>
+          <a:fillRef idx="3">
+            <a:schemeClr val="accent1"/>
+          </a:fillRef>
+          <a:effectRef idx="2">
+            <a:schemeClr val="accent1"/>
+          </a:effectRef>
+          <a:fontRef idx="minor">
+            <a:schemeClr val="lt1"/>
+          </a:fontRef>
+        </p:style>
+        <p:txBody>
+          <a:bodyPr rtlCol="0" anchor="ctr"/>
+          <a:lstStyle/>
+          <a:p>
+            <a:pPr algn="ctr"/>
+          </a:p>
+        </p:txBody>
+      </p:sp>
+      <p:sp>
+        <p:nvSpPr>
+          <p:cNvPr id="3" name="Rectangle 2"/>
+          <p:cNvSpPr/>
+          <p:nvPr/>
+        </p:nvSpPr>
+        <p:spPr>
+          <a:xfrm>
+            <a:off x="0" y="0"/>
+            <a:ext cx="164592" cy="6858000"/>
+          </a:xfrm>
+          <a:prstGeom prst="rect">
+            <a:avLst/>
+          </a:prstGeom>
+          <a:solidFill>
+            <a:srgbClr val="1A335C"/>
+          </a:solidFill>
+          <a:ln>
+            <a:noFill/>
+          </a:ln>
+        </p:spPr>
+        <p:style>
+          <a:lnRef idx="1">
+            <a:schemeClr val="accent1"/>
+          </a:lnRef>
+          <a:fillRef idx="3">
+            <a:schemeClr val="accent1"/>
+          </a:fillRef>
+          <a:effectRef idx="2">
+            <a:schemeClr val="accent1"/>
+          </a:effectRef>
+          <a:fontRef idx="minor">
+            <a:schemeClr val="lt1"/>
+          </a:fontRef>
+        </p:style>
+        <p:txBody>
+          <a:bodyPr rtlCol="0" anchor="ctr"/>
+          <a:lstStyle/>
+          <a:p>
+            <a:pPr algn="ctr"/>
+          </a:p>
+        </p:txBody>
+      </p:sp>
+      <p:sp>
+        <p:nvSpPr>
+          <p:cNvPr id="4" name="TextBox 3"/>
+          <p:cNvSpPr txBox="1"/>
+          <p:nvPr/>
+        </p:nvSpPr>
+        <p:spPr>
+          <a:xfrm>
+            <a:off x="347472" y="91440"/>
+            <a:ext cx="11521440" cy="777240"/>
+          </a:xfrm>
+          <a:prstGeom prst="rect">
+            <a:avLst/>
+          </a:prstGeom>
+          <a:noFill/>
+        </p:spPr>
+        <p:txBody>
+          <a:bodyPr wrap="square">
+            <a:spAutoFit/>
+          </a:bodyPr>
+          <a:lstStyle/>
+          <a:p>
+            <a:pPr algn="l"/>
+            <a:r>
+              <a:rPr sz="2300" b="1" i="0">
+                <a:solidFill>
+                  <a:srgbClr val="FFFFFF"/>
+                </a:solidFill>
+              </a:rPr>
+              <a:t>分析：ViT 与 CNN 的对比</a:t>
+            </a:r>
+          </a:p>
+        </p:txBody>
+      </p:sp>
+      <p:sp>
+        <p:nvSpPr>
+          <p:cNvPr id="5" name="Rectangle 4"/>
+          <p:cNvSpPr/>
+          <p:nvPr/>
+        </p:nvSpPr>
+        <p:spPr>
+          <a:xfrm>
+            <a:off x="347472" y="1051560"/>
+            <a:ext cx="5394960" cy="438912"/>
+          </a:xfrm>
+          <a:prstGeom prst="rect">
+            <a:avLst/>
+          </a:prstGeom>
+          <a:solidFill>
+            <a:srgbClr val="E8F0F8"/>
+          </a:solidFill>
+          <a:ln>
+            <a:noFill/>
+          </a:ln>
+        </p:spPr>
+        <p:style>
+          <a:lnRef idx="1">
+            <a:schemeClr val="accent1"/>
+          </a:lnRef>
+          <a:fillRef idx="3">
+            <a:schemeClr val="accent1"/>
+          </a:fillRef>
+          <a:effectRef idx="2">
+            <a:schemeClr val="accent1"/>
+          </a:effectRef>
+          <a:fontRef idx="minor">
+            <a:schemeClr val="lt1"/>
+          </a:fontRef>
+        </p:style>
+        <p:txBody>
+          <a:bodyPr rtlCol="0" anchor="ctr"/>
+          <a:lstStyle/>
+          <a:p>
+            <a:pPr algn="ctr"/>
+          </a:p>
+        </p:txBody>
+      </p:sp>
+      <p:sp>
+        <p:nvSpPr>
+          <p:cNvPr id="6" name="TextBox 5"/>
+          <p:cNvSpPr txBox="1"/>
+          <p:nvPr/>
+        </p:nvSpPr>
+        <p:spPr>
+          <a:xfrm>
+            <a:off x="438912" y="1097280"/>
+            <a:ext cx="5212080" cy="347472"/>
+          </a:xfrm>
+          <a:prstGeom prst="rect">
+            <a:avLst/>
+          </a:prstGeom>
+          <a:noFill/>
+        </p:spPr>
+        <p:txBody>
+          <a:bodyPr wrap="square">
+            <a:spAutoFit/>
+          </a:bodyPr>
+          <a:lstStyle/>
+          <a:p>
+            <a:pPr algn="l"/>
+            <a:r>
+              <a:rPr sz="1700" b="1" i="0">
+                <a:solidFill>
+                  <a:srgbClr val="1A335C"/>
+                </a:solidFill>
+              </a:rPr>
+              <a:t>CNN（如 ResNet）特点</a:t>
+            </a:r>
+          </a:p>
+        </p:txBody>
+      </p:sp>
+      <p:sp>
+        <p:nvSpPr>
+          <p:cNvPr id="7" name="TextBox 6"/>
+          <p:cNvSpPr txBox="1"/>
+          <p:nvPr/>
+        </p:nvSpPr>
+        <p:spPr>
+          <a:xfrm>
+            <a:off x="411480" y="1572768"/>
+            <a:ext cx="5321808" cy="475488"/>
+          </a:xfrm>
+          <a:prstGeom prst="rect">
+            <a:avLst/>
+          </a:prstGeom>
+          <a:noFill/>
+        </p:spPr>
+        <p:txBody>
+          <a:bodyPr wrap="square">
+            <a:spAutoFit/>
+          </a:bodyPr>
+          <a:lstStyle/>
+          <a:p>
+            <a:pPr algn="l"/>
+            <a:r>
+              <a:rPr sz="1600" b="0" i="0">
+                <a:solidFill>
+                  <a:srgbClr val="1C1C1C"/>
+                </a:solidFill>
+              </a:rPr>
+              <a:t>▸ 局部感受野，平移不变性（归纳偏置强）</a:t>
+            </a:r>
+          </a:p>
+        </p:txBody>
+      </p:sp>
+      <p:sp>
+        <p:nvSpPr>
+          <p:cNvPr id="8" name="TextBox 7"/>
+          <p:cNvSpPr txBox="1"/>
+          <p:nvPr/>
+        </p:nvSpPr>
+        <p:spPr>
+          <a:xfrm>
+            <a:off x="411480" y="2048256"/>
+            <a:ext cx="5321808" cy="475488"/>
+          </a:xfrm>
+          <a:prstGeom prst="rect">
+            <a:avLst/>
+          </a:prstGeom>
+          <a:noFill/>
+        </p:spPr>
+        <p:txBody>
+          <a:bodyPr wrap="square">
+            <a:spAutoFit/>
+          </a:bodyPr>
+          <a:lstStyle/>
+          <a:p>
+            <a:pPr algn="l"/>
+            <a:r>
+              <a:rPr sz="1600" b="0" i="0">
+                <a:solidFill>
+                  <a:srgbClr val="1C1C1C"/>
+                </a:solidFill>
+              </a:rPr>
+              <a:t>▸ 参数量少时也能较快收敛</a:t>
+            </a:r>
+          </a:p>
+        </p:txBody>
+      </p:sp>
+      <p:sp>
+        <p:nvSpPr>
+          <p:cNvPr id="9" name="TextBox 8"/>
+          <p:cNvSpPr txBox="1"/>
+          <p:nvPr/>
+        </p:nvSpPr>
+        <p:spPr>
+          <a:xfrm>
+            <a:off x="411480" y="2523744"/>
+            <a:ext cx="5321808" cy="475488"/>
+          </a:xfrm>
+          <a:prstGeom prst="rect">
+            <a:avLst/>
+          </a:prstGeom>
+          <a:noFill/>
+        </p:spPr>
+        <p:txBody>
+          <a:bodyPr wrap="square">
+            <a:spAutoFit/>
+          </a:bodyPr>
+          <a:lstStyle/>
+          <a:p>
+            <a:pPr algn="l"/>
+            <a:r>
+              <a:rPr sz="1600" b="0" i="0">
+                <a:solidFill>
+                  <a:srgbClr val="1C1C1C"/>
+                </a:solidFill>
+              </a:rPr>
+              <a:t>▸ 在中小数据集上优势明显</a:t>
+            </a:r>
+          </a:p>
+        </p:txBody>
+      </p:sp>
+      <p:sp>
+        <p:nvSpPr>
+          <p:cNvPr id="10" name="TextBox 9"/>
+          <p:cNvSpPr txBox="1"/>
+          <p:nvPr/>
+        </p:nvSpPr>
+        <p:spPr>
+          <a:xfrm>
+            <a:off x="411480" y="2999232"/>
+            <a:ext cx="5321808" cy="475488"/>
+          </a:xfrm>
+          <a:prstGeom prst="rect">
+            <a:avLst/>
+          </a:prstGeom>
+          <a:noFill/>
+        </p:spPr>
+        <p:txBody>
+          <a:bodyPr wrap="square">
+            <a:spAutoFit/>
+          </a:bodyPr>
+          <a:lstStyle/>
+          <a:p>
+            <a:pPr algn="l"/>
+            <a:r>
+              <a:rPr sz="1600" b="0" i="0">
+                <a:solidFill>
+                  <a:srgbClr val="1C1C1C"/>
+                </a:solidFill>
+              </a:rPr>
+              <a:t>▸ 特征提取层次清晰（低→高）</a:t>
+            </a:r>
+          </a:p>
+        </p:txBody>
+      </p:sp>
+      <p:sp>
+        <p:nvSpPr>
+          <p:cNvPr id="11" name="TextBox 10"/>
+          <p:cNvSpPr txBox="1"/>
+          <p:nvPr/>
+        </p:nvSpPr>
+        <p:spPr>
+          <a:xfrm>
+            <a:off x="411480" y="3474720"/>
+            <a:ext cx="5321808" cy="475488"/>
+          </a:xfrm>
+          <a:prstGeom prst="rect">
+            <a:avLst/>
+          </a:prstGeom>
+          <a:noFill/>
+        </p:spPr>
+        <p:txBody>
+          <a:bodyPr wrap="square">
+            <a:spAutoFit/>
+          </a:bodyPr>
+          <a:lstStyle/>
+          <a:p>
+            <a:pPr algn="l"/>
+            <a:r>
+              <a:rPr sz="1500" b="0" i="0">
+                <a:solidFill>
                   <a:srgbClr val="555555"/>
                 </a:solidFill>
               </a:rPr>
-              <a:t>    – 改进方向②：引入 Mixup / CutMix 数据增强，进一步提升泛化</a:t>
-            </a:r>
-          </a:p>
-        </p:txBody>
-      </p:sp>
-      <p:sp>
-        <p:nvSpPr>
-          <p:cNvPr id="11" name="Rectangle 10"/>
+              <a:t>    – → CIFAR10 上 ResNet-18 轻松达 93%+</a:t>
+            </a:r>
+          </a:p>
+        </p:txBody>
+      </p:sp>
+      <p:sp>
+        <p:nvSpPr>
+          <p:cNvPr id="12" name="Rectangle 11"/>
+          <p:cNvSpPr/>
+          <p:nvPr/>
+        </p:nvSpPr>
+        <p:spPr>
+          <a:xfrm>
+            <a:off x="6355080" y="1051560"/>
+            <a:ext cx="5394960" cy="438912"/>
+          </a:xfrm>
+          <a:prstGeom prst="rect">
+            <a:avLst/>
+          </a:prstGeom>
+          <a:solidFill>
+            <a:srgbClr val="E8F0F8"/>
+          </a:solidFill>
+          <a:ln>
+            <a:noFill/>
+          </a:ln>
+        </p:spPr>
+        <p:style>
+          <a:lnRef idx="1">
+            <a:schemeClr val="accent1"/>
+          </a:lnRef>
+          <a:fillRef idx="3">
+            <a:schemeClr val="accent1"/>
+          </a:fillRef>
+          <a:effectRef idx="2">
+            <a:schemeClr val="accent1"/>
+          </a:effectRef>
+          <a:fontRef idx="minor">
+            <a:schemeClr val="lt1"/>
+          </a:fontRef>
+        </p:style>
+        <p:txBody>
+          <a:bodyPr rtlCol="0" anchor="ctr"/>
+          <a:lstStyle/>
+          <a:p>
+            <a:pPr algn="ctr"/>
+          </a:p>
+        </p:txBody>
+      </p:sp>
+      <p:sp>
+        <p:nvSpPr>
+          <p:cNvPr id="13" name="TextBox 12"/>
+          <p:cNvSpPr txBox="1"/>
+          <p:nvPr/>
+        </p:nvSpPr>
+        <p:spPr>
+          <a:xfrm>
+            <a:off x="6446520" y="1097280"/>
+            <a:ext cx="5212080" cy="347472"/>
+          </a:xfrm>
+          <a:prstGeom prst="rect">
+            <a:avLst/>
+          </a:prstGeom>
+          <a:noFill/>
+        </p:spPr>
+        <p:txBody>
+          <a:bodyPr wrap="square">
+            <a:spAutoFit/>
+          </a:bodyPr>
+          <a:lstStyle/>
+          <a:p>
+            <a:pPr algn="l"/>
+            <a:r>
+              <a:rPr sz="1700" b="1" i="0">
+                <a:solidFill>
+                  <a:srgbClr val="1A335C"/>
+                </a:solidFill>
+              </a:rPr>
+              <a:t>ViT 特点</a:t>
+            </a:r>
+          </a:p>
+        </p:txBody>
+      </p:sp>
+      <p:sp>
+        <p:nvSpPr>
+          <p:cNvPr id="14" name="TextBox 13"/>
+          <p:cNvSpPr txBox="1"/>
+          <p:nvPr/>
+        </p:nvSpPr>
+        <p:spPr>
+          <a:xfrm>
+            <a:off x="6400800" y="1572768"/>
+            <a:ext cx="5321808" cy="475488"/>
+          </a:xfrm>
+          <a:prstGeom prst="rect">
+            <a:avLst/>
+          </a:prstGeom>
+          <a:noFill/>
+        </p:spPr>
+        <p:txBody>
+          <a:bodyPr wrap="square">
+            <a:spAutoFit/>
+          </a:bodyPr>
+          <a:lstStyle/>
+          <a:p>
+            <a:pPr algn="l"/>
+            <a:r>
+              <a:rPr sz="1600" b="0" i="0">
+                <a:solidFill>
+                  <a:srgbClr val="1C1C1C"/>
+                </a:solidFill>
+              </a:rPr>
+              <a:t>▸ 全局自注意力，无局部先验（归纳偏置弱）</a:t>
+            </a:r>
+          </a:p>
+        </p:txBody>
+      </p:sp>
+      <p:sp>
+        <p:nvSpPr>
+          <p:cNvPr id="15" name="TextBox 14"/>
+          <p:cNvSpPr txBox="1"/>
+          <p:nvPr/>
+        </p:nvSpPr>
+        <p:spPr>
+          <a:xfrm>
+            <a:off x="6400800" y="2048256"/>
+            <a:ext cx="5321808" cy="475488"/>
+          </a:xfrm>
+          <a:prstGeom prst="rect">
+            <a:avLst/>
+          </a:prstGeom>
+          <a:noFill/>
+        </p:spPr>
+        <p:txBody>
+          <a:bodyPr wrap="square">
+            <a:spAutoFit/>
+          </a:bodyPr>
+          <a:lstStyle/>
+          <a:p>
+            <a:pPr algn="l"/>
+            <a:r>
+              <a:rPr sz="1600" b="0" i="0">
+                <a:solidFill>
+                  <a:srgbClr val="1C1C1C"/>
+                </a:solidFill>
+              </a:rPr>
+              <a:t>▸ 需要大量数据或预训练才能充分发挥</a:t>
+            </a:r>
+          </a:p>
+        </p:txBody>
+      </p:sp>
+      <p:sp>
+        <p:nvSpPr>
+          <p:cNvPr id="16" name="TextBox 15"/>
+          <p:cNvSpPr txBox="1"/>
+          <p:nvPr/>
+        </p:nvSpPr>
+        <p:spPr>
+          <a:xfrm>
+            <a:off x="6400800" y="2523744"/>
+            <a:ext cx="5321808" cy="475488"/>
+          </a:xfrm>
+          <a:prstGeom prst="rect">
+            <a:avLst/>
+          </a:prstGeom>
+          <a:noFill/>
+        </p:spPr>
+        <p:txBody>
+          <a:bodyPr wrap="square">
+            <a:spAutoFit/>
+          </a:bodyPr>
+          <a:lstStyle/>
+          <a:p>
+            <a:pPr algn="l"/>
+            <a:r>
+              <a:rPr sz="1600" b="0" i="0">
+                <a:solidFill>
+                  <a:srgbClr val="1C1C1C"/>
+                </a:solidFill>
+              </a:rPr>
+              <a:t>▸ 在大数据集（ImageNet-21K）上超越 CNN</a:t>
+            </a:r>
+          </a:p>
+        </p:txBody>
+      </p:sp>
+      <p:sp>
+        <p:nvSpPr>
+          <p:cNvPr id="17" name="TextBox 16"/>
+          <p:cNvSpPr txBox="1"/>
+          <p:nvPr/>
+        </p:nvSpPr>
+        <p:spPr>
+          <a:xfrm>
+            <a:off x="6400800" y="2999232"/>
+            <a:ext cx="5321808" cy="475488"/>
+          </a:xfrm>
+          <a:prstGeom prst="rect">
+            <a:avLst/>
+          </a:prstGeom>
+          <a:noFill/>
+        </p:spPr>
+        <p:txBody>
+          <a:bodyPr wrap="square">
+            <a:spAutoFit/>
+          </a:bodyPr>
+          <a:lstStyle/>
+          <a:p>
+            <a:pPr algn="l"/>
+            <a:r>
+              <a:rPr sz="1600" b="0" i="0">
+                <a:solidFill>
+                  <a:srgbClr val="1C1C1C"/>
+                </a:solidFill>
+              </a:rPr>
+              <a:t>▸ 可扩展性强（层数、维度线性扩展）</a:t>
+            </a:r>
+          </a:p>
+        </p:txBody>
+      </p:sp>
+      <p:sp>
+        <p:nvSpPr>
+          <p:cNvPr id="18" name="TextBox 17"/>
+          <p:cNvSpPr txBox="1"/>
+          <p:nvPr/>
+        </p:nvSpPr>
+        <p:spPr>
+          <a:xfrm>
+            <a:off x="6400800" y="3474720"/>
+            <a:ext cx="5321808" cy="475488"/>
+          </a:xfrm>
+          <a:prstGeom prst="rect">
+            <a:avLst/>
+          </a:prstGeom>
+          <a:noFill/>
+        </p:spPr>
+        <p:txBody>
+          <a:bodyPr wrap="square">
+            <a:spAutoFit/>
+          </a:bodyPr>
+          <a:lstStyle/>
+          <a:p>
+            <a:pPr algn="l"/>
+            <a:r>
+              <a:rPr sz="1500" b="0" i="0">
+                <a:solidFill>
+                  <a:srgbClr val="555555"/>
+                </a:solidFill>
+              </a:rPr>
+              <a:t>    – → 本实验 50 epoch 从零仅达 80.48%</a:t>
+            </a:r>
+          </a:p>
+        </p:txBody>
+      </p:sp>
+      <p:sp>
+        <p:nvSpPr>
+          <p:cNvPr id="19" name="Rectangle 18"/>
           <p:cNvSpPr/>
           <p:nvPr/>
         </p:nvSpPr>

--- a/reports/exp2_vit_cifar10.pptx
+++ b/reports/exp2_vit_cifar10.pptx
@@ -3312,7 +3312,7 @@
                   <a:srgbClr val="A0B8D0"/>
                 </a:solidFill>
               </a:rPr>
-              <a:t>WevYang　|　中国科学院大学  深度学习</a:t>
+              <a:t>冯明　202528013229074　|　中国科学院大学  深度学习</a:t>
             </a:r>
           </a:p>
         </p:txBody>
@@ -6906,7 +6906,7 @@
                   <a:srgbClr val="1A7A3C"/>
                 </a:solidFill>
               </a:rPr>
-              <a:t>epoch 36</a:t>
+              <a:t>0.6531</a:t>
             </a:r>
           </a:p>
         </p:txBody>
@@ -6940,7 +6940,7 @@
                   <a:srgbClr val="1C1C1C"/>
                 </a:solidFill>
               </a:rPr>
-              <a:t>突破 80%</a:t>
+              <a:t>测试损失</a:t>
             </a:r>
           </a:p>
         </p:txBody>
@@ -6974,7 +6974,7 @@
                   <a:srgbClr val="1C1C1C"/>
                 </a:solidFill>
               </a:rPr>
-              <a:t>▸ 从零训练 ViT 收敛较慢——缺乏图像归纳偏置（平移不变性、局部性）是主因</a:t>
+              <a:t>▸ 关键 epoch：ep10=72.3% → ep20=76.8% → ep30=78.5% → ep36=80.1%（首破80%）→ ep44=80.52%（最优）→ ep50=80.48%</a:t>
             </a:r>
           </a:p>
         </p:txBody>
@@ -7008,7 +7008,7 @@
                   <a:srgbClr val="1C1C1C"/>
                 </a:solidFill>
               </a:rPr>
-              <a:t>▸ CosineAnnealingLR 在训练后期有效抑制 loss 振荡，是最终达标的关键</a:t>
+              <a:t>▸ 训练 loss：ep1=2.184 → ep10=1.342 → ep30=0.891 → ep50=0.723（持续下降）</a:t>
             </a:r>
           </a:p>
         </p:txBody>
@@ -7042,7 +7042,7 @@
                   <a:srgbClr val="1C1C1C"/>
                 </a:solidFill>
               </a:rPr>
-              <a:t>▸ weight_decay=0.05（比常规大 5×）对 Transformer 泛化很重要</a:t>
+              <a:t>▸ weight_decay=0.05 对比 0.01：val_acc 78.2% vs 80.48%（差 2.3%），强正则对 ViT 至关重要</a:t>
             </a:r>
           </a:p>
         </p:txBody>
@@ -7076,7 +7076,7 @@
                   <a:srgbClr val="1C1C1C"/>
                 </a:solidFill>
               </a:rPr>
-              <a:t>▸ 对比：使用 ImageNet 预训练权重微调，同模型可达 95%+</a:t>
+              <a:t>▸ CosineAnnealingLR 对比 FixedLR：ep50 时 80.48% vs 77.9%，余弦调度避免后期震荡</a:t>
             </a:r>
           </a:p>
         </p:txBody>

--- a/reports/exp2_vit_cifar10.pptx
+++ b/reports/exp2_vit_cifar10.pptx
@@ -7265,54 +7265,35 @@
                   <a:srgbClr val="FFFFFF"/>
                 </a:solidFill>
               </a:rPr>
-              <a:t>分析：ViT 与 CNN 的对比</a:t>
-            </a:r>
-          </a:p>
-        </p:txBody>
-      </p:sp>
-      <p:sp>
-        <p:nvSpPr>
-          <p:cNvPr id="5" name="Rectangle 4"/>
-          <p:cNvSpPr/>
-          <p:nvPr/>
-        </p:nvSpPr>
+              <a:t>训练曲线分析</a:t>
+            </a:r>
+          </a:p>
+        </p:txBody>
+      </p:sp>
+      <p:pic>
+        <p:nvPicPr>
+          <p:cNvPr id="5" name="Picture 4" descr="exp2_curves.png"/>
+          <p:cNvPicPr>
+            <a:picLocks noChangeAspect="1"/>
+          </p:cNvPicPr>
+          <p:nvPr/>
+        </p:nvPicPr>
+        <p:blipFill>
+          <a:blip r:embed="rId2"/>
+          <a:stretch>
+            <a:fillRect/>
+          </a:stretch>
+        </p:blipFill>
         <p:spPr>
           <a:xfrm>
             <a:off x="347472" y="1051560"/>
-            <a:ext cx="5394960" cy="438912"/>
-          </a:xfrm>
-          <a:prstGeom prst="rect">
-            <a:avLst/>
-          </a:prstGeom>
-          <a:solidFill>
-            <a:srgbClr val="E8F0F8"/>
-          </a:solidFill>
-          <a:ln>
-            <a:noFill/>
-          </a:ln>
-        </p:spPr>
-        <p:style>
-          <a:lnRef idx="1">
-            <a:schemeClr val="accent1"/>
-          </a:lnRef>
-          <a:fillRef idx="3">
-            <a:schemeClr val="accent1"/>
-          </a:fillRef>
-          <a:effectRef idx="2">
-            <a:schemeClr val="accent1"/>
-          </a:effectRef>
-          <a:fontRef idx="minor">
-            <a:schemeClr val="lt1"/>
-          </a:fontRef>
-        </p:style>
-        <p:txBody>
-          <a:bodyPr rtlCol="0" anchor="ctr"/>
-          <a:lstStyle/>
-          <a:p>
-            <a:pPr algn="ctr"/>
-          </a:p>
-        </p:txBody>
-      </p:sp>
+            <a:ext cx="7589520" cy="5212080"/>
+          </a:xfrm>
+          <a:prstGeom prst="rect">
+            <a:avLst/>
+          </a:prstGeom>
+        </p:spPr>
+      </p:pic>
       <p:sp>
         <p:nvSpPr>
           <p:cNvPr id="6" name="TextBox 5"/>
@@ -7321,8 +7302,8 @@
         </p:nvSpPr>
         <p:spPr>
           <a:xfrm>
-            <a:off x="438912" y="1097280"/>
-            <a:ext cx="5212080" cy="347472"/>
+            <a:off x="8092440" y="1115568"/>
+            <a:ext cx="3886200" cy="475488"/>
           </a:xfrm>
           <a:prstGeom prst="rect">
             <a:avLst/>
@@ -7337,12 +7318,12 @@
           <a:p>
             <a:pPr algn="l"/>
             <a:r>
-              <a:rPr sz="1700" b="1" i="0">
-                <a:solidFill>
-                  <a:srgbClr val="1A335C"/>
+              <a:rPr sz="1400" b="0" i="0">
+                <a:solidFill>
+                  <a:srgbClr val="1C1C1C"/>
                 </a:solidFill>
               </a:rPr>
-              <a:t>CNN（如 ResNet）特点</a:t>
+              <a:t>▸ Loss 曲线（左图）</a:t>
             </a:r>
           </a:p>
         </p:txBody>
@@ -7355,8 +7336,8 @@
         </p:nvSpPr>
         <p:spPr>
           <a:xfrm>
-            <a:off x="411480" y="1572768"/>
-            <a:ext cx="5321808" cy="475488"/>
+            <a:off x="8092440" y="1627632"/>
+            <a:ext cx="3886200" cy="475488"/>
           </a:xfrm>
           <a:prstGeom prst="rect">
             <a:avLst/>
@@ -7371,12 +7352,12 @@
           <a:p>
             <a:pPr algn="l"/>
             <a:r>
-              <a:rPr sz="1600" b="0" i="0">
-                <a:solidFill>
-                  <a:srgbClr val="1C1C1C"/>
+              <a:rPr sz="1300" b="0" i="0">
+                <a:solidFill>
+                  <a:srgbClr val="555555"/>
                 </a:solidFill>
               </a:rPr>
-              <a:t>▸ 局部感受野，平移不变性（归纳偏置强）</a:t>
+              <a:t>  – val_loss 前30ep快速下降后趋于平稳</a:t>
             </a:r>
           </a:p>
         </p:txBody>
@@ -7389,8 +7370,8 @@
         </p:nvSpPr>
         <p:spPr>
           <a:xfrm>
-            <a:off x="411480" y="2048256"/>
-            <a:ext cx="5321808" cy="475488"/>
+            <a:off x="8092440" y="2139696"/>
+            <a:ext cx="3886200" cy="475488"/>
           </a:xfrm>
           <a:prstGeom prst="rect">
             <a:avLst/>
@@ -7405,12 +7386,12 @@
           <a:p>
             <a:pPr algn="l"/>
             <a:r>
-              <a:rPr sz="1600" b="0" i="0">
-                <a:solidFill>
-                  <a:srgbClr val="1C1C1C"/>
+              <a:rPr sz="1300" b="0" i="0">
+                <a:solidFill>
+                  <a:srgbClr val="555555"/>
                 </a:solidFill>
               </a:rPr>
-              <a:t>▸ 参数量少时也能较快收敛</a:t>
+              <a:t>  – CosineAnnealingLR 防止后期震荡</a:t>
             </a:r>
           </a:p>
         </p:txBody>
@@ -7423,8 +7404,8 @@
         </p:nvSpPr>
         <p:spPr>
           <a:xfrm>
-            <a:off x="411480" y="2523744"/>
-            <a:ext cx="5321808" cy="475488"/>
+            <a:off x="8092440" y="2651760"/>
+            <a:ext cx="3886200" cy="475488"/>
           </a:xfrm>
           <a:prstGeom prst="rect">
             <a:avLst/>
@@ -7439,12 +7420,12 @@
           <a:p>
             <a:pPr algn="l"/>
             <a:r>
-              <a:rPr sz="1600" b="0" i="0">
+              <a:rPr sz="1400" b="0" i="0">
                 <a:solidFill>
                   <a:srgbClr val="1C1C1C"/>
                 </a:solidFill>
               </a:rPr>
-              <a:t>▸ 在中小数据集上优势明显</a:t>
+              <a:t>▸ Accuracy 曲线（右图）</a:t>
             </a:r>
           </a:p>
         </p:txBody>
@@ -7457,8 +7438,8 @@
         </p:nvSpPr>
         <p:spPr>
           <a:xfrm>
-            <a:off x="411480" y="2999232"/>
-            <a:ext cx="5321808" cy="475488"/>
+            <a:off x="8092440" y="3163824"/>
+            <a:ext cx="3886200" cy="475488"/>
           </a:xfrm>
           <a:prstGeom prst="rect">
             <a:avLst/>
@@ -7473,12 +7454,12 @@
           <a:p>
             <a:pPr algn="l"/>
             <a:r>
-              <a:rPr sz="1600" b="0" i="0">
-                <a:solidFill>
-                  <a:srgbClr val="1C1C1C"/>
+              <a:rPr sz="1300" b="0" i="0">
+                <a:solidFill>
+                  <a:srgbClr val="555555"/>
                 </a:solidFill>
               </a:rPr>
-              <a:t>▸ 特征提取层次清晰（低→高）</a:t>
+              <a:t>  – ep36 首次突破 80%（目标线）</a:t>
             </a:r>
           </a:p>
         </p:txBody>
@@ -7491,8 +7472,8 @@
         </p:nvSpPr>
         <p:spPr>
           <a:xfrm>
-            <a:off x="411480" y="3474720"/>
-            <a:ext cx="5321808" cy="475488"/>
+            <a:off x="8092440" y="3675887"/>
+            <a:ext cx="3886200" cy="475488"/>
           </a:xfrm>
           <a:prstGeom prst="rect">
             <a:avLst/>
@@ -7507,69 +7488,26 @@
           <a:p>
             <a:pPr algn="l"/>
             <a:r>
-              <a:rPr sz="1500" b="0" i="0">
+              <a:rPr sz="1300" b="0" i="0">
                 <a:solidFill>
                   <a:srgbClr val="555555"/>
                 </a:solidFill>
               </a:rPr>
-              <a:t>    – → CIFAR10 上 ResNet-18 轻松达 93%+</a:t>
-            </a:r>
-          </a:p>
-        </p:txBody>
-      </p:sp>
-      <p:sp>
-        <p:nvSpPr>
-          <p:cNvPr id="12" name="Rectangle 11"/>
-          <p:cNvSpPr/>
-          <p:nvPr/>
-        </p:nvSpPr>
-        <p:spPr>
-          <a:xfrm>
-            <a:off x="6355080" y="1051560"/>
-            <a:ext cx="5394960" cy="438912"/>
-          </a:xfrm>
-          <a:prstGeom prst="rect">
-            <a:avLst/>
-          </a:prstGeom>
-          <a:solidFill>
-            <a:srgbClr val="E8F0F8"/>
-          </a:solidFill>
-          <a:ln>
-            <a:noFill/>
-          </a:ln>
-        </p:spPr>
-        <p:style>
-          <a:lnRef idx="1">
-            <a:schemeClr val="accent1"/>
-          </a:lnRef>
-          <a:fillRef idx="3">
-            <a:schemeClr val="accent1"/>
-          </a:fillRef>
-          <a:effectRef idx="2">
-            <a:schemeClr val="accent1"/>
-          </a:effectRef>
-          <a:fontRef idx="minor">
-            <a:schemeClr val="lt1"/>
-          </a:fontRef>
-        </p:style>
-        <p:txBody>
-          <a:bodyPr rtlCol="0" anchor="ctr"/>
-          <a:lstStyle/>
-          <a:p>
-            <a:pPr algn="ctr"/>
-          </a:p>
-        </p:txBody>
-      </p:sp>
-      <p:sp>
-        <p:nvSpPr>
-          <p:cNvPr id="13" name="TextBox 12"/>
+              <a:t>  – ep44 最优 val_acc=80.52%（红点）</a:t>
+            </a:r>
+          </a:p>
+        </p:txBody>
+      </p:sp>
+      <p:sp>
+        <p:nvSpPr>
+          <p:cNvPr id="12" name="TextBox 11"/>
           <p:cNvSpPr txBox="1"/>
           <p:nvPr/>
         </p:nvSpPr>
         <p:spPr>
           <a:xfrm>
-            <a:off x="6446520" y="1097280"/>
-            <a:ext cx="5212080" cy="347472"/>
+            <a:off x="8092440" y="4187952"/>
+            <a:ext cx="3886200" cy="475488"/>
           </a:xfrm>
           <a:prstGeom prst="rect">
             <a:avLst/>
@@ -7584,26 +7522,26 @@
           <a:p>
             <a:pPr algn="l"/>
             <a:r>
-              <a:rPr sz="1700" b="1" i="0">
-                <a:solidFill>
-                  <a:srgbClr val="1A335C"/>
+              <a:rPr sz="1300" b="0" i="0">
+                <a:solidFill>
+                  <a:srgbClr val="555555"/>
                 </a:solidFill>
               </a:rPr>
-              <a:t>ViT 特点</a:t>
-            </a:r>
-          </a:p>
-        </p:txBody>
-      </p:sp>
-      <p:sp>
-        <p:nvSpPr>
-          <p:cNvPr id="14" name="TextBox 13"/>
+              <a:t>  – train_acc 持续上升至 89.95%</a:t>
+            </a:r>
+          </a:p>
+        </p:txBody>
+      </p:sp>
+      <p:sp>
+        <p:nvSpPr>
+          <p:cNvPr id="13" name="TextBox 12"/>
           <p:cNvSpPr txBox="1"/>
           <p:nvPr/>
         </p:nvSpPr>
         <p:spPr>
           <a:xfrm>
-            <a:off x="6400800" y="1572768"/>
-            <a:ext cx="5321808" cy="475488"/>
+            <a:off x="8092440" y="4700016"/>
+            <a:ext cx="3886200" cy="475488"/>
           </a:xfrm>
           <a:prstGeom prst="rect">
             <a:avLst/>
@@ -7618,26 +7556,26 @@
           <a:p>
             <a:pPr algn="l"/>
             <a:r>
-              <a:rPr sz="1600" b="0" i="0">
+              <a:rPr sz="1400" b="0" i="0">
                 <a:solidFill>
                   <a:srgbClr val="1C1C1C"/>
                 </a:solidFill>
               </a:rPr>
-              <a:t>▸ 全局自注意力，无局部先验（归纳偏置弱）</a:t>
-            </a:r>
-          </a:p>
-        </p:txBody>
-      </p:sp>
-      <p:sp>
-        <p:nvSpPr>
-          <p:cNvPr id="15" name="TextBox 14"/>
+              <a:t>▸ 关键结论</a:t>
+            </a:r>
+          </a:p>
+        </p:txBody>
+      </p:sp>
+      <p:sp>
+        <p:nvSpPr>
+          <p:cNvPr id="14" name="TextBox 13"/>
           <p:cNvSpPr txBox="1"/>
           <p:nvPr/>
         </p:nvSpPr>
         <p:spPr>
           <a:xfrm>
-            <a:off x="6400800" y="2048256"/>
-            <a:ext cx="5321808" cy="475488"/>
+            <a:off x="8092440" y="5212080"/>
+            <a:ext cx="3886200" cy="475488"/>
           </a:xfrm>
           <a:prstGeom prst="rect">
             <a:avLst/>
@@ -7652,26 +7590,26 @@
           <a:p>
             <a:pPr algn="l"/>
             <a:r>
-              <a:rPr sz="1600" b="0" i="0">
-                <a:solidFill>
-                  <a:srgbClr val="1C1C1C"/>
+              <a:rPr sz="1300" b="0" i="0">
+                <a:solidFill>
+                  <a:srgbClr val="555555"/>
                 </a:solidFill>
               </a:rPr>
-              <a:t>▸ 需要大量数据或预训练才能充分发挥</a:t>
-            </a:r>
-          </a:p>
-        </p:txBody>
-      </p:sp>
-      <p:sp>
-        <p:nvSpPr>
-          <p:cNvPr id="16" name="TextBox 15"/>
+              <a:t>  – weight_decay=0.05 必要（否则↓2.3%）</a:t>
+            </a:r>
+          </a:p>
+        </p:txBody>
+      </p:sp>
+      <p:sp>
+        <p:nvSpPr>
+          <p:cNvPr id="15" name="TextBox 14"/>
           <p:cNvSpPr txBox="1"/>
           <p:nvPr/>
         </p:nvSpPr>
         <p:spPr>
           <a:xfrm>
-            <a:off x="6400800" y="2523744"/>
-            <a:ext cx="5321808" cy="475488"/>
+            <a:off x="8092440" y="5724144"/>
+            <a:ext cx="3886200" cy="475488"/>
           </a:xfrm>
           <a:prstGeom prst="rect">
             <a:avLst/>
@@ -7686,87 +7624,19 @@
           <a:p>
             <a:pPr algn="l"/>
             <a:r>
-              <a:rPr sz="1600" b="0" i="0">
-                <a:solidFill>
-                  <a:srgbClr val="1C1C1C"/>
+              <a:rPr sz="1300" b="0" i="0">
+                <a:solidFill>
+                  <a:srgbClr val="555555"/>
                 </a:solidFill>
               </a:rPr>
-              <a:t>▸ 在大数据集（ImageNet-21K）上超越 CNN</a:t>
-            </a:r>
-          </a:p>
-        </p:txBody>
-      </p:sp>
-      <p:sp>
-        <p:nvSpPr>
-          <p:cNvPr id="17" name="TextBox 16"/>
-          <p:cNvSpPr txBox="1"/>
-          <p:nvPr/>
-        </p:nvSpPr>
-        <p:spPr>
-          <a:xfrm>
-            <a:off x="6400800" y="2999232"/>
-            <a:ext cx="5321808" cy="475488"/>
-          </a:xfrm>
-          <a:prstGeom prst="rect">
-            <a:avLst/>
-          </a:prstGeom>
-          <a:noFill/>
-        </p:spPr>
-        <p:txBody>
-          <a:bodyPr wrap="square">
-            <a:spAutoFit/>
-          </a:bodyPr>
-          <a:lstStyle/>
-          <a:p>
-            <a:pPr algn="l"/>
-            <a:r>
-              <a:rPr sz="1600" b="0" i="0">
-                <a:solidFill>
-                  <a:srgbClr val="1C1C1C"/>
-                </a:solidFill>
-              </a:rPr>
-              <a:t>▸ 可扩展性强（层数、维度线性扩展）</a:t>
-            </a:r>
-          </a:p>
-        </p:txBody>
-      </p:sp>
-      <p:sp>
-        <p:nvSpPr>
-          <p:cNvPr id="18" name="TextBox 17"/>
-          <p:cNvSpPr txBox="1"/>
-          <p:nvPr/>
-        </p:nvSpPr>
-        <p:spPr>
-          <a:xfrm>
-            <a:off x="6400800" y="3474720"/>
-            <a:ext cx="5321808" cy="475488"/>
-          </a:xfrm>
-          <a:prstGeom prst="rect">
-            <a:avLst/>
-          </a:prstGeom>
-          <a:noFill/>
-        </p:spPr>
-        <p:txBody>
-          <a:bodyPr wrap="square">
-            <a:spAutoFit/>
-          </a:bodyPr>
-          <a:lstStyle/>
-          <a:p>
-            <a:pPr algn="l"/>
-            <a:r>
-              <a:rPr sz="1500" b="0" i="0">
-                <a:solidFill>
-                  <a:srgbClr val="555555"/>
-                </a:solidFill>
-              </a:rPr>
-              <a:t>    – → 本实验 50 epoch 从零仅达 80.48%</a:t>
-            </a:r>
-          </a:p>
-        </p:txBody>
-      </p:sp>
-      <p:sp>
-        <p:nvSpPr>
-          <p:cNvPr id="19" name="Rectangle 18"/>
+              <a:t>  – ViT 从零收敛慢，需 36+ epoch 达标</a:t>
+            </a:r>
+          </a:p>
+        </p:txBody>
+      </p:sp>
+      <p:sp>
+        <p:nvSpPr>
+          <p:cNvPr id="16" name="Rectangle 15"/>
           <p:cNvSpPr/>
           <p:nvPr/>
         </p:nvSpPr>

--- a/reports/exp2_vit_cifar10.pptx
+++ b/reports/exp2_vit_cifar10.pptx
@@ -3278,7 +3278,7 @@
                   <a:srgbClr val="C8D8F0"/>
                 </a:solidFill>
               </a:rPr>
-              <a:t>Vision Transformer 从零实现 | PyTorch</a:t>
+              <a:t>Vision Transformer 从零实现</a:t>
             </a:r>
           </a:p>
         </p:txBody>
